--- a/docs/dao-tao/Slide-gioi-thieu-Tien-giam-dinh-lanh-dao.pptx
+++ b/docs/dao-tao/Slide-gioi-thieu-Tien-giam-dinh-lanh-dao.pptx
@@ -15,9 +15,11 @@
     <p:sldId id="263" r:id="rId9"/>
     <p:sldId id="264" r:id="rId10"/>
     <p:sldId id="265" r:id="rId11"/>
+    <p:sldId id="266" r:id="rId12"/>
+    <p:sldId id="267" r:id="rId13"/>
   </p:sldIdLst>
   <p:notesMasterIdLst>
-    <p:notesMasterId r:id="rId12"/>
+    <p:notesMasterId r:id="rId14"/>
   </p:notesMasterIdLst>
   <p:sldSz cx="12192000" cy="6858000"/>
   <p:notesSz cx="6858000" cy="12192000"/>
@@ -599,7 +601,7 @@
           <a:p>
             <a:r>
               <a:rPr lang="en-US" dirty="0"/>
-              <a:t>Nhắc lại ba từ khoá rồi mở hỏi đáp. Điền số điện thoại và email đầu mối trước khi trình bày. Câu hỏi hay gặp: HIS khác có dùng được không (xem slide Triển khai), có thay bộ phận giám định không (không — xem slide Nguyên tắc và giới hạn), chi phí và thời gian (xem slide Đề xuất thí điểm).</a:t>
+              <a:t>Trả lời câu hỏi lãnh đạo hay đặt ra: "mua về rồi quy định đổi thì sao?". Hai cam kết hiện tại: cập nhật quy tắc thường xuyên — Cổng tự động cập nhật, không cần cán bộ của viện can thiệp; và nâng cấp nền tảng miễn phí, đã có kế hoạch nâng cấp để đáp ứng tốc độ khi khối lượng hồ sơ tăng. Hai hướng phát triển: ứng dụng AI để tra soát lỗi thông minh, và tích hợp HIS sâu hơn để chủ động bắt lỗi logic (thời gian, mã đối tượng…) ngay trên HIS. Nói rõ ô "Lộ trình" là kế hoạch, không phải chức năng đã có. Rà lại phạm vi "miễn phí" với ban giám đốc công ty trước khi trình bày.</a:t>
             </a:r>
             <a:endParaRPr lang="en-US" dirty="0"/>
           </a:p>
@@ -623,6 +625,182 @@
             <a:fld id="{F7021451-1387-4CA6-816F-3879F97B5CBC}" type="slidenum">
               <a:rPr lang="en-US"/>
               <a:t>10</a:t>
+            </a:fld>
+            <a:endParaRPr lang="en-US"/>
+          </a:p>
+        </p:txBody>
+      </p:sp>
+    </p:spTree>
+    <p:extLst>
+      <p:ext uri="{BB962C8B-B14F-4D97-AF65-F5344CB8AC3E}">
+        <p14:creationId xmlns:p14="http://schemas.microsoft.com/office/powerpoint/2010/main" val="1024086991"/>
+      </p:ext>
+    </p:extLst>
+  </p:cSld>
+  <p:clrMapOvr>
+    <a:masterClrMapping/>
+  </p:clrMapOvr>
+</p:notes>
+</file>
+
+<file path=ppt/notesSlides/notesSlide11.xml><?xml version="1.0" encoding="utf-8"?>
+<p:notes xmlns:a="http://schemas.openxmlformats.org/drawingml/2006/main" xmlns:r="http://schemas.openxmlformats.org/officeDocument/2006/relationships" xmlns:p="http://schemas.openxmlformats.org/presentationml/2006/main">
+  <p:cSld>
+    <p:spTree>
+      <p:nvGrpSpPr>
+        <p:cNvPr id="1" name=""/>
+        <p:cNvGrpSpPr/>
+        <p:nvPr/>
+      </p:nvGrpSpPr>
+      <p:grpSpPr>
+        <a:xfrm>
+          <a:off x="0" y="0"/>
+          <a:ext cx="0" cy="0"/>
+          <a:chOff x="0" y="0"/>
+          <a:chExt cx="0" cy="0"/>
+        </a:xfrm>
+      </p:grpSpPr>
+      <p:sp>
+        <p:nvSpPr>
+          <p:cNvPr id="2" name="Slide Image Placeholder 1"/>
+          <p:cNvSpPr>
+            <a:spLocks noGrp="1" noRot="1" noChangeAspect="1"/>
+          </p:cNvSpPr>
+          <p:nvPr>
+            <p:ph type="sldImg"/>
+          </p:nvPr>
+        </p:nvSpPr>
+        <p:spPr/>
+      </p:sp>
+      <p:sp>
+        <p:nvSpPr>
+          <p:cNvPr id="3" name="Notes Placeholder 2"/>
+          <p:cNvSpPr>
+            <a:spLocks noGrp="1"/>
+          </p:cNvSpPr>
+          <p:nvPr>
+            <p:ph type="body" idx="1"/>
+          </p:nvPr>
+        </p:nvSpPr>
+        <p:spPr/>
+        <p:txBody>
+          <a:bodyPr/>
+          <a:lstStyle/>
+          <a:p>
+            <a:r>
+              <a:rPr lang="en-US" dirty="0"/>
+              <a:t>Slide quan trọng nhất với lãnh đạo: một quyết định nhỏ, rủi ro thấp, có thước đo rõ. Thí điểm chạy song song, chưa bật tự gửi cổng — nên không ảnh hưởng quy trình đang chạy. Bốn chỉ số theo tài liệu tổng hợp mục 10.3. ĐIỀN CHI PHÍ và rà lại dòng "Chúng tôi làm" theo đúng cam kết của công ty trước khi trình bày.</a:t>
+            </a:r>
+            <a:endParaRPr lang="en-US" dirty="0"/>
+          </a:p>
+        </p:txBody>
+      </p:sp>
+      <p:sp>
+        <p:nvSpPr>
+          <p:cNvPr id="4" name="Slide Number Placeholder 3"/>
+          <p:cNvSpPr>
+            <a:spLocks noGrp="1"/>
+          </p:cNvSpPr>
+          <p:nvPr>
+            <p:ph type="sldNum" sz="quarter" idx="10"/>
+          </p:nvPr>
+        </p:nvSpPr>
+        <p:spPr/>
+        <p:txBody>
+          <a:bodyPr/>
+          <a:lstStyle/>
+          <a:p>
+            <a:fld id="{F7021451-1387-4CA6-816F-3879F97B5CBC}" type="slidenum">
+              <a:rPr lang="en-US"/>
+              <a:t>11</a:t>
+            </a:fld>
+            <a:endParaRPr lang="en-US"/>
+          </a:p>
+        </p:txBody>
+      </p:sp>
+    </p:spTree>
+    <p:extLst>
+      <p:ext uri="{BB962C8B-B14F-4D97-AF65-F5344CB8AC3E}">
+        <p14:creationId xmlns:p14="http://schemas.microsoft.com/office/powerpoint/2010/main" val="1024086991"/>
+      </p:ext>
+    </p:extLst>
+  </p:cSld>
+  <p:clrMapOvr>
+    <a:masterClrMapping/>
+  </p:clrMapOvr>
+</p:notes>
+</file>
+
+<file path=ppt/notesSlides/notesSlide12.xml><?xml version="1.0" encoding="utf-8"?>
+<p:notes xmlns:a="http://schemas.openxmlformats.org/drawingml/2006/main" xmlns:r="http://schemas.openxmlformats.org/officeDocument/2006/relationships" xmlns:p="http://schemas.openxmlformats.org/presentationml/2006/main">
+  <p:cSld>
+    <p:spTree>
+      <p:nvGrpSpPr>
+        <p:cNvPr id="1" name=""/>
+        <p:cNvGrpSpPr/>
+        <p:nvPr/>
+      </p:nvGrpSpPr>
+      <p:grpSpPr>
+        <a:xfrm>
+          <a:off x="0" y="0"/>
+          <a:ext cx="0" cy="0"/>
+          <a:chOff x="0" y="0"/>
+          <a:chExt cx="0" cy="0"/>
+        </a:xfrm>
+      </p:grpSpPr>
+      <p:sp>
+        <p:nvSpPr>
+          <p:cNvPr id="2" name="Slide Image Placeholder 1"/>
+          <p:cNvSpPr>
+            <a:spLocks noGrp="1" noRot="1" noChangeAspect="1"/>
+          </p:cNvSpPr>
+          <p:nvPr>
+            <p:ph type="sldImg"/>
+          </p:nvPr>
+        </p:nvSpPr>
+        <p:spPr/>
+      </p:sp>
+      <p:sp>
+        <p:nvSpPr>
+          <p:cNvPr id="3" name="Notes Placeholder 2"/>
+          <p:cNvSpPr>
+            <a:spLocks noGrp="1"/>
+          </p:cNvSpPr>
+          <p:nvPr>
+            <p:ph type="body" idx="1"/>
+          </p:nvPr>
+        </p:nvSpPr>
+        <p:spPr/>
+        <p:txBody>
+          <a:bodyPr/>
+          <a:lstStyle/>
+          <a:p>
+            <a:r>
+              <a:rPr lang="en-US" dirty="0"/>
+              <a:t>Nhắc lại ba từ khoá rồi mở hỏi đáp. Điền số điện thoại và email đầu mối trước khi trình bày. Câu hỏi hay gặp: HIS khác có dùng được không (xem slide Triển khai), có thay bộ phận giám định không (không — xem slide Nguyên tắc và giới hạn), chi phí và thời gian (xem slide Đề xuất thí điểm).</a:t>
+            </a:r>
+            <a:endParaRPr lang="en-US" dirty="0"/>
+          </a:p>
+        </p:txBody>
+      </p:sp>
+      <p:sp>
+        <p:nvSpPr>
+          <p:cNvPr id="4" name="Slide Number Placeholder 3"/>
+          <p:cNvSpPr>
+            <a:spLocks noGrp="1"/>
+          </p:cNvSpPr>
+          <p:nvPr>
+            <p:ph type="sldNum" sz="quarter" idx="10"/>
+          </p:nvPr>
+        </p:nvSpPr>
+        <p:spPr/>
+        <p:txBody>
+          <a:bodyPr/>
+          <a:lstStyle/>
+          <a:p>
+            <a:fld id="{F7021451-1387-4CA6-816F-3879F97B5CBC}" type="slidenum">
+              <a:rPr lang="en-US"/>
+              <a:t>12</a:t>
             </a:fld>
             <a:endParaRPr lang="en-US"/>
           </a:p>
@@ -1127,7 +1305,7 @@
           <a:p>
             <a:r>
               <a:rPr lang="en-US" dirty="0"/>
-              <a:t>Ba nỗi lo của lãnh đạo: làm hỏng HIS, lộ dữ liệu người bệnh, làm chậm hệ thống. Phần mềm triển khai trên máy chủ của viện (Windows Server, hoặc Linux / Docker), đọc HIS bằng tài khoản chỉ đọc. Kết nối ra ngoài duy nhất là Cổng giám định BHXH — để tra thẻ và gửi hồ sơ, đúng như viện đang làm. Đừng hứa chứng nhận an toàn thông tin nếu chưa có văn bản.</a:t>
+              <a:t>Hai cách nhận lỗi. Chủ động: nghiệp vụ và KHTH vào Cổng Tiền giám định xem danh sách, tra theo mã điều trị, xem dashboard. Thụ động: hệ thống tự gửi email — báo cáo lỗi thẻ BHYT và lỗi XML 3176 hằng ngày, và bản tin các sai sót y lệnh mới (chỉ gửi từ mức độ viện chọn trở lên để không làm phiền). Lãnh đạo không cần đăng nhập vẫn nắm được tình hình qua email. Danh sách người nhận do viện tự thêm, tắt.</a:t>
             </a:r>
             <a:endParaRPr lang="en-US" dirty="0"/>
           </a:p>
@@ -1215,7 +1393,7 @@
           <a:p>
             <a:r>
               <a:rPr lang="en-US" dirty="0"/>
-              <a:t>Phân biệt rõ hai phần khi viện hỏi "HIS của chúng tôi có dùng được không": phần XML 3176 dùng được ngay vì đầu vào là tệp XML chuẩn; phần kiểm sai sót y lệnh đọc thẳng CSDL HIS nên với HIS khác cần khảo sát và làm lớp kết nối. Lộ trình lấy từ tài liệu tổng hợp mục 10.1; điều kiện chuyển giai đoạn: tỷ lệ lỗi nghiêm trọng ổn định, dương tính giả của kiểm y lệnh về mức chấp nhận được.</a:t>
+              <a:t>Ba nỗi lo của lãnh đạo: làm hỏng HIS, lộ dữ liệu người bệnh, làm chậm hệ thống. Phần mềm triển khai trên máy chủ của viện (Windows Server, hoặc Linux / Docker), đọc HIS bằng tài khoản chỉ đọc. Kết nối ra ngoài duy nhất là Cổng giám định BHXH — để tra thẻ và gửi hồ sơ, đúng như viện đang làm. Đừng hứa chứng nhận an toàn thông tin nếu chưa có văn bản.</a:t>
             </a:r>
             <a:endParaRPr lang="en-US" dirty="0"/>
           </a:p>
@@ -1303,7 +1481,7 @@
           <a:p>
             <a:r>
               <a:rPr lang="en-US" dirty="0"/>
-              <a:t>Slide quan trọng nhất với lãnh đạo: một quyết định nhỏ, rủi ro thấp, có thước đo rõ. Thí điểm chạy song song, chưa bật tự gửi cổng — nên không ảnh hưởng quy trình đang chạy. Bốn chỉ số theo tài liệu tổng hợp mục 10.3. ĐIỀN CHI PHÍ và rà lại dòng "Chúng tôi làm" theo đúng cam kết của công ty trước khi trình bày.</a:t>
+              <a:t>Phân biệt rõ hai phần khi viện hỏi "HIS của chúng tôi có dùng được không": phần XML 3176 dùng được ngay vì đầu vào là tệp XML chuẩn; phần kiểm sai sót y lệnh đọc thẳng CSDL HIS nên với HIS khác cần khảo sát và làm lớp kết nối. Lộ trình lấy từ tài liệu tổng hợp mục 10.1; điều kiện chuyển giai đoạn: tỷ lệ lỗi nghiêm trọng ổn định, dương tính giả của kiểm y lệnh về mức chấp nhận được.</a:t>
             </a:r>
             <a:endParaRPr lang="en-US" dirty="0"/>
           </a:p>
@@ -2784,24 +2962,63 @@
         </p:nvSpPr>
         <p:spPr>
           <a:xfrm>
-            <a:off x="457200" y="1417320"/>
-            <a:ext cx="11277295" cy="914400"/>
-          </a:xfrm>
-          <a:prstGeom prst="rect">
-            <a:avLst/>
-          </a:prstGeom>
-          <a:noFill/>
-          <a:ln/>
-        </p:spPr>
-        <p:txBody>
-          <a:bodyPr wrap="square" lIns="0" tIns="0" rIns="0" bIns="0" rtlCol="0" anchor="ctr"/>
-          <a:lstStyle/>
-          <a:p>
-            <a:pPr algn="ctr" indent="0" marL="0">
-              <a:buNone/>
-            </a:pPr>
-            <a:r>
-              <a:rPr lang="en-US" sz="3600" b="1" dirty="0">
+            <a:off x="640080" y="411480"/>
+            <a:ext cx="10911535" cy="274320"/>
+          </a:xfrm>
+          <a:prstGeom prst="rect">
+            <a:avLst/>
+          </a:prstGeom>
+          <a:noFill/>
+          <a:ln/>
+        </p:spPr>
+        <p:txBody>
+          <a:bodyPr wrap="square" lIns="0" tIns="0" rIns="0" bIns="0" rtlCol="0" anchor="ctr"/>
+          <a:lstStyle/>
+          <a:p>
+            <a:pPr indent="0" marL="0">
+              <a:buNone/>
+            </a:pPr>
+            <a:r>
+              <a:rPr lang="en-US" sz="1200" b="1" spc="200" kern="0" dirty="0">
+                <a:solidFill>
+                  <a:srgbClr val="38BDF8"/>
+                </a:solidFill>
+                <a:latin typeface="Arial" pitchFamily="34" charset="0"/>
+                <a:ea typeface="Arial" pitchFamily="34" charset="-122"/>
+                <a:cs typeface="Arial" pitchFamily="34" charset="-120"/>
+              </a:rPr>
+              <a:t>CAM KẾT</a:t>
+            </a:r>
+            <a:endParaRPr lang="en-US" sz="1200" dirty="0"/>
+          </a:p>
+        </p:txBody>
+      </p:sp>
+      <p:sp>
+        <p:nvSpPr>
+          <p:cNvPr id="3" name="Text 1"/>
+          <p:cNvSpPr txBox="1"/>
+          <p:nvPr/>
+        </p:nvSpPr>
+        <p:spPr>
+          <a:xfrm>
+            <a:off x="640080" y="713232"/>
+            <a:ext cx="10911535" cy="566928"/>
+          </a:xfrm>
+          <a:prstGeom prst="rect">
+            <a:avLst/>
+          </a:prstGeom>
+          <a:noFill/>
+          <a:ln/>
+        </p:spPr>
+        <p:txBody>
+          <a:bodyPr wrap="square" lIns="0" tIns="0" rIns="0" bIns="0" rtlCol="0" anchor="ctr"/>
+          <a:lstStyle/>
+          <a:p>
+            <a:pPr indent="0" marL="0">
+              <a:buNone/>
+            </a:pPr>
+            <a:r>
+              <a:rPr lang="en-US" sz="2800" b="1" dirty="0">
                 <a:solidFill>
                   <a:srgbClr val="FFFFFF"/>
                 </a:solidFill>
@@ -2809,97 +3026,38 @@
                 <a:ea typeface="Arial" pitchFamily="34" charset="-122"/>
                 <a:cs typeface="Arial" pitchFamily="34" charset="-120"/>
               </a:rPr>
-              <a:t>Phát hiện sớm</a:t>
-            </a:r>
-            <a:pPr algn="ctr" indent="0" marL="0">
-              <a:buNone/>
-            </a:pPr>
-            <a:r>
-              <a:rPr lang="en-US" sz="3600" b="1" dirty="0">
-                <a:solidFill>
-                  <a:srgbClr val="7F93B0"/>
-                </a:solidFill>
-                <a:latin typeface="Arial" pitchFamily="34" charset="0"/>
-                <a:ea typeface="Arial" pitchFamily="34" charset="-122"/>
-                <a:cs typeface="Arial" pitchFamily="34" charset="-120"/>
-              </a:rPr>
-              <a:t>  ·  </a:t>
-            </a:r>
-            <a:pPr algn="ctr" indent="0" marL="0">
-              <a:buNone/>
-            </a:pPr>
-            <a:r>
-              <a:rPr lang="en-US" sz="3600" b="1" dirty="0">
-                <a:solidFill>
-                  <a:srgbClr val="38BDF8"/>
-                </a:solidFill>
-                <a:latin typeface="Arial" pitchFamily="34" charset="0"/>
-                <a:ea typeface="Arial" pitchFamily="34" charset="-122"/>
-                <a:cs typeface="Arial" pitchFamily="34" charset="-120"/>
-              </a:rPr>
-              <a:t>Sửa tại nguồn</a:t>
-            </a:r>
-            <a:pPr algn="ctr" indent="0" marL="0">
-              <a:buNone/>
-            </a:pPr>
-            <a:r>
-              <a:rPr lang="en-US" sz="3600" b="1" dirty="0">
-                <a:solidFill>
-                  <a:srgbClr val="7F93B0"/>
-                </a:solidFill>
-                <a:latin typeface="Arial" pitchFamily="34" charset="0"/>
-                <a:ea typeface="Arial" pitchFamily="34" charset="-122"/>
-                <a:cs typeface="Arial" pitchFamily="34" charset="-120"/>
-              </a:rPr>
-              <a:t>  ·  </a:t>
-            </a:r>
-            <a:pPr algn="ctr" indent="0" marL="0">
-              <a:buNone/>
-            </a:pPr>
-            <a:r>
-              <a:rPr lang="en-US" sz="3600" b="1" dirty="0">
-                <a:solidFill>
-                  <a:srgbClr val="FBBF24"/>
-                </a:solidFill>
-                <a:latin typeface="Arial" pitchFamily="34" charset="0"/>
-                <a:ea typeface="Arial" pitchFamily="34" charset="-122"/>
-                <a:cs typeface="Arial" pitchFamily="34" charset="-120"/>
-              </a:rPr>
-              <a:t>Gửi hồ sơ sạch</a:t>
-            </a:r>
-            <a:endParaRPr lang="en-US" sz="3600" dirty="0"/>
-          </a:p>
-        </p:txBody>
-      </p:sp>
-      <p:sp>
-        <p:nvSpPr>
-          <p:cNvPr id="3" name="Text 1"/>
-          <p:cNvSpPr txBox="1"/>
-          <p:nvPr/>
-        </p:nvSpPr>
-        <p:spPr>
-          <a:xfrm>
-            <a:off x="914400" y="2560320"/>
-            <a:ext cx="10362895" cy="868680"/>
-          </a:xfrm>
-          <a:prstGeom prst="rect">
-            <a:avLst/>
-          </a:prstGeom>
-          <a:noFill/>
-          <a:ln/>
-        </p:spPr>
-        <p:txBody>
-          <a:bodyPr wrap="square" lIns="0" tIns="0" rIns="0" bIns="0" rtlCol="0" anchor="t"/>
-          <a:lstStyle/>
-          <a:p>
-            <a:pPr algn="ctr" indent="0" marL="0">
-              <a:lnSpc>
-                <a:spcPts val="2800"/>
-              </a:lnSpc>
-              <a:buNone/>
-            </a:pPr>
-            <a:r>
-              <a:rPr lang="en-US" sz="1900" dirty="0">
+              <a:t>Đồng hành lâu dài cùng bệnh viện</a:t>
+            </a:r>
+            <a:endParaRPr lang="en-US" sz="2800" dirty="0"/>
+          </a:p>
+        </p:txBody>
+      </p:sp>
+      <p:sp>
+        <p:nvSpPr>
+          <p:cNvPr id="4" name="Text 2"/>
+          <p:cNvSpPr txBox="1"/>
+          <p:nvPr/>
+        </p:nvSpPr>
+        <p:spPr>
+          <a:xfrm>
+            <a:off x="640080" y="1298448"/>
+            <a:ext cx="10911535" cy="329184"/>
+          </a:xfrm>
+          <a:prstGeom prst="rect">
+            <a:avLst/>
+          </a:prstGeom>
+          <a:noFill/>
+          <a:ln/>
+        </p:spPr>
+        <p:txBody>
+          <a:bodyPr wrap="square" lIns="0" tIns="0" rIns="0" bIns="0" rtlCol="0" anchor="ctr"/>
+          <a:lstStyle/>
+          <a:p>
+            <a:pPr indent="0" marL="0">
+              <a:buNone/>
+            </a:pPr>
+            <a:r>
+              <a:rPr lang="en-US" sz="1500" dirty="0">
                 <a:solidFill>
                   <a:srgbClr val="A9BCD6"/>
                 </a:solidFill>
@@ -2907,46 +3065,26 @@
                 <a:ea typeface="Arial" pitchFamily="34" charset="-122"/>
                 <a:cs typeface="Arial" pitchFamily="34" charset="-120"/>
               </a:rPr>
-              <a:t>Tiền giám định đưa việc kiểm tra hồ sơ BHYT về bên trong bệnh viện —</a:t>
-            </a:r>
-            <a:endParaRPr lang="en-US" sz="1900" dirty="0"/>
-          </a:p>
-          <a:p>
-            <a:pPr algn="ctr" indent="0" marL="0">
-              <a:lnSpc>
-                <a:spcPts val="2800"/>
-              </a:lnSpc>
-              <a:buNone/>
-            </a:pPr>
-            <a:r>
-              <a:rPr lang="en-US" sz="1900" dirty="0">
-                <a:solidFill>
-                  <a:srgbClr val="A9BCD6"/>
-                </a:solidFill>
-                <a:latin typeface="Arial" pitchFamily="34" charset="0"/>
-                <a:ea typeface="Arial" pitchFamily="34" charset="-122"/>
-                <a:cs typeface="Arial" pitchFamily="34" charset="-120"/>
-              </a:rPr>
-              <a:t>khi người làm sai còn ở đó, và hồ sơ còn chưa rời bệnh viện.</a:t>
-            </a:r>
-            <a:endParaRPr lang="en-US" sz="1900" dirty="0"/>
-          </a:p>
-        </p:txBody>
-      </p:sp>
-      <p:sp>
-        <p:nvSpPr>
-          <p:cNvPr id="4" name="Shape 2"/>
+              <a:t>Quy định BHYT thay đổi liên tục — phần mềm phải thay đổi theo mà viện không phải lo.</a:t>
+            </a:r>
+            <a:endParaRPr lang="en-US" sz="1500" dirty="0"/>
+          </a:p>
+        </p:txBody>
+      </p:sp>
+      <p:sp>
+        <p:nvSpPr>
+          <p:cNvPr id="5" name="Shape 3"/>
           <p:cNvSpPr/>
           <p:nvPr/>
         </p:nvSpPr>
         <p:spPr>
           <a:xfrm>
-            <a:off x="2804008" y="3931920"/>
-            <a:ext cx="6583680" cy="1280160"/>
+            <a:off x="640080" y="1783080"/>
+            <a:ext cx="5318608" cy="1783080"/>
           </a:xfrm>
           <a:prstGeom prst="roundRect">
             <a:avLst>
-              <a:gd name="adj" fmla="val 7143"/>
+              <a:gd name="adj" fmla="val 5128"/>
             </a:avLst>
           </a:prstGeom>
           <a:solidFill>
@@ -2964,6 +3102,1995 @@
       </p:sp>
       <p:sp>
         <p:nvSpPr>
+          <p:cNvPr id="6" name="Shape 4"/>
+          <p:cNvSpPr/>
+          <p:nvPr/>
+        </p:nvSpPr>
+        <p:spPr>
+          <a:xfrm>
+            <a:off x="914400" y="2057400"/>
+            <a:ext cx="731520" cy="731520"/>
+          </a:xfrm>
+          <a:prstGeom prst="ellipse">
+            <a:avLst/>
+          </a:prstGeom>
+          <a:solidFill>
+            <a:srgbClr val="25324A"/>
+          </a:solidFill>
+          <a:ln w="12700">
+            <a:solidFill>
+              <a:srgbClr val="4ADE80"/>
+            </a:solidFill>
+            <a:prstDash val="solid"/>
+          </a:ln>
+        </p:spPr>
+      </p:sp>
+      <p:sp>
+        <p:nvSpPr>
+          <p:cNvPr id="7" name="Text 5"/>
+          <p:cNvSpPr txBox="1"/>
+          <p:nvPr/>
+        </p:nvSpPr>
+        <p:spPr>
+          <a:xfrm>
+            <a:off x="914400" y="2057400"/>
+            <a:ext cx="731520" cy="731520"/>
+          </a:xfrm>
+          <a:prstGeom prst="rect">
+            <a:avLst/>
+          </a:prstGeom>
+          <a:noFill/>
+          <a:ln/>
+        </p:spPr>
+        <p:txBody>
+          <a:bodyPr wrap="square" lIns="0" tIns="0" rIns="0" bIns="0" rtlCol="0" anchor="ctr"/>
+          <a:lstStyle/>
+          <a:p>
+            <a:pPr algn="ctr" indent="0" marL="0">
+              <a:buNone/>
+            </a:pPr>
+            <a:r>
+              <a:rPr lang="en-US" sz="2200" dirty="0">
+                <a:solidFill>
+                  <a:srgbClr val="000000"/>
+                </a:solidFill>
+                <a:latin typeface="Segoe UI Emoji" pitchFamily="34" charset="0"/>
+                <a:ea typeface="Segoe UI Emoji" pitchFamily="34" charset="-122"/>
+                <a:cs typeface="Segoe UI Emoji" pitchFamily="34" charset="-120"/>
+              </a:rPr>
+              <a:t>🔄</a:t>
+            </a:r>
+            <a:endParaRPr lang="en-US" sz="2200" dirty="0"/>
+          </a:p>
+        </p:txBody>
+      </p:sp>
+      <p:sp>
+        <p:nvSpPr>
+          <p:cNvPr id="8" name="Text 6"/>
+          <p:cNvSpPr txBox="1"/>
+          <p:nvPr/>
+        </p:nvSpPr>
+        <p:spPr>
+          <a:xfrm>
+            <a:off x="4587088" y="1947672"/>
+            <a:ext cx="1143000" cy="256032"/>
+          </a:xfrm>
+          <a:prstGeom prst="rect">
+            <a:avLst/>
+          </a:prstGeom>
+          <a:noFill/>
+          <a:ln/>
+        </p:spPr>
+        <p:txBody>
+          <a:bodyPr wrap="square" lIns="0" tIns="0" rIns="0" bIns="0" rtlCol="0" anchor="ctr"/>
+          <a:lstStyle/>
+          <a:p>
+            <a:pPr algn="r" indent="0" marL="0">
+              <a:buNone/>
+            </a:pPr>
+            <a:r>
+              <a:rPr lang="en-US" sz="950" b="1" spc="100" kern="0" dirty="0">
+                <a:solidFill>
+                  <a:srgbClr val="4ADE80"/>
+                </a:solidFill>
+                <a:latin typeface="Arial" pitchFamily="34" charset="0"/>
+                <a:ea typeface="Arial" pitchFamily="34" charset="-122"/>
+                <a:cs typeface="Arial" pitchFamily="34" charset="-120"/>
+              </a:rPr>
+              <a:t>CAM KẾT</a:t>
+            </a:r>
+            <a:endParaRPr lang="en-US" sz="950" dirty="0"/>
+          </a:p>
+        </p:txBody>
+      </p:sp>
+      <p:sp>
+        <p:nvSpPr>
+          <p:cNvPr id="9" name="Text 7"/>
+          <p:cNvSpPr txBox="1"/>
+          <p:nvPr/>
+        </p:nvSpPr>
+        <p:spPr>
+          <a:xfrm>
+            <a:off x="1874520" y="2130552"/>
+            <a:ext cx="3855568" cy="411480"/>
+          </a:xfrm>
+          <a:prstGeom prst="rect">
+            <a:avLst/>
+          </a:prstGeom>
+          <a:noFill/>
+          <a:ln/>
+        </p:spPr>
+        <p:txBody>
+          <a:bodyPr wrap="square" lIns="0" tIns="0" rIns="0" bIns="0" rtlCol="0" anchor="ctr"/>
+          <a:lstStyle/>
+          <a:p>
+            <a:pPr indent="0" marL="0">
+              <a:buNone/>
+            </a:pPr>
+            <a:r>
+              <a:rPr lang="en-US" sz="1800" b="1" dirty="0">
+                <a:solidFill>
+                  <a:srgbClr val="FFFFFF"/>
+                </a:solidFill>
+                <a:latin typeface="Arial" pitchFamily="34" charset="0"/>
+                <a:ea typeface="Arial" pitchFamily="34" charset="-122"/>
+                <a:cs typeface="Arial" pitchFamily="34" charset="-120"/>
+              </a:rPr>
+              <a:t>Cập nhật quy tắc thường xuyên</a:t>
+            </a:r>
+            <a:endParaRPr lang="en-US" sz="1800" dirty="0"/>
+          </a:p>
+        </p:txBody>
+      </p:sp>
+      <p:sp>
+        <p:nvSpPr>
+          <p:cNvPr id="10" name="Text 8"/>
+          <p:cNvSpPr txBox="1"/>
+          <p:nvPr/>
+        </p:nvSpPr>
+        <p:spPr>
+          <a:xfrm>
+            <a:off x="1874520" y="2587752"/>
+            <a:ext cx="3855568" cy="868680"/>
+          </a:xfrm>
+          <a:prstGeom prst="rect">
+            <a:avLst/>
+          </a:prstGeom>
+          <a:noFill/>
+          <a:ln/>
+        </p:spPr>
+        <p:txBody>
+          <a:bodyPr wrap="square" lIns="0" tIns="0" rIns="0" bIns="0" rtlCol="0" anchor="t"/>
+          <a:lstStyle/>
+          <a:p>
+            <a:pPr indent="0" marL="0">
+              <a:lnSpc>
+                <a:spcPts val="1900"/>
+              </a:lnSpc>
+              <a:buNone/>
+            </a:pPr>
+            <a:r>
+              <a:rPr lang="en-US" sz="1350" dirty="0">
+                <a:solidFill>
+                  <a:srgbClr val="A9BCD6"/>
+                </a:solidFill>
+                <a:latin typeface="Arial" pitchFamily="34" charset="0"/>
+                <a:ea typeface="Arial" pitchFamily="34" charset="-122"/>
+                <a:cs typeface="Arial" pitchFamily="34" charset="-120"/>
+              </a:rPr>
+              <a:t>Bám sát quy định mới của BHXH và Bộ Y tế. Cổng tự động cập nhật quy tắc, danh mục mã lỗi — không cần người can thiệp.</a:t>
+            </a:r>
+            <a:endParaRPr lang="en-US" sz="1350" dirty="0"/>
+          </a:p>
+        </p:txBody>
+      </p:sp>
+      <p:sp>
+        <p:nvSpPr>
+          <p:cNvPr id="11" name="Shape 9"/>
+          <p:cNvSpPr/>
+          <p:nvPr/>
+        </p:nvSpPr>
+        <p:spPr>
+          <a:xfrm>
+            <a:off x="6233008" y="1783080"/>
+            <a:ext cx="5318608" cy="1783080"/>
+          </a:xfrm>
+          <a:prstGeom prst="roundRect">
+            <a:avLst>
+              <a:gd name="adj" fmla="val 5128"/>
+            </a:avLst>
+          </a:prstGeom>
+          <a:solidFill>
+            <a:srgbClr val="25324A">
+              <a:alpha val="85000"/>
+            </a:srgbClr>
+          </a:solidFill>
+          <a:ln w="19050">
+            <a:solidFill>
+              <a:srgbClr val="FBBF24"/>
+            </a:solidFill>
+            <a:prstDash val="solid"/>
+          </a:ln>
+        </p:spPr>
+      </p:sp>
+      <p:sp>
+        <p:nvSpPr>
+          <p:cNvPr id="12" name="Shape 10"/>
+          <p:cNvSpPr/>
+          <p:nvPr/>
+        </p:nvSpPr>
+        <p:spPr>
+          <a:xfrm>
+            <a:off x="6507328" y="2057400"/>
+            <a:ext cx="731520" cy="731520"/>
+          </a:xfrm>
+          <a:prstGeom prst="ellipse">
+            <a:avLst/>
+          </a:prstGeom>
+          <a:solidFill>
+            <a:srgbClr val="25324A"/>
+          </a:solidFill>
+          <a:ln w="12700">
+            <a:solidFill>
+              <a:srgbClr val="4ADE80"/>
+            </a:solidFill>
+            <a:prstDash val="solid"/>
+          </a:ln>
+        </p:spPr>
+      </p:sp>
+      <p:sp>
+        <p:nvSpPr>
+          <p:cNvPr id="13" name="Text 11"/>
+          <p:cNvSpPr txBox="1"/>
+          <p:nvPr/>
+        </p:nvSpPr>
+        <p:spPr>
+          <a:xfrm>
+            <a:off x="6507328" y="2057400"/>
+            <a:ext cx="731520" cy="731520"/>
+          </a:xfrm>
+          <a:prstGeom prst="rect">
+            <a:avLst/>
+          </a:prstGeom>
+          <a:noFill/>
+          <a:ln/>
+        </p:spPr>
+        <p:txBody>
+          <a:bodyPr wrap="square" lIns="0" tIns="0" rIns="0" bIns="0" rtlCol="0" anchor="ctr"/>
+          <a:lstStyle/>
+          <a:p>
+            <a:pPr algn="ctr" indent="0" marL="0">
+              <a:buNone/>
+            </a:pPr>
+            <a:r>
+              <a:rPr lang="en-US" sz="2200" dirty="0">
+                <a:solidFill>
+                  <a:srgbClr val="000000"/>
+                </a:solidFill>
+                <a:latin typeface="Segoe UI Emoji" pitchFamily="34" charset="0"/>
+                <a:ea typeface="Segoe UI Emoji" pitchFamily="34" charset="-122"/>
+                <a:cs typeface="Segoe UI Emoji" pitchFamily="34" charset="-120"/>
+              </a:rPr>
+              <a:t>🆓</a:t>
+            </a:r>
+            <a:endParaRPr lang="en-US" sz="2200" dirty="0"/>
+          </a:p>
+        </p:txBody>
+      </p:sp>
+      <p:sp>
+        <p:nvSpPr>
+          <p:cNvPr id="14" name="Text 12"/>
+          <p:cNvSpPr txBox="1"/>
+          <p:nvPr/>
+        </p:nvSpPr>
+        <p:spPr>
+          <a:xfrm>
+            <a:off x="10180015" y="1947672"/>
+            <a:ext cx="1143000" cy="256032"/>
+          </a:xfrm>
+          <a:prstGeom prst="rect">
+            <a:avLst/>
+          </a:prstGeom>
+          <a:noFill/>
+          <a:ln/>
+        </p:spPr>
+        <p:txBody>
+          <a:bodyPr wrap="square" lIns="0" tIns="0" rIns="0" bIns="0" rtlCol="0" anchor="ctr"/>
+          <a:lstStyle/>
+          <a:p>
+            <a:pPr algn="r" indent="0" marL="0">
+              <a:buNone/>
+            </a:pPr>
+            <a:r>
+              <a:rPr lang="en-US" sz="950" b="1" spc="100" kern="0" dirty="0">
+                <a:solidFill>
+                  <a:srgbClr val="FBBF24"/>
+                </a:solidFill>
+                <a:latin typeface="Arial" pitchFamily="34" charset="0"/>
+                <a:ea typeface="Arial" pitchFamily="34" charset="-122"/>
+                <a:cs typeface="Arial" pitchFamily="34" charset="-120"/>
+              </a:rPr>
+              <a:t>CAM KẾT</a:t>
+            </a:r>
+            <a:endParaRPr lang="en-US" sz="950" dirty="0"/>
+          </a:p>
+        </p:txBody>
+      </p:sp>
+      <p:sp>
+        <p:nvSpPr>
+          <p:cNvPr id="15" name="Text 13"/>
+          <p:cNvSpPr txBox="1"/>
+          <p:nvPr/>
+        </p:nvSpPr>
+        <p:spPr>
+          <a:xfrm>
+            <a:off x="7467448" y="2130552"/>
+            <a:ext cx="3855568" cy="411480"/>
+          </a:xfrm>
+          <a:prstGeom prst="rect">
+            <a:avLst/>
+          </a:prstGeom>
+          <a:noFill/>
+          <a:ln/>
+        </p:spPr>
+        <p:txBody>
+          <a:bodyPr wrap="square" lIns="0" tIns="0" rIns="0" bIns="0" rtlCol="0" anchor="ctr"/>
+          <a:lstStyle/>
+          <a:p>
+            <a:pPr indent="0" marL="0">
+              <a:buNone/>
+            </a:pPr>
+            <a:r>
+              <a:rPr lang="en-US" sz="1800" b="1" dirty="0">
+                <a:solidFill>
+                  <a:srgbClr val="FFFFFF"/>
+                </a:solidFill>
+                <a:latin typeface="Arial" pitchFamily="34" charset="0"/>
+                <a:ea typeface="Arial" pitchFamily="34" charset="-122"/>
+                <a:cs typeface="Arial" pitchFamily="34" charset="-120"/>
+              </a:rPr>
+              <a:t>Nâng cấp nền tảng miễn phí</a:t>
+            </a:r>
+            <a:endParaRPr lang="en-US" sz="1800" dirty="0"/>
+          </a:p>
+        </p:txBody>
+      </p:sp>
+      <p:sp>
+        <p:nvSpPr>
+          <p:cNvPr id="16" name="Text 14"/>
+          <p:cNvSpPr txBox="1"/>
+          <p:nvPr/>
+        </p:nvSpPr>
+        <p:spPr>
+          <a:xfrm>
+            <a:off x="7467448" y="2587752"/>
+            <a:ext cx="3855568" cy="868680"/>
+          </a:xfrm>
+          <a:prstGeom prst="rect">
+            <a:avLst/>
+          </a:prstGeom>
+          <a:noFill/>
+          <a:ln/>
+        </p:spPr>
+        <p:txBody>
+          <a:bodyPr wrap="square" lIns="0" tIns="0" rIns="0" bIns="0" rtlCol="0" anchor="t"/>
+          <a:lstStyle/>
+          <a:p>
+            <a:pPr indent="0" marL="0">
+              <a:lnSpc>
+                <a:spcPts val="1900"/>
+              </a:lnSpc>
+              <a:buNone/>
+            </a:pPr>
+            <a:r>
+              <a:rPr lang="en-US" sz="1350" dirty="0">
+                <a:solidFill>
+                  <a:srgbClr val="A9BCD6"/>
+                </a:solidFill>
+                <a:latin typeface="Arial" pitchFamily="34" charset="0"/>
+                <a:ea typeface="Arial" pitchFamily="34" charset="-122"/>
+                <a:cs typeface="Arial" pitchFamily="34" charset="-120"/>
+              </a:rPr>
+              <a:t>Đã có kế hoạch nâng cấp để đáp ứng yêu cầu tốc độ ngày một cao khi số hồ sơ tăng.</a:t>
+            </a:r>
+            <a:endParaRPr lang="en-US" sz="1350" dirty="0"/>
+          </a:p>
+        </p:txBody>
+      </p:sp>
+      <p:sp>
+        <p:nvSpPr>
+          <p:cNvPr id="17" name="Shape 15"/>
+          <p:cNvSpPr/>
+          <p:nvPr/>
+        </p:nvSpPr>
+        <p:spPr>
+          <a:xfrm>
+            <a:off x="640080" y="3767328"/>
+            <a:ext cx="5318608" cy="1783080"/>
+          </a:xfrm>
+          <a:prstGeom prst="roundRect">
+            <a:avLst>
+              <a:gd name="adj" fmla="val 5128"/>
+            </a:avLst>
+          </a:prstGeom>
+          <a:solidFill>
+            <a:srgbClr val="1C3558">
+              <a:alpha val="85000"/>
+            </a:srgbClr>
+          </a:solidFill>
+          <a:ln w="9525">
+            <a:solidFill>
+              <a:srgbClr val="2E4B74"/>
+            </a:solidFill>
+            <a:prstDash val="solid"/>
+          </a:ln>
+        </p:spPr>
+      </p:sp>
+      <p:sp>
+        <p:nvSpPr>
+          <p:cNvPr id="18" name="Shape 16"/>
+          <p:cNvSpPr/>
+          <p:nvPr/>
+        </p:nvSpPr>
+        <p:spPr>
+          <a:xfrm>
+            <a:off x="914400" y="4041648"/>
+            <a:ext cx="731520" cy="731520"/>
+          </a:xfrm>
+          <a:prstGeom prst="ellipse">
+            <a:avLst/>
+          </a:prstGeom>
+          <a:solidFill>
+            <a:srgbClr val="25324A"/>
+          </a:solidFill>
+          <a:ln w="12700">
+            <a:solidFill>
+              <a:srgbClr val="38BDF8"/>
+            </a:solidFill>
+            <a:prstDash val="solid"/>
+          </a:ln>
+        </p:spPr>
+      </p:sp>
+      <p:sp>
+        <p:nvSpPr>
+          <p:cNvPr id="19" name="Text 17"/>
+          <p:cNvSpPr txBox="1"/>
+          <p:nvPr/>
+        </p:nvSpPr>
+        <p:spPr>
+          <a:xfrm>
+            <a:off x="914400" y="4041648"/>
+            <a:ext cx="731520" cy="731520"/>
+          </a:xfrm>
+          <a:prstGeom prst="rect">
+            <a:avLst/>
+          </a:prstGeom>
+          <a:noFill/>
+          <a:ln/>
+        </p:spPr>
+        <p:txBody>
+          <a:bodyPr wrap="square" lIns="0" tIns="0" rIns="0" bIns="0" rtlCol="0" anchor="ctr"/>
+          <a:lstStyle/>
+          <a:p>
+            <a:pPr algn="ctr" indent="0" marL="0">
+              <a:buNone/>
+            </a:pPr>
+            <a:r>
+              <a:rPr lang="en-US" sz="2200" dirty="0">
+                <a:solidFill>
+                  <a:srgbClr val="000000"/>
+                </a:solidFill>
+                <a:latin typeface="Segoe UI Emoji" pitchFamily="34" charset="0"/>
+                <a:ea typeface="Segoe UI Emoji" pitchFamily="34" charset="-122"/>
+                <a:cs typeface="Segoe UI Emoji" pitchFamily="34" charset="-120"/>
+              </a:rPr>
+              <a:t>🤖</a:t>
+            </a:r>
+            <a:endParaRPr lang="en-US" sz="2200" dirty="0"/>
+          </a:p>
+        </p:txBody>
+      </p:sp>
+      <p:sp>
+        <p:nvSpPr>
+          <p:cNvPr id="20" name="Text 18"/>
+          <p:cNvSpPr txBox="1"/>
+          <p:nvPr/>
+        </p:nvSpPr>
+        <p:spPr>
+          <a:xfrm>
+            <a:off x="4587088" y="3931920"/>
+            <a:ext cx="1143000" cy="256032"/>
+          </a:xfrm>
+          <a:prstGeom prst="rect">
+            <a:avLst/>
+          </a:prstGeom>
+          <a:noFill/>
+          <a:ln/>
+        </p:spPr>
+        <p:txBody>
+          <a:bodyPr wrap="square" lIns="0" tIns="0" rIns="0" bIns="0" rtlCol="0" anchor="ctr"/>
+          <a:lstStyle/>
+          <a:p>
+            <a:pPr algn="r" indent="0" marL="0">
+              <a:buNone/>
+            </a:pPr>
+            <a:r>
+              <a:rPr lang="en-US" sz="950" b="1" spc="100" kern="0" dirty="0">
+                <a:solidFill>
+                  <a:srgbClr val="38BDF8"/>
+                </a:solidFill>
+                <a:latin typeface="Arial" pitchFamily="34" charset="0"/>
+                <a:ea typeface="Arial" pitchFamily="34" charset="-122"/>
+                <a:cs typeface="Arial" pitchFamily="34" charset="-120"/>
+              </a:rPr>
+              <a:t>LỘ TRÌNH</a:t>
+            </a:r>
+            <a:endParaRPr lang="en-US" sz="950" dirty="0"/>
+          </a:p>
+        </p:txBody>
+      </p:sp>
+      <p:sp>
+        <p:nvSpPr>
+          <p:cNvPr id="21" name="Text 19"/>
+          <p:cNvSpPr txBox="1"/>
+          <p:nvPr/>
+        </p:nvSpPr>
+        <p:spPr>
+          <a:xfrm>
+            <a:off x="1874520" y="4114800"/>
+            <a:ext cx="3855568" cy="411480"/>
+          </a:xfrm>
+          <a:prstGeom prst="rect">
+            <a:avLst/>
+          </a:prstGeom>
+          <a:noFill/>
+          <a:ln/>
+        </p:spPr>
+        <p:txBody>
+          <a:bodyPr wrap="square" lIns="0" tIns="0" rIns="0" bIns="0" rtlCol="0" anchor="ctr"/>
+          <a:lstStyle/>
+          <a:p>
+            <a:pPr indent="0" marL="0">
+              <a:buNone/>
+            </a:pPr>
+            <a:r>
+              <a:rPr lang="en-US" sz="1800" b="1" dirty="0">
+                <a:solidFill>
+                  <a:srgbClr val="FFFFFF"/>
+                </a:solidFill>
+                <a:latin typeface="Arial" pitchFamily="34" charset="0"/>
+                <a:ea typeface="Arial" pitchFamily="34" charset="-122"/>
+                <a:cs typeface="Arial" pitchFamily="34" charset="-120"/>
+              </a:rPr>
+              <a:t>Ứng dụng AI tra soát lỗi</a:t>
+            </a:r>
+            <a:endParaRPr lang="en-US" sz="1800" dirty="0"/>
+          </a:p>
+        </p:txBody>
+      </p:sp>
+      <p:sp>
+        <p:nvSpPr>
+          <p:cNvPr id="22" name="Text 20"/>
+          <p:cNvSpPr txBox="1"/>
+          <p:nvPr/>
+        </p:nvSpPr>
+        <p:spPr>
+          <a:xfrm>
+            <a:off x="1874520" y="4572000"/>
+            <a:ext cx="3855568" cy="868680"/>
+          </a:xfrm>
+          <a:prstGeom prst="rect">
+            <a:avLst/>
+          </a:prstGeom>
+          <a:noFill/>
+          <a:ln/>
+        </p:spPr>
+        <p:txBody>
+          <a:bodyPr wrap="square" lIns="0" tIns="0" rIns="0" bIns="0" rtlCol="0" anchor="t"/>
+          <a:lstStyle/>
+          <a:p>
+            <a:pPr indent="0" marL="0">
+              <a:lnSpc>
+                <a:spcPts val="1900"/>
+              </a:lnSpc>
+              <a:buNone/>
+            </a:pPr>
+            <a:r>
+              <a:rPr lang="en-US" sz="1350" dirty="0">
+                <a:solidFill>
+                  <a:srgbClr val="A9BCD6"/>
+                </a:solidFill>
+                <a:latin typeface="Arial" pitchFamily="34" charset="0"/>
+                <a:ea typeface="Arial" pitchFamily="34" charset="-122"/>
+                <a:cs typeface="Arial" pitchFamily="34" charset="-120"/>
+              </a:rPr>
+              <a:t>Tra soát lỗi thông minh: gợi ý nguyên nhân, cách sửa, phát hiện bất thường mà quy tắc cứng chưa bắt được.</a:t>
+            </a:r>
+            <a:endParaRPr lang="en-US" sz="1350" dirty="0"/>
+          </a:p>
+        </p:txBody>
+      </p:sp>
+      <p:sp>
+        <p:nvSpPr>
+          <p:cNvPr id="23" name="Shape 21"/>
+          <p:cNvSpPr/>
+          <p:nvPr/>
+        </p:nvSpPr>
+        <p:spPr>
+          <a:xfrm>
+            <a:off x="6233008" y="3767328"/>
+            <a:ext cx="5318608" cy="1783080"/>
+          </a:xfrm>
+          <a:prstGeom prst="roundRect">
+            <a:avLst>
+              <a:gd name="adj" fmla="val 5128"/>
+            </a:avLst>
+          </a:prstGeom>
+          <a:solidFill>
+            <a:srgbClr val="1C3558">
+              <a:alpha val="85000"/>
+            </a:srgbClr>
+          </a:solidFill>
+          <a:ln w="9525">
+            <a:solidFill>
+              <a:srgbClr val="2E4B74"/>
+            </a:solidFill>
+            <a:prstDash val="solid"/>
+          </a:ln>
+        </p:spPr>
+      </p:sp>
+      <p:sp>
+        <p:nvSpPr>
+          <p:cNvPr id="24" name="Shape 22"/>
+          <p:cNvSpPr/>
+          <p:nvPr/>
+        </p:nvSpPr>
+        <p:spPr>
+          <a:xfrm>
+            <a:off x="6507328" y="4041648"/>
+            <a:ext cx="731520" cy="731520"/>
+          </a:xfrm>
+          <a:prstGeom prst="ellipse">
+            <a:avLst/>
+          </a:prstGeom>
+          <a:solidFill>
+            <a:srgbClr val="25324A"/>
+          </a:solidFill>
+          <a:ln w="12700">
+            <a:solidFill>
+              <a:srgbClr val="38BDF8"/>
+            </a:solidFill>
+            <a:prstDash val="solid"/>
+          </a:ln>
+        </p:spPr>
+      </p:sp>
+      <p:sp>
+        <p:nvSpPr>
+          <p:cNvPr id="25" name="Text 23"/>
+          <p:cNvSpPr txBox="1"/>
+          <p:nvPr/>
+        </p:nvSpPr>
+        <p:spPr>
+          <a:xfrm>
+            <a:off x="6507328" y="4041648"/>
+            <a:ext cx="731520" cy="731520"/>
+          </a:xfrm>
+          <a:prstGeom prst="rect">
+            <a:avLst/>
+          </a:prstGeom>
+          <a:noFill/>
+          <a:ln/>
+        </p:spPr>
+        <p:txBody>
+          <a:bodyPr wrap="square" lIns="0" tIns="0" rIns="0" bIns="0" rtlCol="0" anchor="ctr"/>
+          <a:lstStyle/>
+          <a:p>
+            <a:pPr algn="ctr" indent="0" marL="0">
+              <a:buNone/>
+            </a:pPr>
+            <a:r>
+              <a:rPr lang="en-US" sz="2200" dirty="0">
+                <a:solidFill>
+                  <a:srgbClr val="000000"/>
+                </a:solidFill>
+                <a:latin typeface="Segoe UI Emoji" pitchFamily="34" charset="0"/>
+                <a:ea typeface="Segoe UI Emoji" pitchFamily="34" charset="-122"/>
+                <a:cs typeface="Segoe UI Emoji" pitchFamily="34" charset="-120"/>
+              </a:rPr>
+              <a:t>🔗</a:t>
+            </a:r>
+            <a:endParaRPr lang="en-US" sz="2200" dirty="0"/>
+          </a:p>
+        </p:txBody>
+      </p:sp>
+      <p:sp>
+        <p:nvSpPr>
+          <p:cNvPr id="26" name="Text 24"/>
+          <p:cNvSpPr txBox="1"/>
+          <p:nvPr/>
+        </p:nvSpPr>
+        <p:spPr>
+          <a:xfrm>
+            <a:off x="10180015" y="3931920"/>
+            <a:ext cx="1143000" cy="256032"/>
+          </a:xfrm>
+          <a:prstGeom prst="rect">
+            <a:avLst/>
+          </a:prstGeom>
+          <a:noFill/>
+          <a:ln/>
+        </p:spPr>
+        <p:txBody>
+          <a:bodyPr wrap="square" lIns="0" tIns="0" rIns="0" bIns="0" rtlCol="0" anchor="ctr"/>
+          <a:lstStyle/>
+          <a:p>
+            <a:pPr algn="r" indent="0" marL="0">
+              <a:buNone/>
+            </a:pPr>
+            <a:r>
+              <a:rPr lang="en-US" sz="950" b="1" spc="100" kern="0" dirty="0">
+                <a:solidFill>
+                  <a:srgbClr val="38BDF8"/>
+                </a:solidFill>
+                <a:latin typeface="Arial" pitchFamily="34" charset="0"/>
+                <a:ea typeface="Arial" pitchFamily="34" charset="-122"/>
+                <a:cs typeface="Arial" pitchFamily="34" charset="-120"/>
+              </a:rPr>
+              <a:t>LỘ TRÌNH</a:t>
+            </a:r>
+            <a:endParaRPr lang="en-US" sz="950" dirty="0"/>
+          </a:p>
+        </p:txBody>
+      </p:sp>
+      <p:sp>
+        <p:nvSpPr>
+          <p:cNvPr id="27" name="Text 25"/>
+          <p:cNvSpPr txBox="1"/>
+          <p:nvPr/>
+        </p:nvSpPr>
+        <p:spPr>
+          <a:xfrm>
+            <a:off x="7467448" y="4114800"/>
+            <a:ext cx="3855568" cy="411480"/>
+          </a:xfrm>
+          <a:prstGeom prst="rect">
+            <a:avLst/>
+          </a:prstGeom>
+          <a:noFill/>
+          <a:ln/>
+        </p:spPr>
+        <p:txBody>
+          <a:bodyPr wrap="square" lIns="0" tIns="0" rIns="0" bIns="0" rtlCol="0" anchor="ctr"/>
+          <a:lstStyle/>
+          <a:p>
+            <a:pPr indent="0" marL="0">
+              <a:buNone/>
+            </a:pPr>
+            <a:r>
+              <a:rPr lang="en-US" sz="1800" b="1" dirty="0">
+                <a:solidFill>
+                  <a:srgbClr val="FFFFFF"/>
+                </a:solidFill>
+                <a:latin typeface="Arial" pitchFamily="34" charset="0"/>
+                <a:ea typeface="Arial" pitchFamily="34" charset="-122"/>
+                <a:cs typeface="Arial" pitchFamily="34" charset="-120"/>
+              </a:rPr>
+              <a:t>Tích hợp HIS sâu hơn</a:t>
+            </a:r>
+            <a:endParaRPr lang="en-US" sz="1800" dirty="0"/>
+          </a:p>
+        </p:txBody>
+      </p:sp>
+      <p:sp>
+        <p:nvSpPr>
+          <p:cNvPr id="28" name="Text 26"/>
+          <p:cNvSpPr txBox="1"/>
+          <p:nvPr/>
+        </p:nvSpPr>
+        <p:spPr>
+          <a:xfrm>
+            <a:off x="7467448" y="4572000"/>
+            <a:ext cx="3855568" cy="868680"/>
+          </a:xfrm>
+          <a:prstGeom prst="rect">
+            <a:avLst/>
+          </a:prstGeom>
+          <a:noFill/>
+          <a:ln/>
+        </p:spPr>
+        <p:txBody>
+          <a:bodyPr wrap="square" lIns="0" tIns="0" rIns="0" bIns="0" rtlCol="0" anchor="t"/>
+          <a:lstStyle/>
+          <a:p>
+            <a:pPr indent="0" marL="0">
+              <a:lnSpc>
+                <a:spcPts val="1900"/>
+              </a:lnSpc>
+              <a:buNone/>
+            </a:pPr>
+            <a:r>
+              <a:rPr lang="en-US" sz="1350" dirty="0">
+                <a:solidFill>
+                  <a:srgbClr val="A9BCD6"/>
+                </a:solidFill>
+                <a:latin typeface="Arial" pitchFamily="34" charset="0"/>
+                <a:ea typeface="Arial" pitchFamily="34" charset="-122"/>
+                <a:cs typeface="Arial" pitchFamily="34" charset="-120"/>
+              </a:rPr>
+              <a:t>Chủ động phát hiện lỗi logic ngay trên HIS — ví dụ sai thời gian, sai mã đối tượng — trước khi lập hồ sơ.</a:t>
+            </a:r>
+            <a:endParaRPr lang="en-US" sz="1350" dirty="0"/>
+          </a:p>
+        </p:txBody>
+      </p:sp>
+      <p:sp>
+        <p:nvSpPr>
+          <p:cNvPr id="29" name="Text 27"/>
+          <p:cNvSpPr txBox="1"/>
+          <p:nvPr/>
+        </p:nvSpPr>
+        <p:spPr>
+          <a:xfrm>
+            <a:off x="640080" y="5852160"/>
+            <a:ext cx="10911535" cy="384048"/>
+          </a:xfrm>
+          <a:prstGeom prst="rect">
+            <a:avLst/>
+          </a:prstGeom>
+          <a:noFill/>
+          <a:ln/>
+        </p:spPr>
+        <p:txBody>
+          <a:bodyPr wrap="square" lIns="0" tIns="0" rIns="0" bIns="0" rtlCol="0" anchor="ctr"/>
+          <a:lstStyle/>
+          <a:p>
+            <a:pPr algn="ctr" indent="0" marL="0">
+              <a:buNone/>
+            </a:pPr>
+            <a:r>
+              <a:rPr lang="en-US" sz="1600" dirty="0">
+                <a:solidFill>
+                  <a:srgbClr val="FBBF24"/>
+                </a:solidFill>
+                <a:latin typeface="Arial" pitchFamily="34" charset="0"/>
+                <a:ea typeface="Arial" pitchFamily="34" charset="-122"/>
+                <a:cs typeface="Arial" pitchFamily="34" charset="-120"/>
+              </a:rPr>
+              <a:t>Viện tập trung vào chuyên môn — phần mềm theo kịp quy định là việc của chúng tôi</a:t>
+            </a:r>
+            <a:endParaRPr lang="en-US" sz="1600" dirty="0"/>
+          </a:p>
+        </p:txBody>
+      </p:sp>
+      <p:sp>
+        <p:nvSpPr>
+          <p:cNvPr id="31" name="Text 28"/>
+          <p:cNvSpPr txBox="1"/>
+          <p:nvPr/>
+        </p:nvSpPr>
+        <p:spPr>
+          <a:xfrm>
+            <a:off x="6979615" y="6419088"/>
+            <a:ext cx="4572000" cy="256032"/>
+          </a:xfrm>
+          <a:prstGeom prst="rect">
+            <a:avLst/>
+          </a:prstGeom>
+          <a:noFill/>
+          <a:ln/>
+        </p:spPr>
+        <p:txBody>
+          <a:bodyPr wrap="square" lIns="0" tIns="0" rIns="0" bIns="0" rtlCol="0" anchor="ctr"/>
+          <a:lstStyle/>
+          <a:p>
+            <a:pPr algn="r" indent="0" marL="0">
+              <a:buNone/>
+            </a:pPr>
+            <a:r>
+              <a:rPr lang="en-US" sz="950" spc="100" kern="0" dirty="0">
+                <a:solidFill>
+                  <a:srgbClr val="7F93B0"/>
+                </a:solidFill>
+                <a:latin typeface="Arial" pitchFamily="34" charset="0"/>
+                <a:ea typeface="Arial" pitchFamily="34" charset="-122"/>
+                <a:cs typeface="Arial" pitchFamily="34" charset="-120"/>
+              </a:rPr>
+              <a:t>GIẢI PHÁP TIỀN GIÁM ĐỊNH  ·  10 / 12</a:t>
+            </a:r>
+            <a:endParaRPr lang="en-US" sz="950" dirty="0"/>
+          </a:p>
+        </p:txBody>
+      </p:sp>
+    </p:spTree>
+  </p:cSld>
+  <p:clrMapOvr>
+    <a:masterClrMapping/>
+  </p:clrMapOvr>
+</p:sld>
+</file>
+
+<file path=ppt/slides/slide11.xml><?xml version="1.0" encoding="utf-8"?>
+<p:sld xmlns:a="http://schemas.openxmlformats.org/drawingml/2006/main" xmlns:r="http://schemas.openxmlformats.org/officeDocument/2006/relationships" xmlns:p="http://schemas.openxmlformats.org/presentationml/2006/main">
+  <p:cSld name="Slide 11">
+    <p:bg>
+      <p:bgPr>
+        <a:blipFill dpi="0" rotWithShape="1">
+          <a:blip r:embed="rId1">
+            <a:lum/>
+          </a:blip>
+          <a:srcRect/>
+          <a:stretch>
+            <a:fillRect/>
+          </a:stretch>
+        </a:blipFill>
+        <a:effectLst/>
+      </p:bgPr>
+    </p:bg>
+    <p:spTree>
+      <p:nvGrpSpPr>
+        <p:cNvPr id="1" name=""/>
+        <p:cNvGrpSpPr/>
+        <p:nvPr/>
+      </p:nvGrpSpPr>
+      <p:grpSpPr>
+        <a:xfrm>
+          <a:off x="0" y="0"/>
+          <a:ext cx="0" cy="0"/>
+          <a:chOff x="0" y="0"/>
+          <a:chExt cx="0" cy="0"/>
+        </a:xfrm>
+      </p:grpSpPr>
+      <p:sp>
+        <p:nvSpPr>
+          <p:cNvPr id="2" name="Text 0"/>
+          <p:cNvSpPr txBox="1"/>
+          <p:nvPr/>
+        </p:nvSpPr>
+        <p:spPr>
+          <a:xfrm>
+            <a:off x="640080" y="411480"/>
+            <a:ext cx="10911535" cy="274320"/>
+          </a:xfrm>
+          <a:prstGeom prst="rect">
+            <a:avLst/>
+          </a:prstGeom>
+          <a:noFill/>
+          <a:ln/>
+        </p:spPr>
+        <p:txBody>
+          <a:bodyPr wrap="square" lIns="0" tIns="0" rIns="0" bIns="0" rtlCol="0" anchor="ctr"/>
+          <a:lstStyle/>
+          <a:p>
+            <a:pPr indent="0" marL="0">
+              <a:buNone/>
+            </a:pPr>
+            <a:r>
+              <a:rPr lang="en-US" sz="1200" b="1" spc="200" kern="0" dirty="0">
+                <a:solidFill>
+                  <a:srgbClr val="38BDF8"/>
+                </a:solidFill>
+                <a:latin typeface="Arial" pitchFamily="34" charset="0"/>
+                <a:ea typeface="Arial" pitchFamily="34" charset="-122"/>
+                <a:cs typeface="Arial" pitchFamily="34" charset="-120"/>
+              </a:rPr>
+              <a:t>ĐỀ XUẤT</a:t>
+            </a:r>
+            <a:endParaRPr lang="en-US" sz="1200" dirty="0"/>
+          </a:p>
+        </p:txBody>
+      </p:sp>
+      <p:sp>
+        <p:nvSpPr>
+          <p:cNvPr id="3" name="Text 1"/>
+          <p:cNvSpPr txBox="1"/>
+          <p:nvPr/>
+        </p:nvSpPr>
+        <p:spPr>
+          <a:xfrm>
+            <a:off x="640080" y="713232"/>
+            <a:ext cx="10911535" cy="566928"/>
+          </a:xfrm>
+          <a:prstGeom prst="rect">
+            <a:avLst/>
+          </a:prstGeom>
+          <a:noFill/>
+          <a:ln/>
+        </p:spPr>
+        <p:txBody>
+          <a:bodyPr wrap="square" lIns="0" tIns="0" rIns="0" bIns="0" rtlCol="0" anchor="ctr"/>
+          <a:lstStyle/>
+          <a:p>
+            <a:pPr indent="0" marL="0">
+              <a:buNone/>
+            </a:pPr>
+            <a:r>
+              <a:rPr lang="en-US" sz="2800" b="1" dirty="0">
+                <a:solidFill>
+                  <a:srgbClr val="FFFFFF"/>
+                </a:solidFill>
+                <a:latin typeface="Arial" pitchFamily="34" charset="0"/>
+                <a:ea typeface="Arial" pitchFamily="34" charset="-122"/>
+                <a:cs typeface="Arial" pitchFamily="34" charset="-120"/>
+              </a:rPr>
+              <a:t>Thí điểm 4–8 tuần, đo bằng số liệu của chính viện</a:t>
+            </a:r>
+            <a:endParaRPr lang="en-US" sz="2800" dirty="0"/>
+          </a:p>
+        </p:txBody>
+      </p:sp>
+      <p:sp>
+        <p:nvSpPr>
+          <p:cNvPr id="4" name="Shape 2"/>
+          <p:cNvSpPr/>
+          <p:nvPr/>
+        </p:nvSpPr>
+        <p:spPr>
+          <a:xfrm>
+            <a:off x="640080" y="1508760"/>
+            <a:ext cx="6309360" cy="841248"/>
+          </a:xfrm>
+          <a:prstGeom prst="roundRect">
+            <a:avLst>
+              <a:gd name="adj" fmla="val 10870"/>
+            </a:avLst>
+          </a:prstGeom>
+          <a:solidFill>
+            <a:srgbClr val="1C3558">
+              <a:alpha val="85000"/>
+            </a:srgbClr>
+          </a:solidFill>
+          <a:ln w="9525">
+            <a:solidFill>
+              <a:srgbClr val="2E4B74"/>
+            </a:solidFill>
+            <a:prstDash val="solid"/>
+          </a:ln>
+        </p:spPr>
+      </p:sp>
+      <p:sp>
+        <p:nvSpPr>
+          <p:cNvPr id="5" name="Text 3"/>
+          <p:cNvSpPr txBox="1"/>
+          <p:nvPr/>
+        </p:nvSpPr>
+        <p:spPr>
+          <a:xfrm>
+            <a:off x="914400" y="1508760"/>
+            <a:ext cx="1737360" cy="841248"/>
+          </a:xfrm>
+          <a:prstGeom prst="rect">
+            <a:avLst/>
+          </a:prstGeom>
+          <a:noFill/>
+          <a:ln/>
+        </p:spPr>
+        <p:txBody>
+          <a:bodyPr wrap="square" lIns="0" tIns="0" rIns="0" bIns="0" rtlCol="0" anchor="ctr"/>
+          <a:lstStyle/>
+          <a:p>
+            <a:pPr indent="0" marL="0">
+              <a:buNone/>
+            </a:pPr>
+            <a:r>
+              <a:rPr lang="en-US" sz="1100" b="1" spc="100" kern="0" dirty="0">
+                <a:solidFill>
+                  <a:srgbClr val="38BDF8"/>
+                </a:solidFill>
+                <a:latin typeface="Arial" pitchFamily="34" charset="0"/>
+                <a:ea typeface="Arial" pitchFamily="34" charset="-122"/>
+                <a:cs typeface="Arial" pitchFamily="34" charset="-120"/>
+              </a:rPr>
+              <a:t>PHẠM VI</a:t>
+            </a:r>
+            <a:endParaRPr lang="en-US" sz="1100" dirty="0"/>
+          </a:p>
+        </p:txBody>
+      </p:sp>
+      <p:sp>
+        <p:nvSpPr>
+          <p:cNvPr id="6" name="Text 4"/>
+          <p:cNvSpPr txBox="1"/>
+          <p:nvPr/>
+        </p:nvSpPr>
+        <p:spPr>
+          <a:xfrm>
+            <a:off x="2697480" y="1508760"/>
+            <a:ext cx="4023360" cy="841248"/>
+          </a:xfrm>
+          <a:prstGeom prst="rect">
+            <a:avLst/>
+          </a:prstGeom>
+          <a:noFill/>
+          <a:ln/>
+        </p:spPr>
+        <p:txBody>
+          <a:bodyPr wrap="square" lIns="0" tIns="0" rIns="0" bIns="0" rtlCol="0" anchor="ctr"/>
+          <a:lstStyle/>
+          <a:p>
+            <a:pPr indent="0" marL="0">
+              <a:lnSpc>
+                <a:spcPts val="1900"/>
+              </a:lnSpc>
+              <a:buNone/>
+            </a:pPr>
+            <a:r>
+              <a:rPr lang="en-US" sz="1400" dirty="0">
+                <a:solidFill>
+                  <a:srgbClr val="FFFFFF"/>
+                </a:solidFill>
+                <a:latin typeface="Arial" pitchFamily="34" charset="0"/>
+                <a:ea typeface="Arial" pitchFamily="34" charset="-122"/>
+                <a:cs typeface="Arial" pitchFamily="34" charset="-120"/>
+              </a:rPr>
+              <a:t>Kiểm hồ sơ XML 3176 chạy song song quy trình hiện tại; chưa bật tự gửi cổng.</a:t>
+            </a:r>
+            <a:endParaRPr lang="en-US" sz="1400" dirty="0"/>
+          </a:p>
+        </p:txBody>
+      </p:sp>
+      <p:sp>
+        <p:nvSpPr>
+          <p:cNvPr id="7" name="Shape 5"/>
+          <p:cNvSpPr/>
+          <p:nvPr/>
+        </p:nvSpPr>
+        <p:spPr>
+          <a:xfrm>
+            <a:off x="640080" y="2478024"/>
+            <a:ext cx="6309360" cy="841248"/>
+          </a:xfrm>
+          <a:prstGeom prst="roundRect">
+            <a:avLst>
+              <a:gd name="adj" fmla="val 10870"/>
+            </a:avLst>
+          </a:prstGeom>
+          <a:solidFill>
+            <a:srgbClr val="1C3558">
+              <a:alpha val="85000"/>
+            </a:srgbClr>
+          </a:solidFill>
+          <a:ln w="9525">
+            <a:solidFill>
+              <a:srgbClr val="2E4B74"/>
+            </a:solidFill>
+            <a:prstDash val="solid"/>
+          </a:ln>
+        </p:spPr>
+      </p:sp>
+      <p:sp>
+        <p:nvSpPr>
+          <p:cNvPr id="8" name="Text 6"/>
+          <p:cNvSpPr txBox="1"/>
+          <p:nvPr/>
+        </p:nvSpPr>
+        <p:spPr>
+          <a:xfrm>
+            <a:off x="914400" y="2478024"/>
+            <a:ext cx="1737360" cy="841248"/>
+          </a:xfrm>
+          <a:prstGeom prst="rect">
+            <a:avLst/>
+          </a:prstGeom>
+          <a:noFill/>
+          <a:ln/>
+        </p:spPr>
+        <p:txBody>
+          <a:bodyPr wrap="square" lIns="0" tIns="0" rIns="0" bIns="0" rtlCol="0" anchor="ctr"/>
+          <a:lstStyle/>
+          <a:p>
+            <a:pPr indent="0" marL="0">
+              <a:buNone/>
+            </a:pPr>
+            <a:r>
+              <a:rPr lang="en-US" sz="1100" b="1" spc="100" kern="0" dirty="0">
+                <a:solidFill>
+                  <a:srgbClr val="38BDF8"/>
+                </a:solidFill>
+                <a:latin typeface="Arial" pitchFamily="34" charset="0"/>
+                <a:ea typeface="Arial" pitchFamily="34" charset="-122"/>
+                <a:cs typeface="Arial" pitchFamily="34" charset="-120"/>
+              </a:rPr>
+              <a:t>VIỆN CỬ</a:t>
+            </a:r>
+            <a:endParaRPr lang="en-US" sz="1100" dirty="0"/>
+          </a:p>
+        </p:txBody>
+      </p:sp>
+      <p:sp>
+        <p:nvSpPr>
+          <p:cNvPr id="9" name="Text 7"/>
+          <p:cNvSpPr txBox="1"/>
+          <p:nvPr/>
+        </p:nvSpPr>
+        <p:spPr>
+          <a:xfrm>
+            <a:off x="2697480" y="2478024"/>
+            <a:ext cx="4023360" cy="841248"/>
+          </a:xfrm>
+          <a:prstGeom prst="rect">
+            <a:avLst/>
+          </a:prstGeom>
+          <a:noFill/>
+          <a:ln/>
+        </p:spPr>
+        <p:txBody>
+          <a:bodyPr wrap="square" lIns="0" tIns="0" rIns="0" bIns="0" rtlCol="0" anchor="ctr"/>
+          <a:lstStyle/>
+          <a:p>
+            <a:pPr indent="0" marL="0">
+              <a:lnSpc>
+                <a:spcPts val="1900"/>
+              </a:lnSpc>
+              <a:buNone/>
+            </a:pPr>
+            <a:r>
+              <a:rPr lang="en-US" sz="1400" dirty="0">
+                <a:solidFill>
+                  <a:srgbClr val="FFFFFF"/>
+                </a:solidFill>
+                <a:latin typeface="Arial" pitchFamily="34" charset="0"/>
+                <a:ea typeface="Arial" pitchFamily="34" charset="-122"/>
+                <a:cs typeface="Arial" pitchFamily="34" charset="-120"/>
+              </a:rPr>
+              <a:t>1 đầu mối phòng KHTH  ·  1 người phụ trách danh mục BHYT  ·  1 cán bộ CNTT</a:t>
+            </a:r>
+            <a:endParaRPr lang="en-US" sz="1400" dirty="0"/>
+          </a:p>
+        </p:txBody>
+      </p:sp>
+      <p:sp>
+        <p:nvSpPr>
+          <p:cNvPr id="10" name="Shape 8"/>
+          <p:cNvSpPr/>
+          <p:nvPr/>
+        </p:nvSpPr>
+        <p:spPr>
+          <a:xfrm>
+            <a:off x="640080" y="3447288"/>
+            <a:ext cx="6309360" cy="841248"/>
+          </a:xfrm>
+          <a:prstGeom prst="roundRect">
+            <a:avLst>
+              <a:gd name="adj" fmla="val 10870"/>
+            </a:avLst>
+          </a:prstGeom>
+          <a:solidFill>
+            <a:srgbClr val="1C3558">
+              <a:alpha val="85000"/>
+            </a:srgbClr>
+          </a:solidFill>
+          <a:ln w="9525">
+            <a:solidFill>
+              <a:srgbClr val="2E4B74"/>
+            </a:solidFill>
+            <a:prstDash val="solid"/>
+          </a:ln>
+        </p:spPr>
+      </p:sp>
+      <p:sp>
+        <p:nvSpPr>
+          <p:cNvPr id="11" name="Text 9"/>
+          <p:cNvSpPr txBox="1"/>
+          <p:nvPr/>
+        </p:nvSpPr>
+        <p:spPr>
+          <a:xfrm>
+            <a:off x="914400" y="3447288"/>
+            <a:ext cx="1737360" cy="841248"/>
+          </a:xfrm>
+          <a:prstGeom prst="rect">
+            <a:avLst/>
+          </a:prstGeom>
+          <a:noFill/>
+          <a:ln/>
+        </p:spPr>
+        <p:txBody>
+          <a:bodyPr wrap="square" lIns="0" tIns="0" rIns="0" bIns="0" rtlCol="0" anchor="ctr"/>
+          <a:lstStyle/>
+          <a:p>
+            <a:pPr indent="0" marL="0">
+              <a:buNone/>
+            </a:pPr>
+            <a:r>
+              <a:rPr lang="en-US" sz="1100" b="1" spc="100" kern="0" dirty="0">
+                <a:solidFill>
+                  <a:srgbClr val="38BDF8"/>
+                </a:solidFill>
+                <a:latin typeface="Arial" pitchFamily="34" charset="0"/>
+                <a:ea typeface="Arial" pitchFamily="34" charset="-122"/>
+                <a:cs typeface="Arial" pitchFamily="34" charset="-120"/>
+              </a:rPr>
+              <a:t>CHÚNG TÔI LÀM</a:t>
+            </a:r>
+            <a:endParaRPr lang="en-US" sz="1100" dirty="0"/>
+          </a:p>
+        </p:txBody>
+      </p:sp>
+      <p:sp>
+        <p:nvSpPr>
+          <p:cNvPr id="12" name="Text 10"/>
+          <p:cNvSpPr txBox="1"/>
+          <p:nvPr/>
+        </p:nvSpPr>
+        <p:spPr>
+          <a:xfrm>
+            <a:off x="2697480" y="3447288"/>
+            <a:ext cx="4023360" cy="841248"/>
+          </a:xfrm>
+          <a:prstGeom prst="rect">
+            <a:avLst/>
+          </a:prstGeom>
+          <a:noFill/>
+          <a:ln/>
+        </p:spPr>
+        <p:txBody>
+          <a:bodyPr wrap="square" lIns="0" tIns="0" rIns="0" bIns="0" rtlCol="0" anchor="ctr"/>
+          <a:lstStyle/>
+          <a:p>
+            <a:pPr indent="0" marL="0">
+              <a:lnSpc>
+                <a:spcPts val="1900"/>
+              </a:lnSpc>
+              <a:buNone/>
+            </a:pPr>
+            <a:r>
+              <a:rPr lang="en-US" sz="1400" dirty="0">
+                <a:solidFill>
+                  <a:srgbClr val="FFFFFF"/>
+                </a:solidFill>
+                <a:latin typeface="Arial" pitchFamily="34" charset="0"/>
+                <a:ea typeface="Arial" pitchFamily="34" charset="-122"/>
+                <a:cs typeface="Arial" pitchFamily="34" charset="-120"/>
+              </a:rPr>
+              <a:t>Cài đặt tại viện, nạp danh mục, đào tạo người dùng, theo dõi kết quả cùng viện.</a:t>
+            </a:r>
+            <a:endParaRPr lang="en-US" sz="1400" dirty="0"/>
+          </a:p>
+        </p:txBody>
+      </p:sp>
+      <p:sp>
+        <p:nvSpPr>
+          <p:cNvPr id="13" name="Shape 11"/>
+          <p:cNvSpPr/>
+          <p:nvPr/>
+        </p:nvSpPr>
+        <p:spPr>
+          <a:xfrm>
+            <a:off x="640080" y="4416552"/>
+            <a:ext cx="6309360" cy="841248"/>
+          </a:xfrm>
+          <a:prstGeom prst="roundRect">
+            <a:avLst>
+              <a:gd name="adj" fmla="val 10870"/>
+            </a:avLst>
+          </a:prstGeom>
+          <a:solidFill>
+            <a:srgbClr val="1C3558">
+              <a:alpha val="85000"/>
+            </a:srgbClr>
+          </a:solidFill>
+          <a:ln w="9525">
+            <a:solidFill>
+              <a:srgbClr val="2E4B74"/>
+            </a:solidFill>
+            <a:prstDash val="solid"/>
+          </a:ln>
+        </p:spPr>
+      </p:sp>
+      <p:sp>
+        <p:nvSpPr>
+          <p:cNvPr id="14" name="Text 12"/>
+          <p:cNvSpPr txBox="1"/>
+          <p:nvPr/>
+        </p:nvSpPr>
+        <p:spPr>
+          <a:xfrm>
+            <a:off x="914400" y="4416552"/>
+            <a:ext cx="1737360" cy="841248"/>
+          </a:xfrm>
+          <a:prstGeom prst="rect">
+            <a:avLst/>
+          </a:prstGeom>
+          <a:noFill/>
+          <a:ln/>
+        </p:spPr>
+        <p:txBody>
+          <a:bodyPr wrap="square" lIns="0" tIns="0" rIns="0" bIns="0" rtlCol="0" anchor="ctr"/>
+          <a:lstStyle/>
+          <a:p>
+            <a:pPr indent="0" marL="0">
+              <a:buNone/>
+            </a:pPr>
+            <a:r>
+              <a:rPr lang="en-US" sz="1100" b="1" spc="100" kern="0" dirty="0">
+                <a:solidFill>
+                  <a:srgbClr val="38BDF8"/>
+                </a:solidFill>
+                <a:latin typeface="Arial" pitchFamily="34" charset="0"/>
+                <a:ea typeface="Arial" pitchFamily="34" charset="-122"/>
+                <a:cs typeface="Arial" pitchFamily="34" charset="-120"/>
+              </a:rPr>
+              <a:t>CHI PHÍ</a:t>
+            </a:r>
+            <a:endParaRPr lang="en-US" sz="1100" dirty="0"/>
+          </a:p>
+        </p:txBody>
+      </p:sp>
+      <p:sp>
+        <p:nvSpPr>
+          <p:cNvPr id="15" name="Text 13"/>
+          <p:cNvSpPr txBox="1"/>
+          <p:nvPr/>
+        </p:nvSpPr>
+        <p:spPr>
+          <a:xfrm>
+            <a:off x="2697480" y="4416552"/>
+            <a:ext cx="4023360" cy="841248"/>
+          </a:xfrm>
+          <a:prstGeom prst="rect">
+            <a:avLst/>
+          </a:prstGeom>
+          <a:noFill/>
+          <a:ln/>
+        </p:spPr>
+        <p:txBody>
+          <a:bodyPr wrap="square" lIns="0" tIns="0" rIns="0" bIns="0" rtlCol="0" anchor="ctr"/>
+          <a:lstStyle/>
+          <a:p>
+            <a:pPr indent="0" marL="0">
+              <a:lnSpc>
+                <a:spcPts val="1900"/>
+              </a:lnSpc>
+              <a:buNone/>
+            </a:pPr>
+            <a:r>
+              <a:rPr lang="en-US" sz="1400" dirty="0">
+                <a:solidFill>
+                  <a:srgbClr val="FFFFFF"/>
+                </a:solidFill>
+                <a:latin typeface="Arial" pitchFamily="34" charset="0"/>
+                <a:ea typeface="Arial" pitchFamily="34" charset="-122"/>
+                <a:cs typeface="Arial" pitchFamily="34" charset="-120"/>
+              </a:rPr>
+              <a:t>………………………………</a:t>
+            </a:r>
+            <a:endParaRPr lang="en-US" sz="1400" dirty="0"/>
+          </a:p>
+        </p:txBody>
+      </p:sp>
+      <p:sp>
+        <p:nvSpPr>
+          <p:cNvPr id="16" name="Shape 14"/>
+          <p:cNvSpPr/>
+          <p:nvPr/>
+        </p:nvSpPr>
+        <p:spPr>
+          <a:xfrm>
+            <a:off x="7223760" y="1508760"/>
+            <a:ext cx="4327855" cy="3749040"/>
+          </a:xfrm>
+          <a:prstGeom prst="roundRect">
+            <a:avLst>
+              <a:gd name="adj" fmla="val 2439"/>
+            </a:avLst>
+          </a:prstGeom>
+          <a:solidFill>
+            <a:srgbClr val="25324A">
+              <a:alpha val="85000"/>
+            </a:srgbClr>
+          </a:solidFill>
+          <a:ln w="19050">
+            <a:solidFill>
+              <a:srgbClr val="FBBF24"/>
+            </a:solidFill>
+            <a:prstDash val="solid"/>
+          </a:ln>
+        </p:spPr>
+      </p:sp>
+      <p:sp>
+        <p:nvSpPr>
+          <p:cNvPr id="17" name="Text 15"/>
+          <p:cNvSpPr txBox="1"/>
+          <p:nvPr/>
+        </p:nvSpPr>
+        <p:spPr>
+          <a:xfrm>
+            <a:off x="7498080" y="1691640"/>
+            <a:ext cx="3779215" cy="310896"/>
+          </a:xfrm>
+          <a:prstGeom prst="rect">
+            <a:avLst/>
+          </a:prstGeom>
+          <a:noFill/>
+          <a:ln/>
+        </p:spPr>
+        <p:txBody>
+          <a:bodyPr wrap="square" lIns="0" tIns="0" rIns="0" bIns="0" rtlCol="0" anchor="ctr"/>
+          <a:lstStyle/>
+          <a:p>
+            <a:pPr indent="0" marL="0">
+              <a:buNone/>
+            </a:pPr>
+            <a:r>
+              <a:rPr lang="en-US" sz="1200" b="1" spc="200" kern="0" dirty="0">
+                <a:solidFill>
+                  <a:srgbClr val="FBBF24"/>
+                </a:solidFill>
+                <a:latin typeface="Arial" pitchFamily="34" charset="0"/>
+                <a:ea typeface="Arial" pitchFamily="34" charset="-122"/>
+                <a:cs typeface="Arial" pitchFamily="34" charset="-120"/>
+              </a:rPr>
+              <a:t>ĐO GÌ ĐỂ QUYẾT ĐỊNH</a:t>
+            </a:r>
+            <a:endParaRPr lang="en-US" sz="1200" dirty="0"/>
+          </a:p>
+        </p:txBody>
+      </p:sp>
+      <p:sp>
+        <p:nvSpPr>
+          <p:cNvPr id="18" name="Text 16"/>
+          <p:cNvSpPr txBox="1"/>
+          <p:nvPr/>
+        </p:nvSpPr>
+        <p:spPr>
+          <a:xfrm>
+            <a:off x="7498080" y="2148840"/>
+            <a:ext cx="3779215" cy="2011680"/>
+          </a:xfrm>
+          <a:prstGeom prst="rect">
+            <a:avLst/>
+          </a:prstGeom>
+          <a:noFill/>
+          <a:ln/>
+        </p:spPr>
+        <p:txBody>
+          <a:bodyPr wrap="square" lIns="0" tIns="0" rIns="0" bIns="0" rtlCol="0" anchor="t"/>
+          <a:lstStyle/>
+          <a:p>
+            <a:pPr marL="203200" indent="-203200">
+              <a:lnSpc>
+                <a:spcPts val="2000"/>
+              </a:lnSpc>
+              <a:spcAft>
+                <a:spcPts val="1000"/>
+              </a:spcAft>
+              <a:buSzPct val="100000"/>
+              <a:buChar char="•"/>
+            </a:pPr>
+            <a:r>
+              <a:rPr lang="en-US" sz="1500" dirty="0">
+                <a:solidFill>
+                  <a:srgbClr val="FFFFFF"/>
+                </a:solidFill>
+                <a:latin typeface="Arial" pitchFamily="34" charset="0"/>
+                <a:ea typeface="Arial" pitchFamily="34" charset="-122"/>
+                <a:cs typeface="Arial" pitchFamily="34" charset="-120"/>
+              </a:rPr>
+              <a:t>Tỷ lệ hồ sơ còn lỗi nghiêm trọng trước khi gửi</a:t>
+            </a:r>
+            <a:endParaRPr lang="en-US" sz="1500" dirty="0"/>
+          </a:p>
+          <a:p>
+            <a:pPr marL="203200" indent="-203200">
+              <a:lnSpc>
+                <a:spcPts val="2000"/>
+              </a:lnSpc>
+              <a:spcAft>
+                <a:spcPts val="1000"/>
+              </a:spcAft>
+              <a:buSzPct val="100000"/>
+              <a:buChar char="•"/>
+            </a:pPr>
+            <a:r>
+              <a:rPr lang="en-US" sz="1500" dirty="0">
+                <a:solidFill>
+                  <a:srgbClr val="FFFFFF"/>
+                </a:solidFill>
+                <a:latin typeface="Arial" pitchFamily="34" charset="0"/>
+                <a:ea typeface="Arial" pitchFamily="34" charset="-122"/>
+                <a:cs typeface="Arial" pitchFamily="34" charset="-120"/>
+              </a:rPr>
+              <a:t>Số hồ sơ bị cổng giám định trả về</a:t>
+            </a:r>
+            <a:endParaRPr lang="en-US" sz="1500" dirty="0"/>
+          </a:p>
+          <a:p>
+            <a:pPr marL="203200" indent="-203200">
+              <a:lnSpc>
+                <a:spcPts val="2000"/>
+              </a:lnSpc>
+              <a:spcAft>
+                <a:spcPts val="1000"/>
+              </a:spcAft>
+              <a:buSzPct val="100000"/>
+              <a:buChar char="•"/>
+            </a:pPr>
+            <a:r>
+              <a:rPr lang="en-US" sz="1500" dirty="0">
+                <a:solidFill>
+                  <a:srgbClr val="FFFFFF"/>
+                </a:solidFill>
+                <a:latin typeface="Arial" pitchFamily="34" charset="0"/>
+                <a:ea typeface="Arial" pitchFamily="34" charset="-122"/>
+                <a:cs typeface="Arial" pitchFamily="34" charset="-120"/>
+              </a:rPr>
+              <a:t>Thời gian sửa một hồ sơ lỗi</a:t>
+            </a:r>
+            <a:endParaRPr lang="en-US" sz="1500" dirty="0"/>
+          </a:p>
+          <a:p>
+            <a:pPr marL="203200" indent="-203200">
+              <a:lnSpc>
+                <a:spcPts val="2000"/>
+              </a:lnSpc>
+              <a:spcAft>
+                <a:spcPts val="1000"/>
+              </a:spcAft>
+              <a:buSzPct val="100000"/>
+              <a:buChar char="•"/>
+            </a:pPr>
+            <a:r>
+              <a:rPr lang="en-US" sz="1500" dirty="0">
+                <a:solidFill>
+                  <a:srgbClr val="FFFFFF"/>
+                </a:solidFill>
+                <a:latin typeface="Arial" pitchFamily="34" charset="0"/>
+                <a:ea typeface="Arial" pitchFamily="34" charset="-122"/>
+                <a:cs typeface="Arial" pitchFamily="34" charset="-120"/>
+              </a:rPr>
+              <a:t>Số hồ sơ tồn đọng theo tuổi</a:t>
+            </a:r>
+            <a:endParaRPr lang="en-US" sz="1500" dirty="0"/>
+          </a:p>
+        </p:txBody>
+      </p:sp>
+      <p:sp>
+        <p:nvSpPr>
+          <p:cNvPr id="19" name="Text 17"/>
+          <p:cNvSpPr txBox="1"/>
+          <p:nvPr/>
+        </p:nvSpPr>
+        <p:spPr>
+          <a:xfrm>
+            <a:off x="7498080" y="4343400"/>
+            <a:ext cx="3779215" cy="731520"/>
+          </a:xfrm>
+          <a:prstGeom prst="rect">
+            <a:avLst/>
+          </a:prstGeom>
+          <a:noFill/>
+          <a:ln/>
+        </p:spPr>
+        <p:txBody>
+          <a:bodyPr wrap="square" lIns="0" tIns="0" rIns="0" bIns="0" rtlCol="0" anchor="t"/>
+          <a:lstStyle/>
+          <a:p>
+            <a:pPr indent="0" marL="0">
+              <a:lnSpc>
+                <a:spcPts val="1800"/>
+              </a:lnSpc>
+              <a:buNone/>
+            </a:pPr>
+            <a:r>
+              <a:rPr lang="en-US" sz="1300" i="1" dirty="0">
+                <a:solidFill>
+                  <a:srgbClr val="A9BCD6"/>
+                </a:solidFill>
+                <a:latin typeface="Arial" pitchFamily="34" charset="0"/>
+                <a:ea typeface="Arial" pitchFamily="34" charset="-122"/>
+                <a:cs typeface="Arial" pitchFamily="34" charset="-120"/>
+              </a:rPr>
+              <a:t>Kết thúc thí điểm: báo cáo số liệu để lãnh đạo quyết định nhân rộng.</a:t>
+            </a:r>
+            <a:endParaRPr lang="en-US" sz="1300" dirty="0"/>
+          </a:p>
+        </p:txBody>
+      </p:sp>
+      <p:sp>
+        <p:nvSpPr>
+          <p:cNvPr id="20" name="Text 18"/>
+          <p:cNvSpPr txBox="1"/>
+          <p:nvPr/>
+        </p:nvSpPr>
+        <p:spPr>
+          <a:xfrm>
+            <a:off x="640080" y="5623560"/>
+            <a:ext cx="10911535" cy="384048"/>
+          </a:xfrm>
+          <a:prstGeom prst="rect">
+            <a:avLst/>
+          </a:prstGeom>
+          <a:noFill/>
+          <a:ln/>
+        </p:spPr>
+        <p:txBody>
+          <a:bodyPr wrap="square" lIns="0" tIns="0" rIns="0" bIns="0" rtlCol="0" anchor="ctr"/>
+          <a:lstStyle/>
+          <a:p>
+            <a:pPr algn="ctr" indent="0" marL="0">
+              <a:buNone/>
+            </a:pPr>
+            <a:r>
+              <a:rPr lang="en-US" sz="1600" dirty="0">
+                <a:solidFill>
+                  <a:srgbClr val="FBBF24"/>
+                </a:solidFill>
+                <a:latin typeface="Arial" pitchFamily="34" charset="0"/>
+                <a:ea typeface="Arial" pitchFamily="34" charset="-122"/>
+                <a:cs typeface="Arial" pitchFamily="34" charset="-120"/>
+              </a:rPr>
+              <a:t>Hôm nay chỉ cần một quyết định: cho phép thí điểm</a:t>
+            </a:r>
+            <a:endParaRPr lang="en-US" sz="1600" dirty="0"/>
+          </a:p>
+        </p:txBody>
+      </p:sp>
+      <p:sp>
+        <p:nvSpPr>
+          <p:cNvPr id="22" name="Text 19"/>
+          <p:cNvSpPr txBox="1"/>
+          <p:nvPr/>
+        </p:nvSpPr>
+        <p:spPr>
+          <a:xfrm>
+            <a:off x="6979615" y="6419088"/>
+            <a:ext cx="4572000" cy="256032"/>
+          </a:xfrm>
+          <a:prstGeom prst="rect">
+            <a:avLst/>
+          </a:prstGeom>
+          <a:noFill/>
+          <a:ln/>
+        </p:spPr>
+        <p:txBody>
+          <a:bodyPr wrap="square" lIns="0" tIns="0" rIns="0" bIns="0" rtlCol="0" anchor="ctr"/>
+          <a:lstStyle/>
+          <a:p>
+            <a:pPr algn="r" indent="0" marL="0">
+              <a:buNone/>
+            </a:pPr>
+            <a:r>
+              <a:rPr lang="en-US" sz="950" spc="100" kern="0" dirty="0">
+                <a:solidFill>
+                  <a:srgbClr val="7F93B0"/>
+                </a:solidFill>
+                <a:latin typeface="Arial" pitchFamily="34" charset="0"/>
+                <a:ea typeface="Arial" pitchFamily="34" charset="-122"/>
+                <a:cs typeface="Arial" pitchFamily="34" charset="-120"/>
+              </a:rPr>
+              <a:t>GIẢI PHÁP TIỀN GIÁM ĐỊNH  ·  11 / 12</a:t>
+            </a:r>
+            <a:endParaRPr lang="en-US" sz="950" dirty="0"/>
+          </a:p>
+        </p:txBody>
+      </p:sp>
+    </p:spTree>
+  </p:cSld>
+  <p:clrMapOvr>
+    <a:masterClrMapping/>
+  </p:clrMapOvr>
+</p:sld>
+</file>
+
+<file path=ppt/slides/slide12.xml><?xml version="1.0" encoding="utf-8"?>
+<p:sld xmlns:a="http://schemas.openxmlformats.org/drawingml/2006/main" xmlns:r="http://schemas.openxmlformats.org/officeDocument/2006/relationships" xmlns:p="http://schemas.openxmlformats.org/presentationml/2006/main">
+  <p:cSld name="Slide 12">
+    <p:bg>
+      <p:bgPr>
+        <a:blipFill dpi="0" rotWithShape="1">
+          <a:blip r:embed="rId1">
+            <a:lum/>
+          </a:blip>
+          <a:srcRect/>
+          <a:stretch>
+            <a:fillRect/>
+          </a:stretch>
+        </a:blipFill>
+        <a:effectLst/>
+      </p:bgPr>
+    </p:bg>
+    <p:spTree>
+      <p:nvGrpSpPr>
+        <p:cNvPr id="1" name=""/>
+        <p:cNvGrpSpPr/>
+        <p:nvPr/>
+      </p:nvGrpSpPr>
+      <p:grpSpPr>
+        <a:xfrm>
+          <a:off x="0" y="0"/>
+          <a:ext cx="0" cy="0"/>
+          <a:chOff x="0" y="0"/>
+          <a:chExt cx="0" cy="0"/>
+        </a:xfrm>
+      </p:grpSpPr>
+      <p:sp>
+        <p:nvSpPr>
+          <p:cNvPr id="2" name="Text 0"/>
+          <p:cNvSpPr txBox="1"/>
+          <p:nvPr/>
+        </p:nvSpPr>
+        <p:spPr>
+          <a:xfrm>
+            <a:off x="457200" y="1417320"/>
+            <a:ext cx="11277295" cy="914400"/>
+          </a:xfrm>
+          <a:prstGeom prst="rect">
+            <a:avLst/>
+          </a:prstGeom>
+          <a:noFill/>
+          <a:ln/>
+        </p:spPr>
+        <p:txBody>
+          <a:bodyPr wrap="square" lIns="0" tIns="0" rIns="0" bIns="0" rtlCol="0" anchor="ctr"/>
+          <a:lstStyle/>
+          <a:p>
+            <a:pPr algn="ctr" indent="0" marL="0">
+              <a:buNone/>
+            </a:pPr>
+            <a:r>
+              <a:rPr lang="en-US" sz="3600" b="1" dirty="0">
+                <a:solidFill>
+                  <a:srgbClr val="FFFFFF"/>
+                </a:solidFill>
+                <a:latin typeface="Arial" pitchFamily="34" charset="0"/>
+                <a:ea typeface="Arial" pitchFamily="34" charset="-122"/>
+                <a:cs typeface="Arial" pitchFamily="34" charset="-120"/>
+              </a:rPr>
+              <a:t>Phát hiện sớm</a:t>
+            </a:r>
+            <a:pPr algn="ctr" indent="0" marL="0">
+              <a:buNone/>
+            </a:pPr>
+            <a:r>
+              <a:rPr lang="en-US" sz="3600" b="1" dirty="0">
+                <a:solidFill>
+                  <a:srgbClr val="7F93B0"/>
+                </a:solidFill>
+                <a:latin typeface="Arial" pitchFamily="34" charset="0"/>
+                <a:ea typeface="Arial" pitchFamily="34" charset="-122"/>
+                <a:cs typeface="Arial" pitchFamily="34" charset="-120"/>
+              </a:rPr>
+              <a:t>  ·  </a:t>
+            </a:r>
+            <a:pPr algn="ctr" indent="0" marL="0">
+              <a:buNone/>
+            </a:pPr>
+            <a:r>
+              <a:rPr lang="en-US" sz="3600" b="1" dirty="0">
+                <a:solidFill>
+                  <a:srgbClr val="38BDF8"/>
+                </a:solidFill>
+                <a:latin typeface="Arial" pitchFamily="34" charset="0"/>
+                <a:ea typeface="Arial" pitchFamily="34" charset="-122"/>
+                <a:cs typeface="Arial" pitchFamily="34" charset="-120"/>
+              </a:rPr>
+              <a:t>Sửa tại nguồn</a:t>
+            </a:r>
+            <a:pPr algn="ctr" indent="0" marL="0">
+              <a:buNone/>
+            </a:pPr>
+            <a:r>
+              <a:rPr lang="en-US" sz="3600" b="1" dirty="0">
+                <a:solidFill>
+                  <a:srgbClr val="7F93B0"/>
+                </a:solidFill>
+                <a:latin typeface="Arial" pitchFamily="34" charset="0"/>
+                <a:ea typeface="Arial" pitchFamily="34" charset="-122"/>
+                <a:cs typeface="Arial" pitchFamily="34" charset="-120"/>
+              </a:rPr>
+              <a:t>  ·  </a:t>
+            </a:r>
+            <a:pPr algn="ctr" indent="0" marL="0">
+              <a:buNone/>
+            </a:pPr>
+            <a:r>
+              <a:rPr lang="en-US" sz="3600" b="1" dirty="0">
+                <a:solidFill>
+                  <a:srgbClr val="FBBF24"/>
+                </a:solidFill>
+                <a:latin typeface="Arial" pitchFamily="34" charset="0"/>
+                <a:ea typeface="Arial" pitchFamily="34" charset="-122"/>
+                <a:cs typeface="Arial" pitchFamily="34" charset="-120"/>
+              </a:rPr>
+              <a:t>Gửi hồ sơ sạch</a:t>
+            </a:r>
+            <a:endParaRPr lang="en-US" sz="3600" dirty="0"/>
+          </a:p>
+        </p:txBody>
+      </p:sp>
+      <p:sp>
+        <p:nvSpPr>
+          <p:cNvPr id="3" name="Text 1"/>
+          <p:cNvSpPr txBox="1"/>
+          <p:nvPr/>
+        </p:nvSpPr>
+        <p:spPr>
+          <a:xfrm>
+            <a:off x="914400" y="2560320"/>
+            <a:ext cx="10362895" cy="868680"/>
+          </a:xfrm>
+          <a:prstGeom prst="rect">
+            <a:avLst/>
+          </a:prstGeom>
+          <a:noFill/>
+          <a:ln/>
+        </p:spPr>
+        <p:txBody>
+          <a:bodyPr wrap="square" lIns="0" tIns="0" rIns="0" bIns="0" rtlCol="0" anchor="t"/>
+          <a:lstStyle/>
+          <a:p>
+            <a:pPr algn="ctr" indent="0" marL="0">
+              <a:lnSpc>
+                <a:spcPts val="2800"/>
+              </a:lnSpc>
+              <a:buNone/>
+            </a:pPr>
+            <a:r>
+              <a:rPr lang="en-US" sz="1900" dirty="0">
+                <a:solidFill>
+                  <a:srgbClr val="A9BCD6"/>
+                </a:solidFill>
+                <a:latin typeface="Arial" pitchFamily="34" charset="0"/>
+                <a:ea typeface="Arial" pitchFamily="34" charset="-122"/>
+                <a:cs typeface="Arial" pitchFamily="34" charset="-120"/>
+              </a:rPr>
+              <a:t>Tiền giám định đưa việc kiểm tra hồ sơ BHYT về bên trong bệnh viện —</a:t>
+            </a:r>
+            <a:endParaRPr lang="en-US" sz="1900" dirty="0"/>
+          </a:p>
+          <a:p>
+            <a:pPr algn="ctr" indent="0" marL="0">
+              <a:lnSpc>
+                <a:spcPts val="2800"/>
+              </a:lnSpc>
+              <a:buNone/>
+            </a:pPr>
+            <a:r>
+              <a:rPr lang="en-US" sz="1900" dirty="0">
+                <a:solidFill>
+                  <a:srgbClr val="A9BCD6"/>
+                </a:solidFill>
+                <a:latin typeface="Arial" pitchFamily="34" charset="0"/>
+                <a:ea typeface="Arial" pitchFamily="34" charset="-122"/>
+                <a:cs typeface="Arial" pitchFamily="34" charset="-120"/>
+              </a:rPr>
+              <a:t>khi người làm sai còn ở đó, và hồ sơ còn chưa rời bệnh viện.</a:t>
+            </a:r>
+            <a:endParaRPr lang="en-US" sz="1900" dirty="0"/>
+          </a:p>
+        </p:txBody>
+      </p:sp>
+      <p:sp>
+        <p:nvSpPr>
+          <p:cNvPr id="4" name="Shape 2"/>
+          <p:cNvSpPr/>
+          <p:nvPr/>
+        </p:nvSpPr>
+        <p:spPr>
+          <a:xfrm>
+            <a:off x="2804008" y="3931920"/>
+            <a:ext cx="6583680" cy="1280160"/>
+          </a:xfrm>
+          <a:prstGeom prst="roundRect">
+            <a:avLst>
+              <a:gd name="adj" fmla="val 7143"/>
+            </a:avLst>
+          </a:prstGeom>
+          <a:solidFill>
+            <a:srgbClr val="1C3558">
+              <a:alpha val="85000"/>
+            </a:srgbClr>
+          </a:solidFill>
+          <a:ln w="9525">
+            <a:solidFill>
+              <a:srgbClr val="2E4B74"/>
+            </a:solidFill>
+            <a:prstDash val="solid"/>
+          </a:ln>
+        </p:spPr>
+      </p:sp>
+      <p:sp>
+        <p:nvSpPr>
           <p:cNvPr id="5" name="Text 3"/>
           <p:cNvSpPr txBox="1"/>
           <p:nvPr/>
@@ -3077,7 +5204,7 @@
                 <a:ea typeface="Arial" pitchFamily="34" charset="-122"/>
                 <a:cs typeface="Arial" pitchFamily="34" charset="-120"/>
               </a:rPr>
-              <a:t>GIẢI PHÁP TIỀN GIÁM ĐỊNH  ·  10 / 10</a:t>
+              <a:t>GIẢI PHÁP TIỀN GIÁM ĐỊNH  ·  12 / 12</a:t>
             </a:r>
             <a:endParaRPr lang="en-US" sz="950" dirty="0"/>
           </a:p>
@@ -4282,7 +6409,7 @@
                 <a:ea typeface="Arial" pitchFamily="34" charset="-122"/>
                 <a:cs typeface="Arial" pitchFamily="34" charset="-120"/>
               </a:rPr>
-              <a:t>GIẢI PHÁP TIỀN GIÁM ĐỊNH  ·  02 / 10</a:t>
+              <a:t>GIẢI PHÁP TIỀN GIÁM ĐỊNH  ·  02 / 12</a:t>
             </a:r>
             <a:endParaRPr lang="en-US" sz="950" dirty="0"/>
           </a:p>
@@ -5614,7 +7741,7 @@
                 <a:ea typeface="Arial" pitchFamily="34" charset="-122"/>
                 <a:cs typeface="Arial" pitchFamily="34" charset="-120"/>
               </a:rPr>
-              <a:t>GIẢI PHÁP TIỀN GIÁM ĐỊNH  ·  03 / 10</a:t>
+              <a:t>GIẢI PHÁP TIỀN GIÁM ĐỊNH  ·  03 / 12</a:t>
             </a:r>
             <a:endParaRPr lang="en-US" sz="950" dirty="0"/>
           </a:p>
@@ -6744,7 +8871,7 @@
                 <a:ea typeface="Arial" pitchFamily="34" charset="-122"/>
                 <a:cs typeface="Arial" pitchFamily="34" charset="-120"/>
               </a:rPr>
-              <a:t>GIẢI PHÁP TIỀN GIÁM ĐỊNH  ·  04 / 10</a:t>
+              <a:t>GIẢI PHÁP TIỀN GIÁM ĐỊNH  ·  04 / 12</a:t>
             </a:r>
             <a:endParaRPr lang="en-US" sz="950" dirty="0"/>
           </a:p>
@@ -8049,7 +10176,7 @@
                 <a:ea typeface="Arial" pitchFamily="34" charset="-122"/>
                 <a:cs typeface="Arial" pitchFamily="34" charset="-120"/>
               </a:rPr>
-              <a:t>GIẢI PHÁP TIỀN GIÁM ĐỊNH  ·  05 / 10</a:t>
+              <a:t>GIẢI PHÁP TIỀN GIÁM ĐỊNH  ·  05 / 12</a:t>
             </a:r>
             <a:endParaRPr lang="en-US" sz="950" dirty="0"/>
           </a:p>
@@ -9465,7 +11592,7 @@
                 <a:ea typeface="Arial" pitchFamily="34" charset="-122"/>
                 <a:cs typeface="Arial" pitchFamily="34" charset="-120"/>
               </a:rPr>
-              <a:t>GIẢI PHÁP TIỀN GIÁM ĐỊNH  ·  06 / 10</a:t>
+              <a:t>GIẢI PHÁP TIỀN GIÁM ĐỊNH  ·  06 / 12</a:t>
             </a:r>
             <a:endParaRPr lang="en-US" sz="950" dirty="0"/>
           </a:p>
@@ -9543,7 +11670,7 @@
                 <a:ea typeface="Arial" pitchFamily="34" charset="-122"/>
                 <a:cs typeface="Arial" pitchFamily="34" charset="-120"/>
               </a:rPr>
-              <a:t>AN TOÀN</a:t>
+              <a:t>NHẬN LỖI</a:t>
             </a:r>
             <a:endParaRPr lang="en-US" sz="1200" dirty="0"/>
           </a:p>
@@ -9582,7 +11709,7 @@
                 <a:ea typeface="Arial" pitchFamily="34" charset="-122"/>
                 <a:cs typeface="Arial" pitchFamily="34" charset="-120"/>
               </a:rPr>
-              <a:t>Dữ liệu người bệnh và hệ thống HIS được bảo vệ thế nào</a:t>
+              <a:t>Danh sách lỗi đến tay người cần biết theo hai cách</a:t>
             </a:r>
             <a:endParaRPr lang="en-US" sz="2800" dirty="0"/>
           </a:p>
@@ -9590,18 +11717,57 @@
       </p:sp>
       <p:sp>
         <p:nvSpPr>
-          <p:cNvPr id="4" name="Shape 2"/>
+          <p:cNvPr id="4" name="Text 2"/>
+          <p:cNvSpPr txBox="1"/>
+          <p:nvPr/>
+        </p:nvSpPr>
+        <p:spPr>
+          <a:xfrm>
+            <a:off x="640080" y="1298448"/>
+            <a:ext cx="10911535" cy="329184"/>
+          </a:xfrm>
+          <a:prstGeom prst="rect">
+            <a:avLst/>
+          </a:prstGeom>
+          <a:noFill/>
+          <a:ln/>
+        </p:spPr>
+        <p:txBody>
+          <a:bodyPr wrap="square" lIns="0" tIns="0" rIns="0" bIns="0" rtlCol="0" anchor="ctr"/>
+          <a:lstStyle/>
+          <a:p>
+            <a:pPr indent="0" marL="0">
+              <a:buNone/>
+            </a:pPr>
+            <a:r>
+              <a:rPr lang="en-US" sz="1500" dirty="0">
+                <a:solidFill>
+                  <a:srgbClr val="A9BCD6"/>
+                </a:solidFill>
+                <a:latin typeface="Arial" pitchFamily="34" charset="0"/>
+                <a:ea typeface="Arial" pitchFamily="34" charset="-122"/>
+                <a:cs typeface="Arial" pitchFamily="34" charset="-120"/>
+              </a:rPr>
+              <a:t>Người cần xem thì tự vào Cổng; người cần được nhắc thì hệ thống tự gửi email — không ai phải đi hỏi.</a:t>
+            </a:r>
+            <a:endParaRPr lang="en-US" sz="1500" dirty="0"/>
+          </a:p>
+        </p:txBody>
+      </p:sp>
+      <p:sp>
+        <p:nvSpPr>
+          <p:cNvPr id="5" name="Shape 3"/>
           <p:cNvSpPr/>
           <p:nvPr/>
         </p:nvSpPr>
         <p:spPr>
           <a:xfrm>
-            <a:off x="640080" y="1508760"/>
-            <a:ext cx="5318608" cy="1783080"/>
+            <a:off x="640080" y="1828800"/>
+            <a:ext cx="5295748" cy="3611880"/>
           </a:xfrm>
           <a:prstGeom prst="roundRect">
             <a:avLst>
-              <a:gd name="adj" fmla="val 5128"/>
+              <a:gd name="adj" fmla="val 2532"/>
             </a:avLst>
           </a:prstGeom>
           <a:solidFill>
@@ -9619,13 +11785,13 @@
       </p:sp>
       <p:sp>
         <p:nvSpPr>
-          <p:cNvPr id="5" name="Shape 3"/>
+          <p:cNvPr id="6" name="Shape 4"/>
           <p:cNvSpPr/>
           <p:nvPr/>
         </p:nvSpPr>
         <p:spPr>
           <a:xfrm>
-            <a:off x="914400" y="1783080"/>
+            <a:off x="914400" y="2084832"/>
             <a:ext cx="731520" cy="731520"/>
           </a:xfrm>
           <a:prstGeom prst="ellipse">
@@ -9634,7 +11800,7 @@
           <a:solidFill>
             <a:srgbClr val="25324A"/>
           </a:solidFill>
-          <a:ln w="12700">
+          <a:ln w="15875">
             <a:solidFill>
               <a:srgbClr val="38BDF8"/>
             </a:solidFill>
@@ -9644,13 +11810,13 @@
       </p:sp>
       <p:sp>
         <p:nvSpPr>
-          <p:cNvPr id="6" name="Text 4"/>
-          <p:cNvSpPr txBox="1"/>
-          <p:nvPr/>
-        </p:nvSpPr>
-        <p:spPr>
-          <a:xfrm>
-            <a:off x="914400" y="1783080"/>
+          <p:cNvPr id="7" name="Text 5"/>
+          <p:cNvSpPr txBox="1"/>
+          <p:nvPr/>
+        </p:nvSpPr>
+        <p:spPr>
+          <a:xfrm>
+            <a:off x="914400" y="2084832"/>
             <a:ext cx="731520" cy="731520"/>
           </a:xfrm>
           <a:prstGeom prst="rect">
@@ -9675,7 +11841,7 @@
                 <a:ea typeface="Segoe UI Emoji" pitchFamily="34" charset="-122"/>
                 <a:cs typeface="Segoe UI Emoji" pitchFamily="34" charset="-120"/>
               </a:rPr>
-              <a:t>🏠</a:t>
+              <a:t>🖥️</a:t>
             </a:r>
             <a:endParaRPr lang="en-US" sz="2200" dirty="0"/>
           </a:p>
@@ -9683,72 +11849,115 @@
       </p:sp>
       <p:sp>
         <p:nvSpPr>
-          <p:cNvPr id="7" name="Text 5"/>
-          <p:cNvSpPr txBox="1"/>
-          <p:nvPr/>
-        </p:nvSpPr>
-        <p:spPr>
-          <a:xfrm>
-            <a:off x="1874520" y="1783080"/>
-            <a:ext cx="3855568" cy="457200"/>
-          </a:xfrm>
-          <a:prstGeom prst="rect">
-            <a:avLst/>
-          </a:prstGeom>
-          <a:noFill/>
-          <a:ln/>
-        </p:spPr>
-        <p:txBody>
-          <a:bodyPr wrap="square" lIns="0" tIns="0" rIns="0" bIns="0" rtlCol="0" anchor="ctr"/>
-          <a:lstStyle/>
-          <a:p>
-            <a:pPr indent="0" marL="0">
-              <a:buNone/>
-            </a:pPr>
-            <a:r>
-              <a:rPr lang="en-US" sz="1800" b="1" dirty="0">
-                <a:solidFill>
-                  <a:srgbClr val="FFFFFF"/>
-                </a:solidFill>
-                <a:latin typeface="Arial" pitchFamily="34" charset="0"/>
-                <a:ea typeface="Arial" pitchFamily="34" charset="-122"/>
-                <a:cs typeface="Arial" pitchFamily="34" charset="-120"/>
-              </a:rPr>
-              <a:t>Đặt tại bệnh viện</a:t>
-            </a:r>
-            <a:endParaRPr lang="en-US" sz="1800" dirty="0"/>
-          </a:p>
-        </p:txBody>
-      </p:sp>
-      <p:sp>
-        <p:nvSpPr>
           <p:cNvPr id="8" name="Text 6"/>
           <p:cNvSpPr txBox="1"/>
           <p:nvPr/>
         </p:nvSpPr>
         <p:spPr>
           <a:xfrm>
-            <a:off x="1874520" y="2286000"/>
-            <a:ext cx="3855568" cy="868680"/>
-          </a:xfrm>
-          <a:prstGeom prst="rect">
-            <a:avLst/>
-          </a:prstGeom>
-          <a:noFill/>
-          <a:ln/>
-        </p:spPr>
-        <p:txBody>
-          <a:bodyPr wrap="square" lIns="0" tIns="0" rIns="0" bIns="0" rtlCol="0" anchor="t"/>
+            <a:off x="1828800" y="2057400"/>
+            <a:ext cx="3878428" cy="786384"/>
+          </a:xfrm>
+          <a:prstGeom prst="rect">
+            <a:avLst/>
+          </a:prstGeom>
+          <a:noFill/>
+          <a:ln/>
+        </p:spPr>
+        <p:txBody>
+          <a:bodyPr wrap="square" lIns="0" tIns="0" rIns="0" bIns="0" rtlCol="0" anchor="ctr"/>
           <a:lstStyle/>
           <a:p>
             <a:pPr indent="0" marL="0">
               <a:lnSpc>
-                <a:spcPts val="1900"/>
+                <a:spcPts val="2400"/>
               </a:lnSpc>
               <a:buNone/>
             </a:pPr>
             <a:r>
-              <a:rPr lang="en-US" sz="1350" dirty="0">
+              <a:rPr lang="en-US" sz="1150" b="1" spc="200" kern="0" dirty="0">
+                <a:solidFill>
+                  <a:srgbClr val="38BDF8"/>
+                </a:solidFill>
+                <a:latin typeface="Arial" pitchFamily="34" charset="0"/>
+                <a:ea typeface="Arial" pitchFamily="34" charset="-122"/>
+                <a:cs typeface="Arial" pitchFamily="34" charset="-120"/>
+              </a:rPr>
+              <a:t>CHỦ ĐỘNG</a:t>
+            </a:r>
+            <a:endParaRPr lang="en-US" sz="1150" dirty="0"/>
+          </a:p>
+          <a:p>
+            <a:pPr indent="0" marL="0">
+              <a:lnSpc>
+                <a:spcPts val="2400"/>
+              </a:lnSpc>
+              <a:buNone/>
+            </a:pPr>
+            <a:r>
+              <a:rPr lang="en-US" sz="1900" b="1" dirty="0">
+                <a:solidFill>
+                  <a:srgbClr val="FFFFFF"/>
+                </a:solidFill>
+                <a:latin typeface="Arial" pitchFamily="34" charset="0"/>
+                <a:ea typeface="Arial" pitchFamily="34" charset="-122"/>
+                <a:cs typeface="Arial" pitchFamily="34" charset="-120"/>
+              </a:rPr>
+              <a:t>Vào Cổng Tiền giám định</a:t>
+            </a:r>
+            <a:endParaRPr lang="en-US" sz="1150" dirty="0"/>
+          </a:p>
+        </p:txBody>
+      </p:sp>
+      <p:sp>
+        <p:nvSpPr>
+          <p:cNvPr id="9" name="Text 7"/>
+          <p:cNvSpPr txBox="1"/>
+          <p:nvPr/>
+        </p:nvSpPr>
+        <p:spPr>
+          <a:xfrm>
+            <a:off x="960120" y="3063240"/>
+            <a:ext cx="4655668" cy="731520"/>
+          </a:xfrm>
+          <a:prstGeom prst="rect">
+            <a:avLst/>
+          </a:prstGeom>
+          <a:noFill/>
+          <a:ln/>
+        </p:spPr>
+        <p:txBody>
+          <a:bodyPr wrap="square" lIns="0" tIns="0" rIns="0" bIns="0" rtlCol="0" anchor="t"/>
+          <a:lstStyle/>
+          <a:p>
+            <a:pPr indent="0" marL="0">
+              <a:lnSpc>
+                <a:spcPts val="1800"/>
+              </a:lnSpc>
+              <a:buNone/>
+            </a:pPr>
+            <a:r>
+              <a:rPr lang="en-US" sz="1500" b="1" dirty="0">
+                <a:solidFill>
+                  <a:srgbClr val="FFFFFF"/>
+                </a:solidFill>
+                <a:latin typeface="Arial" pitchFamily="34" charset="0"/>
+                <a:ea typeface="Arial" pitchFamily="34" charset="-122"/>
+                <a:cs typeface="Arial" pitchFamily="34" charset="-120"/>
+              </a:rPr>
+              <a:t>Danh sách hồ sơ, danh sách vi phạm</a:t>
+            </a:r>
+            <a:endParaRPr lang="en-US" sz="1500" dirty="0"/>
+          </a:p>
+          <a:p>
+            <a:pPr indent="0" marL="0">
+              <a:lnSpc>
+                <a:spcPts val="1800"/>
+              </a:lnSpc>
+              <a:buNone/>
+            </a:pPr>
+            <a:r>
+              <a:rPr lang="en-US" sz="1300" dirty="0">
                 <a:solidFill>
                   <a:srgbClr val="A9BCD6"/>
                 </a:solidFill>
@@ -9756,36 +11965,160 @@
                 <a:ea typeface="Arial" pitchFamily="34" charset="-122"/>
                 <a:cs typeface="Arial" pitchFamily="34" charset="-120"/>
               </a:rPr>
-              <a:t>Máy chủ đặt trong mạng nội bộ của viện. Dữ liệu chỉ gửi lên Cổng giám định BHXH — như quy trình hiện nay.</a:t>
-            </a:r>
-            <a:endParaRPr lang="en-US" sz="1350" dirty="0"/>
-          </a:p>
-        </p:txBody>
-      </p:sp>
-      <p:sp>
-        <p:nvSpPr>
-          <p:cNvPr id="9" name="Shape 7"/>
+              <a:t>Lọc theo khoa, mức độ, ngày; xuất Excel để giao việc.</a:t>
+            </a:r>
+            <a:endParaRPr lang="en-US" sz="1500" dirty="0"/>
+          </a:p>
+        </p:txBody>
+      </p:sp>
+      <p:sp>
+        <p:nvSpPr>
+          <p:cNvPr id="10" name="Text 8"/>
+          <p:cNvSpPr txBox="1"/>
+          <p:nvPr/>
+        </p:nvSpPr>
+        <p:spPr>
+          <a:xfrm>
+            <a:off x="960120" y="3831336"/>
+            <a:ext cx="4655668" cy="731520"/>
+          </a:xfrm>
+          <a:prstGeom prst="rect">
+            <a:avLst/>
+          </a:prstGeom>
+          <a:noFill/>
+          <a:ln/>
+        </p:spPr>
+        <p:txBody>
+          <a:bodyPr wrap="square" lIns="0" tIns="0" rIns="0" bIns="0" rtlCol="0" anchor="t"/>
+          <a:lstStyle/>
+          <a:p>
+            <a:pPr indent="0" marL="0">
+              <a:lnSpc>
+                <a:spcPts val="1800"/>
+              </a:lnSpc>
+              <a:buNone/>
+            </a:pPr>
+            <a:r>
+              <a:rPr lang="en-US" sz="1500" b="1" dirty="0">
+                <a:solidFill>
+                  <a:srgbClr val="FFFFFF"/>
+                </a:solidFill>
+                <a:latin typeface="Arial" pitchFamily="34" charset="0"/>
+                <a:ea typeface="Arial" pitchFamily="34" charset="-122"/>
+                <a:cs typeface="Arial" pitchFamily="34" charset="-120"/>
+              </a:rPr>
+              <a:t>Tra cứu theo mã điều trị</a:t>
+            </a:r>
+            <a:endParaRPr lang="en-US" sz="1500" dirty="0"/>
+          </a:p>
+          <a:p>
+            <a:pPr indent="0" marL="0">
+              <a:lnSpc>
+                <a:spcPts val="1800"/>
+              </a:lnSpc>
+              <a:buNone/>
+            </a:pPr>
+            <a:r>
+              <a:rPr lang="en-US" sz="1300" dirty="0">
+                <a:solidFill>
+                  <a:srgbClr val="A9BCD6"/>
+                </a:solidFill>
+                <a:latin typeface="Arial" pitchFamily="34" charset="0"/>
+                <a:ea typeface="Arial" pitchFamily="34" charset="-122"/>
+                <a:cs typeface="Arial" pitchFamily="34" charset="-120"/>
+              </a:rPr>
+              <a:t>Quét mã vạch, thấy mọi lỗi của một hồ sơ; in phiếu lỗi.</a:t>
+            </a:r>
+            <a:endParaRPr lang="en-US" sz="1500" dirty="0"/>
+          </a:p>
+        </p:txBody>
+      </p:sp>
+      <p:sp>
+        <p:nvSpPr>
+          <p:cNvPr id="11" name="Text 9"/>
+          <p:cNvSpPr txBox="1"/>
+          <p:nvPr/>
+        </p:nvSpPr>
+        <p:spPr>
+          <a:xfrm>
+            <a:off x="960120" y="4599432"/>
+            <a:ext cx="4655668" cy="731520"/>
+          </a:xfrm>
+          <a:prstGeom prst="rect">
+            <a:avLst/>
+          </a:prstGeom>
+          <a:noFill/>
+          <a:ln/>
+        </p:spPr>
+        <p:txBody>
+          <a:bodyPr wrap="square" lIns="0" tIns="0" rIns="0" bIns="0" rtlCol="0" anchor="t"/>
+          <a:lstStyle/>
+          <a:p>
+            <a:pPr indent="0" marL="0">
+              <a:lnSpc>
+                <a:spcPts val="1800"/>
+              </a:lnSpc>
+              <a:buNone/>
+            </a:pPr>
+            <a:r>
+              <a:rPr lang="en-US" sz="1500" b="1" dirty="0">
+                <a:solidFill>
+                  <a:srgbClr val="FFFFFF"/>
+                </a:solidFill>
+                <a:latin typeface="Arial" pitchFamily="34" charset="0"/>
+                <a:ea typeface="Arial" pitchFamily="34" charset="-122"/>
+                <a:cs typeface="Arial" pitchFamily="34" charset="-120"/>
+              </a:rPr>
+              <a:t>Dashboard</a:t>
+            </a:r>
+            <a:endParaRPr lang="en-US" sz="1500" dirty="0"/>
+          </a:p>
+          <a:p>
+            <a:pPr indent="0" marL="0">
+              <a:lnSpc>
+                <a:spcPts val="1800"/>
+              </a:lnSpc>
+              <a:buNone/>
+            </a:pPr>
+            <a:r>
+              <a:rPr lang="en-US" sz="1300" dirty="0">
+                <a:solidFill>
+                  <a:srgbClr val="A9BCD6"/>
+                </a:solidFill>
+                <a:latin typeface="Arial" pitchFamily="34" charset="0"/>
+                <a:ea typeface="Arial" pitchFamily="34" charset="-122"/>
+                <a:cs typeface="Arial" pitchFamily="34" charset="-120"/>
+              </a:rPr>
+              <a:t>Lỗi tập trung ở đâu, tồn đọng bao lâu — xem bất cứ lúc nào.</a:t>
+            </a:r>
+            <a:endParaRPr lang="en-US" sz="1500" dirty="0"/>
+          </a:p>
+        </p:txBody>
+      </p:sp>
+      <p:sp>
+        <p:nvSpPr>
+          <p:cNvPr id="12" name="Shape 10"/>
           <p:cNvSpPr/>
           <p:nvPr/>
         </p:nvSpPr>
         <p:spPr>
           <a:xfrm>
-            <a:off x="6233008" y="1508760"/>
-            <a:ext cx="5318608" cy="1783080"/>
+            <a:off x="6255868" y="1828800"/>
+            <a:ext cx="5295748" cy="3611880"/>
           </a:xfrm>
           <a:prstGeom prst="roundRect">
             <a:avLst>
-              <a:gd name="adj" fmla="val 5128"/>
+              <a:gd name="adj" fmla="val 2532"/>
             </a:avLst>
           </a:prstGeom>
           <a:solidFill>
-            <a:srgbClr val="1C3558">
+            <a:srgbClr val="25324A">
               <a:alpha val="85000"/>
             </a:srgbClr>
           </a:solidFill>
-          <a:ln w="9525">
+          <a:ln w="19050">
             <a:solidFill>
-              <a:srgbClr val="2E4B74"/>
+              <a:srgbClr val="FBBF24"/>
             </a:solidFill>
             <a:prstDash val="solid"/>
           </a:ln>
@@ -9793,13 +12126,13 @@
       </p:sp>
       <p:sp>
         <p:nvSpPr>
-          <p:cNvPr id="10" name="Shape 8"/>
+          <p:cNvPr id="13" name="Shape 11"/>
           <p:cNvSpPr/>
           <p:nvPr/>
         </p:nvSpPr>
         <p:spPr>
           <a:xfrm>
-            <a:off x="6507328" y="1783080"/>
+            <a:off x="6530188" y="2084832"/>
             <a:ext cx="731520" cy="731520"/>
           </a:xfrm>
           <a:prstGeom prst="ellipse">
@@ -9808,9 +12141,9 @@
           <a:solidFill>
             <a:srgbClr val="25324A"/>
           </a:solidFill>
-          <a:ln w="12700">
+          <a:ln w="15875">
             <a:solidFill>
-              <a:srgbClr val="38BDF8"/>
+              <a:srgbClr val="FBBF24"/>
             </a:solidFill>
             <a:prstDash val="solid"/>
           </a:ln>
@@ -9818,13 +12151,13 @@
       </p:sp>
       <p:sp>
         <p:nvSpPr>
-          <p:cNvPr id="11" name="Text 9"/>
-          <p:cNvSpPr txBox="1"/>
-          <p:nvPr/>
-        </p:nvSpPr>
-        <p:spPr>
-          <a:xfrm>
-            <a:off x="6507328" y="1783080"/>
+          <p:cNvPr id="14" name="Text 12"/>
+          <p:cNvSpPr txBox="1"/>
+          <p:nvPr/>
+        </p:nvSpPr>
+        <p:spPr>
+          <a:xfrm>
+            <a:off x="6530188" y="2084832"/>
             <a:ext cx="731520" cy="731520"/>
           </a:xfrm>
           <a:prstGeom prst="rect">
@@ -9849,7 +12182,7 @@
                 <a:ea typeface="Segoe UI Emoji" pitchFamily="34" charset="-122"/>
                 <a:cs typeface="Segoe UI Emoji" pitchFamily="34" charset="-120"/>
               </a:rPr>
-              <a:t>🔒</a:t>
+              <a:t>📧</a:t>
             </a:r>
             <a:endParaRPr lang="en-US" sz="2200" dirty="0"/>
           </a:p>
@@ -9857,378 +12190,53 @@
       </p:sp>
       <p:sp>
         <p:nvSpPr>
-          <p:cNvPr id="12" name="Text 10"/>
-          <p:cNvSpPr txBox="1"/>
-          <p:nvPr/>
-        </p:nvSpPr>
-        <p:spPr>
-          <a:xfrm>
-            <a:off x="7467448" y="1783080"/>
-            <a:ext cx="3855568" cy="457200"/>
-          </a:xfrm>
-          <a:prstGeom prst="rect">
-            <a:avLst/>
-          </a:prstGeom>
-          <a:noFill/>
-          <a:ln/>
-        </p:spPr>
-        <p:txBody>
-          <a:bodyPr wrap="square" lIns="0" tIns="0" rIns="0" bIns="0" rtlCol="0" anchor="ctr"/>
-          <a:lstStyle/>
-          <a:p>
-            <a:pPr indent="0" marL="0">
-              <a:buNone/>
-            </a:pPr>
-            <a:r>
-              <a:rPr lang="en-US" sz="1800" b="1" dirty="0">
-                <a:solidFill>
-                  <a:srgbClr val="FFFFFF"/>
-                </a:solidFill>
-                <a:latin typeface="Arial" pitchFamily="34" charset="0"/>
-                <a:ea typeface="Arial" pitchFamily="34" charset="-122"/>
-                <a:cs typeface="Arial" pitchFamily="34" charset="-120"/>
-              </a:rPr>
-              <a:t>Chỉ đọc HIS</a:t>
-            </a:r>
-            <a:endParaRPr lang="en-US" sz="1800" dirty="0"/>
-          </a:p>
-        </p:txBody>
-      </p:sp>
-      <p:sp>
-        <p:nvSpPr>
-          <p:cNvPr id="13" name="Text 11"/>
-          <p:cNvSpPr txBox="1"/>
-          <p:nvPr/>
-        </p:nvSpPr>
-        <p:spPr>
-          <a:xfrm>
-            <a:off x="7467448" y="2286000"/>
-            <a:ext cx="3855568" cy="868680"/>
-          </a:xfrm>
-          <a:prstGeom prst="rect">
-            <a:avLst/>
-          </a:prstGeom>
-          <a:noFill/>
-          <a:ln/>
-        </p:spPr>
-        <p:txBody>
-          <a:bodyPr wrap="square" lIns="0" tIns="0" rIns="0" bIns="0" rtlCol="0" anchor="t"/>
+          <p:cNvPr id="15" name="Text 13"/>
+          <p:cNvSpPr txBox="1"/>
+          <p:nvPr/>
+        </p:nvSpPr>
+        <p:spPr>
+          <a:xfrm>
+            <a:off x="7444588" y="2057400"/>
+            <a:ext cx="3878428" cy="786384"/>
+          </a:xfrm>
+          <a:prstGeom prst="rect">
+            <a:avLst/>
+          </a:prstGeom>
+          <a:noFill/>
+          <a:ln/>
+        </p:spPr>
+        <p:txBody>
+          <a:bodyPr wrap="square" lIns="0" tIns="0" rIns="0" bIns="0" rtlCol="0" anchor="ctr"/>
           <a:lstStyle/>
           <a:p>
             <a:pPr indent="0" marL="0">
               <a:lnSpc>
-                <a:spcPts val="1900"/>
+                <a:spcPts val="2400"/>
               </a:lnSpc>
               <a:buNone/>
             </a:pPr>
             <a:r>
-              <a:rPr lang="en-US" sz="1350" dirty="0">
-                <a:solidFill>
-                  <a:srgbClr val="A9BCD6"/>
-                </a:solidFill>
-                <a:latin typeface="Arial" pitchFamily="34" charset="0"/>
-                <a:ea typeface="Arial" pitchFamily="34" charset="-122"/>
-                <a:cs typeface="Arial" pitchFamily="34" charset="-120"/>
-              </a:rPr>
-              <a:t>Tài khoản chỉ có quyền đọc: không ghi, không cài trigger, không đổi cấu trúc cơ sở dữ liệu HIS.</a:t>
-            </a:r>
-            <a:endParaRPr lang="en-US" sz="1350" dirty="0"/>
-          </a:p>
-        </p:txBody>
-      </p:sp>
-      <p:sp>
-        <p:nvSpPr>
-          <p:cNvPr id="14" name="Shape 12"/>
-          <p:cNvSpPr/>
-          <p:nvPr/>
-        </p:nvSpPr>
-        <p:spPr>
-          <a:xfrm>
-            <a:off x="640080" y="3520440"/>
-            <a:ext cx="5318608" cy="1783080"/>
-          </a:xfrm>
-          <a:prstGeom prst="roundRect">
-            <a:avLst>
-              <a:gd name="adj" fmla="val 5128"/>
-            </a:avLst>
-          </a:prstGeom>
-          <a:solidFill>
-            <a:srgbClr val="1C3558">
-              <a:alpha val="85000"/>
-            </a:srgbClr>
-          </a:solidFill>
-          <a:ln w="9525">
-            <a:solidFill>
-              <a:srgbClr val="2E4B74"/>
-            </a:solidFill>
-            <a:prstDash val="solid"/>
-          </a:ln>
-        </p:spPr>
-      </p:sp>
-      <p:sp>
-        <p:nvSpPr>
-          <p:cNvPr id="15" name="Shape 13"/>
-          <p:cNvSpPr/>
-          <p:nvPr/>
-        </p:nvSpPr>
-        <p:spPr>
-          <a:xfrm>
-            <a:off x="914400" y="3794760"/>
-            <a:ext cx="731520" cy="731520"/>
-          </a:xfrm>
-          <a:prstGeom prst="ellipse">
-            <a:avLst/>
-          </a:prstGeom>
-          <a:solidFill>
-            <a:srgbClr val="25324A"/>
-          </a:solidFill>
-          <a:ln w="12700">
-            <a:solidFill>
-              <a:srgbClr val="38BDF8"/>
-            </a:solidFill>
-            <a:prstDash val="solid"/>
-          </a:ln>
-        </p:spPr>
-      </p:sp>
-      <p:sp>
-        <p:nvSpPr>
-          <p:cNvPr id="16" name="Text 14"/>
-          <p:cNvSpPr txBox="1"/>
-          <p:nvPr/>
-        </p:nvSpPr>
-        <p:spPr>
-          <a:xfrm>
-            <a:off x="914400" y="3794760"/>
-            <a:ext cx="731520" cy="731520"/>
-          </a:xfrm>
-          <a:prstGeom prst="rect">
-            <a:avLst/>
-          </a:prstGeom>
-          <a:noFill/>
-          <a:ln/>
-        </p:spPr>
-        <p:txBody>
-          <a:bodyPr wrap="square" lIns="0" tIns="0" rIns="0" bIns="0" rtlCol="0" anchor="ctr"/>
-          <a:lstStyle/>
-          <a:p>
-            <a:pPr algn="ctr" indent="0" marL="0">
-              <a:buNone/>
-            </a:pPr>
-            <a:r>
-              <a:rPr lang="en-US" sz="2200" dirty="0">
-                <a:solidFill>
-                  <a:srgbClr val="000000"/>
-                </a:solidFill>
-                <a:latin typeface="Segoe UI Emoji" pitchFamily="34" charset="0"/>
-                <a:ea typeface="Segoe UI Emoji" pitchFamily="34" charset="-122"/>
-                <a:cs typeface="Segoe UI Emoji" pitchFamily="34" charset="-120"/>
-              </a:rPr>
-              <a:t>⚙️</a:t>
-            </a:r>
-            <a:endParaRPr lang="en-US" sz="2200" dirty="0"/>
-          </a:p>
-        </p:txBody>
-      </p:sp>
-      <p:sp>
-        <p:nvSpPr>
-          <p:cNvPr id="17" name="Text 15"/>
-          <p:cNvSpPr txBox="1"/>
-          <p:nvPr/>
-        </p:nvSpPr>
-        <p:spPr>
-          <a:xfrm>
-            <a:off x="1874520" y="3794760"/>
-            <a:ext cx="3855568" cy="457200"/>
-          </a:xfrm>
-          <a:prstGeom prst="rect">
-            <a:avLst/>
-          </a:prstGeom>
-          <a:noFill/>
-          <a:ln/>
-        </p:spPr>
-        <p:txBody>
-          <a:bodyPr wrap="square" lIns="0" tIns="0" rIns="0" bIns="0" rtlCol="0" anchor="ctr"/>
-          <a:lstStyle/>
-          <a:p>
-            <a:pPr indent="0" marL="0">
-              <a:buNone/>
-            </a:pPr>
-            <a:r>
-              <a:rPr lang="en-US" sz="1800" b="1" dirty="0">
-                <a:solidFill>
-                  <a:srgbClr val="FFFFFF"/>
-                </a:solidFill>
-                <a:latin typeface="Arial" pitchFamily="34" charset="0"/>
-                <a:ea typeface="Arial" pitchFamily="34" charset="-122"/>
-                <a:cs typeface="Arial" pitchFamily="34" charset="-120"/>
-              </a:rPr>
-              <a:t>Không làm nặng HIS</a:t>
-            </a:r>
-            <a:endParaRPr lang="en-US" sz="1800" dirty="0"/>
-          </a:p>
-        </p:txBody>
-      </p:sp>
-      <p:sp>
-        <p:nvSpPr>
-          <p:cNvPr id="18" name="Text 16"/>
-          <p:cNvSpPr txBox="1"/>
-          <p:nvPr/>
-        </p:nvSpPr>
-        <p:spPr>
-          <a:xfrm>
-            <a:off x="1874520" y="4297680"/>
-            <a:ext cx="3855568" cy="868680"/>
-          </a:xfrm>
-          <a:prstGeom prst="rect">
-            <a:avLst/>
-          </a:prstGeom>
-          <a:noFill/>
-          <a:ln/>
-        </p:spPr>
-        <p:txBody>
-          <a:bodyPr wrap="square" lIns="0" tIns="0" rIns="0" bIns="0" rtlCol="0" anchor="t"/>
-          <a:lstStyle/>
+              <a:rPr lang="en-US" sz="1150" b="1" spc="200" kern="0" dirty="0">
+                <a:solidFill>
+                  <a:srgbClr val="FBBF24"/>
+                </a:solidFill>
+                <a:latin typeface="Arial" pitchFamily="34" charset="0"/>
+                <a:ea typeface="Arial" pitchFamily="34" charset="-122"/>
+                <a:cs typeface="Arial" pitchFamily="34" charset="-120"/>
+              </a:rPr>
+              <a:t>THỤ ĐỘNG</a:t>
+            </a:r>
+            <a:endParaRPr lang="en-US" sz="1150" dirty="0"/>
+          </a:p>
           <a:p>
             <a:pPr indent="0" marL="0">
               <a:lnSpc>
-                <a:spcPts val="1900"/>
+                <a:spcPts val="2400"/>
               </a:lnSpc>
               <a:buNone/>
             </a:pPr>
             <a:r>
-              <a:rPr lang="en-US" sz="1350" dirty="0">
-                <a:solidFill>
-                  <a:srgbClr val="A9BCD6"/>
-                </a:solidFill>
-                <a:latin typeface="Arial" pitchFamily="34" charset="0"/>
-                <a:ea typeface="Arial" pitchFamily="34" charset="-122"/>
-                <a:cs typeface="Arial" pitchFamily="34" charset="-120"/>
-              </a:rPr>
-              <a:t>Truy vấn chạy nền theo lô; khảo sát chỉ mục các bảng HIS lớn trước khi bật.</a:t>
-            </a:r>
-            <a:endParaRPr lang="en-US" sz="1350" dirty="0"/>
-          </a:p>
-        </p:txBody>
-      </p:sp>
-      <p:sp>
-        <p:nvSpPr>
-          <p:cNvPr id="19" name="Shape 17"/>
-          <p:cNvSpPr/>
-          <p:nvPr/>
-        </p:nvSpPr>
-        <p:spPr>
-          <a:xfrm>
-            <a:off x="6233008" y="3520440"/>
-            <a:ext cx="5318608" cy="1783080"/>
-          </a:xfrm>
-          <a:prstGeom prst="roundRect">
-            <a:avLst>
-              <a:gd name="adj" fmla="val 5128"/>
-            </a:avLst>
-          </a:prstGeom>
-          <a:solidFill>
-            <a:srgbClr val="1C3558">
-              <a:alpha val="85000"/>
-            </a:srgbClr>
-          </a:solidFill>
-          <a:ln w="9525">
-            <a:solidFill>
-              <a:srgbClr val="2E4B74"/>
-            </a:solidFill>
-            <a:prstDash val="solid"/>
-          </a:ln>
-        </p:spPr>
-      </p:sp>
-      <p:sp>
-        <p:nvSpPr>
-          <p:cNvPr id="20" name="Shape 18"/>
-          <p:cNvSpPr/>
-          <p:nvPr/>
-        </p:nvSpPr>
-        <p:spPr>
-          <a:xfrm>
-            <a:off x="6507328" y="3794760"/>
-            <a:ext cx="731520" cy="731520"/>
-          </a:xfrm>
-          <a:prstGeom prst="ellipse">
-            <a:avLst/>
-          </a:prstGeom>
-          <a:solidFill>
-            <a:srgbClr val="25324A"/>
-          </a:solidFill>
-          <a:ln w="12700">
-            <a:solidFill>
-              <a:srgbClr val="38BDF8"/>
-            </a:solidFill>
-            <a:prstDash val="solid"/>
-          </a:ln>
-        </p:spPr>
-      </p:sp>
-      <p:sp>
-        <p:nvSpPr>
-          <p:cNvPr id="21" name="Text 19"/>
-          <p:cNvSpPr txBox="1"/>
-          <p:nvPr/>
-        </p:nvSpPr>
-        <p:spPr>
-          <a:xfrm>
-            <a:off x="6507328" y="3794760"/>
-            <a:ext cx="731520" cy="731520"/>
-          </a:xfrm>
-          <a:prstGeom prst="rect">
-            <a:avLst/>
-          </a:prstGeom>
-          <a:noFill/>
-          <a:ln/>
-        </p:spPr>
-        <p:txBody>
-          <a:bodyPr wrap="square" lIns="0" tIns="0" rIns="0" bIns="0" rtlCol="0" anchor="ctr"/>
-          <a:lstStyle/>
-          <a:p>
-            <a:pPr algn="ctr" indent="0" marL="0">
-              <a:buNone/>
-            </a:pPr>
-            <a:r>
-              <a:rPr lang="en-US" sz="2200" dirty="0">
-                <a:solidFill>
-                  <a:srgbClr val="000000"/>
-                </a:solidFill>
-                <a:latin typeface="Segoe UI Emoji" pitchFamily="34" charset="0"/>
-                <a:ea typeface="Segoe UI Emoji" pitchFamily="34" charset="-122"/>
-                <a:cs typeface="Segoe UI Emoji" pitchFamily="34" charset="-120"/>
-              </a:rPr>
-              <a:t>👥</a:t>
-            </a:r>
-            <a:endParaRPr lang="en-US" sz="2200" dirty="0"/>
-          </a:p>
-        </p:txBody>
-      </p:sp>
-      <p:sp>
-        <p:nvSpPr>
-          <p:cNvPr id="22" name="Text 20"/>
-          <p:cNvSpPr txBox="1"/>
-          <p:nvPr/>
-        </p:nvSpPr>
-        <p:spPr>
-          <a:xfrm>
-            <a:off x="7467448" y="3794760"/>
-            <a:ext cx="3855568" cy="457200"/>
-          </a:xfrm>
-          <a:prstGeom prst="rect">
-            <a:avLst/>
-          </a:prstGeom>
-          <a:noFill/>
-          <a:ln/>
-        </p:spPr>
-        <p:txBody>
-          <a:bodyPr wrap="square" lIns="0" tIns="0" rIns="0" bIns="0" rtlCol="0" anchor="ctr"/>
-          <a:lstStyle/>
-          <a:p>
-            <a:pPr indent="0" marL="0">
-              <a:buNone/>
-            </a:pPr>
-            <a:r>
-              <a:rPr lang="en-US" sz="1800" b="1" dirty="0">
+              <a:rPr lang="en-US" sz="1900" b="1" dirty="0">
                 <a:solidFill>
                   <a:srgbClr val="FFFFFF"/>
                 </a:solidFill>
@@ -10236,22 +12244,22 @@
                 <a:ea typeface="Arial" pitchFamily="34" charset="-122"/>
                 <a:cs typeface="Arial" pitchFamily="34" charset="-120"/>
               </a:rPr>
-              <a:t>Phân quyền và ghi vết</a:t>
-            </a:r>
-            <a:endParaRPr lang="en-US" sz="1800" dirty="0"/>
-          </a:p>
-        </p:txBody>
-      </p:sp>
-      <p:sp>
-        <p:nvSpPr>
-          <p:cNvPr id="23" name="Text 21"/>
-          <p:cNvSpPr txBox="1"/>
-          <p:nvPr/>
-        </p:nvSpPr>
-        <p:spPr>
-          <a:xfrm>
-            <a:off x="7467448" y="4297680"/>
-            <a:ext cx="3855568" cy="868680"/>
+              <a:t>Nhận email do hệ thống tự gửi</a:t>
+            </a:r>
+            <a:endParaRPr lang="en-US" sz="1150" dirty="0"/>
+          </a:p>
+        </p:txBody>
+      </p:sp>
+      <p:sp>
+        <p:nvSpPr>
+          <p:cNvPr id="16" name="Text 14"/>
+          <p:cNvSpPr txBox="1"/>
+          <p:nvPr/>
+        </p:nvSpPr>
+        <p:spPr>
+          <a:xfrm>
+            <a:off x="6575908" y="3063240"/>
+            <a:ext cx="4655668" cy="731520"/>
           </a:xfrm>
           <a:prstGeom prst="rect">
             <a:avLst/>
@@ -10265,12 +12273,32 @@
           <a:p>
             <a:pPr indent="0" marL="0">
               <a:lnSpc>
-                <a:spcPts val="1900"/>
+                <a:spcPts val="1800"/>
               </a:lnSpc>
               <a:buNone/>
             </a:pPr>
             <a:r>
-              <a:rPr lang="en-US" sz="1350" dirty="0">
+              <a:rPr lang="en-US" sz="1500" b="1" dirty="0">
+                <a:solidFill>
+                  <a:srgbClr val="FFFFFF"/>
+                </a:solidFill>
+                <a:latin typeface="Arial" pitchFamily="34" charset="0"/>
+                <a:ea typeface="Arial" pitchFamily="34" charset="-122"/>
+                <a:cs typeface="Arial" pitchFamily="34" charset="-120"/>
+              </a:rPr>
+              <a:t>Báo cáo lỗi hằng ngày</a:t>
+            </a:r>
+            <a:endParaRPr lang="en-US" sz="1500" dirty="0"/>
+          </a:p>
+          <a:p>
+            <a:pPr indent="0" marL="0">
+              <a:lnSpc>
+                <a:spcPts val="1800"/>
+              </a:lnSpc>
+              <a:buNone/>
+            </a:pPr>
+            <a:r>
+              <a:rPr lang="en-US" sz="1300" dirty="0">
                 <a:solidFill>
                   <a:srgbClr val="A9BCD6"/>
                 </a:solidFill>
@@ -10278,15 +12306,139 @@
                 <a:ea typeface="Arial" pitchFamily="34" charset="-122"/>
                 <a:cs typeface="Arial" pitchFamily="34" charset="-120"/>
               </a:rPr>
-              <a:t>Mỗi người chỉ thấy chức năng được cấp; ghi lại ai nạp, ai gửi hồ sơ, ai tra cứu thẻ.</a:t>
-            </a:r>
-            <a:endParaRPr lang="en-US" sz="1350" dirty="0"/>
-          </a:p>
-        </p:txBody>
-      </p:sp>
-      <p:sp>
-        <p:nvSpPr>
-          <p:cNvPr id="24" name="Text 22"/>
+              <a:t>Tổng hợp lỗi thẻ BHYT và lỗi hồ sơ XML 3176 trong ngày.</a:t>
+            </a:r>
+            <a:endParaRPr lang="en-US" sz="1500" dirty="0"/>
+          </a:p>
+        </p:txBody>
+      </p:sp>
+      <p:sp>
+        <p:nvSpPr>
+          <p:cNvPr id="17" name="Text 15"/>
+          <p:cNvSpPr txBox="1"/>
+          <p:nvPr/>
+        </p:nvSpPr>
+        <p:spPr>
+          <a:xfrm>
+            <a:off x="6575908" y="3831336"/>
+            <a:ext cx="4655668" cy="731520"/>
+          </a:xfrm>
+          <a:prstGeom prst="rect">
+            <a:avLst/>
+          </a:prstGeom>
+          <a:noFill/>
+          <a:ln/>
+        </p:spPr>
+        <p:txBody>
+          <a:bodyPr wrap="square" lIns="0" tIns="0" rIns="0" bIns="0" rtlCol="0" anchor="t"/>
+          <a:lstStyle/>
+          <a:p>
+            <a:pPr indent="0" marL="0">
+              <a:lnSpc>
+                <a:spcPts val="1800"/>
+              </a:lnSpc>
+              <a:buNone/>
+            </a:pPr>
+            <a:r>
+              <a:rPr lang="en-US" sz="1500" b="1" dirty="0">
+                <a:solidFill>
+                  <a:srgbClr val="FFFFFF"/>
+                </a:solidFill>
+                <a:latin typeface="Arial" pitchFamily="34" charset="0"/>
+                <a:ea typeface="Arial" pitchFamily="34" charset="-122"/>
+                <a:cs typeface="Arial" pitchFamily="34" charset="-120"/>
+              </a:rPr>
+              <a:t>Bản tin sai sót y lệnh</a:t>
+            </a:r>
+            <a:endParaRPr lang="en-US" sz="1500" dirty="0"/>
+          </a:p>
+          <a:p>
+            <a:pPr indent="0" marL="0">
+              <a:lnSpc>
+                <a:spcPts val="1800"/>
+              </a:lnSpc>
+              <a:buNone/>
+            </a:pPr>
+            <a:r>
+              <a:rPr lang="en-US" sz="1300" dirty="0">
+                <a:solidFill>
+                  <a:srgbClr val="A9BCD6"/>
+                </a:solidFill>
+                <a:latin typeface="Arial" pitchFamily="34" charset="0"/>
+                <a:ea typeface="Arial" pitchFamily="34" charset="-122"/>
+                <a:cs typeface="Arial" pitchFamily="34" charset="-120"/>
+              </a:rPr>
+              <a:t>Gửi các vi phạm mới từ mức độ do viện đặt trở lên.</a:t>
+            </a:r>
+            <a:endParaRPr lang="en-US" sz="1500" dirty="0"/>
+          </a:p>
+        </p:txBody>
+      </p:sp>
+      <p:sp>
+        <p:nvSpPr>
+          <p:cNvPr id="18" name="Text 16"/>
+          <p:cNvSpPr txBox="1"/>
+          <p:nvPr/>
+        </p:nvSpPr>
+        <p:spPr>
+          <a:xfrm>
+            <a:off x="6575908" y="4599432"/>
+            <a:ext cx="4655668" cy="731520"/>
+          </a:xfrm>
+          <a:prstGeom prst="rect">
+            <a:avLst/>
+          </a:prstGeom>
+          <a:noFill/>
+          <a:ln/>
+        </p:spPr>
+        <p:txBody>
+          <a:bodyPr wrap="square" lIns="0" tIns="0" rIns="0" bIns="0" rtlCol="0" anchor="t"/>
+          <a:lstStyle/>
+          <a:p>
+            <a:pPr indent="0" marL="0">
+              <a:lnSpc>
+                <a:spcPts val="1800"/>
+              </a:lnSpc>
+              <a:buNone/>
+            </a:pPr>
+            <a:r>
+              <a:rPr lang="en-US" sz="1500" b="1" dirty="0">
+                <a:solidFill>
+                  <a:srgbClr val="FFFFFF"/>
+                </a:solidFill>
+                <a:latin typeface="Arial" pitchFamily="34" charset="0"/>
+                <a:ea typeface="Arial" pitchFamily="34" charset="-122"/>
+                <a:cs typeface="Arial" pitchFamily="34" charset="-120"/>
+              </a:rPr>
+              <a:t>Danh sách người nhận do viện quản lý</a:t>
+            </a:r>
+            <a:endParaRPr lang="en-US" sz="1500" dirty="0"/>
+          </a:p>
+          <a:p>
+            <a:pPr indent="0" marL="0">
+              <a:lnSpc>
+                <a:spcPts val="1800"/>
+              </a:lnSpc>
+              <a:buNone/>
+            </a:pPr>
+            <a:r>
+              <a:rPr lang="en-US" sz="1300" dirty="0">
+                <a:solidFill>
+                  <a:srgbClr val="A9BCD6"/>
+                </a:solidFill>
+                <a:latin typeface="Arial" pitchFamily="34" charset="0"/>
+                <a:ea typeface="Arial" pitchFamily="34" charset="-122"/>
+                <a:cs typeface="Arial" pitchFamily="34" charset="-120"/>
+              </a:rPr>
+              <a:t>Thêm, tắt người nhận ngay trên phần mềm.</a:t>
+            </a:r>
+            <a:endParaRPr lang="en-US" sz="1500" dirty="0"/>
+          </a:p>
+        </p:txBody>
+      </p:sp>
+      <p:sp>
+        <p:nvSpPr>
+          <p:cNvPr id="19" name="Text 17"/>
           <p:cNvSpPr txBox="1"/>
           <p:nvPr/>
         </p:nvSpPr>
@@ -10317,7 +12469,7 @@
                 <a:ea typeface="Arial" pitchFamily="34" charset="-122"/>
                 <a:cs typeface="Arial" pitchFamily="34" charset="-120"/>
               </a:rPr>
-              <a:t>Dữ liệu người bệnh ở lại trong bệnh viện</a:t>
+              <a:t>Lỗi tự tìm đến người phụ trách — không chờ cổng giám định báo về</a:t>
             </a:r>
             <a:endParaRPr lang="en-US" sz="1600" dirty="0"/>
           </a:p>
@@ -10325,7 +12477,7 @@
       </p:sp>
       <p:sp>
         <p:nvSpPr>
-          <p:cNvPr id="26" name="Text 23"/>
+          <p:cNvPr id="21" name="Text 18"/>
           <p:cNvSpPr txBox="1"/>
           <p:nvPr/>
         </p:nvSpPr>
@@ -10356,7 +12508,7 @@
                 <a:ea typeface="Arial" pitchFamily="34" charset="-122"/>
                 <a:cs typeface="Arial" pitchFamily="34" charset="-120"/>
               </a:rPr>
-              <a:t>GIẢI PHÁP TIỀN GIÁM ĐỊNH  ·  07 / 10</a:t>
+              <a:t>GIẢI PHÁP TIỀN GIÁM ĐỊNH  ·  07 / 12</a:t>
             </a:r>
             <a:endParaRPr lang="en-US" sz="950" dirty="0"/>
           </a:p>
@@ -10434,7 +12586,7 @@
                 <a:ea typeface="Arial" pitchFamily="34" charset="-122"/>
                 <a:cs typeface="Arial" pitchFamily="34" charset="-120"/>
               </a:rPr>
-              <a:t>TRIỂN KHAI</a:t>
+              <a:t>AN TOÀN</a:t>
             </a:r>
             <a:endParaRPr lang="en-US" sz="1200" dirty="0"/>
           </a:p>
@@ -10473,7 +12625,7 @@
                 <a:ea typeface="Arial" pitchFamily="34" charset="-122"/>
                 <a:cs typeface="Arial" pitchFamily="34" charset="-120"/>
               </a:rPr>
-              <a:t>Điều kiện và lộ trình triển khai tại bệnh viện</a:t>
+              <a:t>Dữ liệu người bệnh và hệ thống HIS được bảo vệ thế nào</a:t>
             </a:r>
             <a:endParaRPr lang="en-US" sz="2800" dirty="0"/>
           </a:p>
@@ -10488,11 +12640,11 @@
         <p:spPr>
           <a:xfrm>
             <a:off x="640080" y="1508760"/>
-            <a:ext cx="4846320" cy="1325880"/>
+            <a:ext cx="5318608" cy="1783080"/>
           </a:xfrm>
           <a:prstGeom prst="roundRect">
             <a:avLst>
-              <a:gd name="adj" fmla="val 6897"/>
+              <a:gd name="adj" fmla="val 5128"/>
             </a:avLst>
           </a:prstGeom>
           <a:solidFill>
@@ -10510,14 +12662,39 @@
       </p:sp>
       <p:sp>
         <p:nvSpPr>
-          <p:cNvPr id="5" name="Text 3"/>
-          <p:cNvSpPr txBox="1"/>
-          <p:nvPr/>
-        </p:nvSpPr>
-        <p:spPr>
-          <a:xfrm>
-            <a:off x="822960" y="1691640"/>
-            <a:ext cx="457200" cy="457200"/>
+          <p:cNvPr id="5" name="Shape 3"/>
+          <p:cNvSpPr/>
+          <p:nvPr/>
+        </p:nvSpPr>
+        <p:spPr>
+          <a:xfrm>
+            <a:off x="914400" y="1783080"/>
+            <a:ext cx="731520" cy="731520"/>
+          </a:xfrm>
+          <a:prstGeom prst="ellipse">
+            <a:avLst/>
+          </a:prstGeom>
+          <a:solidFill>
+            <a:srgbClr val="25324A"/>
+          </a:solidFill>
+          <a:ln w="12700">
+            <a:solidFill>
+              <a:srgbClr val="38BDF8"/>
+            </a:solidFill>
+            <a:prstDash val="solid"/>
+          </a:ln>
+        </p:spPr>
+      </p:sp>
+      <p:sp>
+        <p:nvSpPr>
+          <p:cNvPr id="6" name="Text 4"/>
+          <p:cNvSpPr txBox="1"/>
+          <p:nvPr/>
+        </p:nvSpPr>
+        <p:spPr>
+          <a:xfrm>
+            <a:off x="914400" y="1783080"/>
+            <a:ext cx="731520" cy="731520"/>
           </a:xfrm>
           <a:prstGeom prst="rect">
             <a:avLst/>
@@ -10533,7 +12710,7 @@
               <a:buNone/>
             </a:pPr>
             <a:r>
-              <a:rPr lang="en-US" sz="2000" dirty="0">
+              <a:rPr lang="en-US" sz="2200" dirty="0">
                 <a:solidFill>
                   <a:srgbClr val="000000"/>
                 </a:solidFill>
@@ -10541,22 +12718,22 @@
                 <a:ea typeface="Segoe UI Emoji" pitchFamily="34" charset="-122"/>
                 <a:cs typeface="Segoe UI Emoji" pitchFamily="34" charset="-120"/>
               </a:rPr>
-              <a:t>🔌</a:t>
-            </a:r>
-            <a:endParaRPr lang="en-US" sz="2000" dirty="0"/>
-          </a:p>
-        </p:txBody>
-      </p:sp>
-      <p:sp>
-        <p:nvSpPr>
-          <p:cNvPr id="6" name="Text 4"/>
-          <p:cNvSpPr txBox="1"/>
-          <p:nvPr/>
-        </p:nvSpPr>
-        <p:spPr>
-          <a:xfrm>
-            <a:off x="1417320" y="1691640"/>
-            <a:ext cx="3886200" cy="457200"/>
+              <a:t>🏠</a:t>
+            </a:r>
+            <a:endParaRPr lang="en-US" sz="2200" dirty="0"/>
+          </a:p>
+        </p:txBody>
+      </p:sp>
+      <p:sp>
+        <p:nvSpPr>
+          <p:cNvPr id="7" name="Text 5"/>
+          <p:cNvSpPr txBox="1"/>
+          <p:nvPr/>
+        </p:nvSpPr>
+        <p:spPr>
+          <a:xfrm>
+            <a:off x="1874520" y="1783080"/>
+            <a:ext cx="3855568" cy="457200"/>
           </a:xfrm>
           <a:prstGeom prst="rect">
             <a:avLst/>
@@ -10572,7 +12749,7 @@
               <a:buNone/>
             </a:pPr>
             <a:r>
-              <a:rPr lang="en-US" sz="1600" b="1" dirty="0">
+              <a:rPr lang="en-US" sz="1800" b="1" dirty="0">
                 <a:solidFill>
                   <a:srgbClr val="FFFFFF"/>
                 </a:solidFill>
@@ -10580,22 +12757,22 @@
                 <a:ea typeface="Arial" pitchFamily="34" charset="-122"/>
                 <a:cs typeface="Arial" pitchFamily="34" charset="-120"/>
               </a:rPr>
-              <a:t>Dùng được với mọi HIS</a:t>
-            </a:r>
-            <a:endParaRPr lang="en-US" sz="1600" dirty="0"/>
-          </a:p>
-        </p:txBody>
-      </p:sp>
-      <p:sp>
-        <p:nvSpPr>
-          <p:cNvPr id="7" name="Text 5"/>
-          <p:cNvSpPr txBox="1"/>
-          <p:nvPr/>
-        </p:nvSpPr>
-        <p:spPr>
-          <a:xfrm>
-            <a:off x="914400" y="2194560"/>
-            <a:ext cx="4343400" cy="594360"/>
+              <a:t>Đặt tại bệnh viện</a:t>
+            </a:r>
+            <a:endParaRPr lang="en-US" sz="1800" dirty="0"/>
+          </a:p>
+        </p:txBody>
+      </p:sp>
+      <p:sp>
+        <p:nvSpPr>
+          <p:cNvPr id="8" name="Text 6"/>
+          <p:cNvSpPr txBox="1"/>
+          <p:nvPr/>
+        </p:nvSpPr>
+        <p:spPr>
+          <a:xfrm>
+            <a:off x="1874520" y="2286000"/>
+            <a:ext cx="3855568" cy="868680"/>
           </a:xfrm>
           <a:prstGeom prst="rect">
             <a:avLst/>
@@ -10609,12 +12786,12 @@
           <a:p>
             <a:pPr indent="0" marL="0">
               <a:lnSpc>
-                <a:spcPts val="1700"/>
+                <a:spcPts val="1900"/>
               </a:lnSpc>
               <a:buNone/>
             </a:pPr>
             <a:r>
-              <a:rPr lang="en-US" sz="1250" dirty="0">
+              <a:rPr lang="en-US" sz="1350" dirty="0">
                 <a:solidFill>
                   <a:srgbClr val="A9BCD6"/>
                 </a:solidFill>
@@ -10622,175 +12799,26 @@
                 <a:ea typeface="Arial" pitchFamily="34" charset="-122"/>
                 <a:cs typeface="Arial" pitchFamily="34" charset="-120"/>
               </a:rPr>
-              <a:t>Hồ sơ XML 3176 — nhận tệp XML chuẩn theo Quyết định 3176, không phụ thuộc phần mềm HIS</a:t>
-            </a:r>
-            <a:endParaRPr lang="en-US" sz="1250" dirty="0"/>
-          </a:p>
-        </p:txBody>
-      </p:sp>
-      <p:sp>
-        <p:nvSpPr>
-          <p:cNvPr id="8" name="Shape 6"/>
+              <a:t>Máy chủ đặt trong mạng nội bộ của viện. Dữ liệu chỉ gửi lên Cổng giám định BHXH — như quy trình hiện nay.</a:t>
+            </a:r>
+            <a:endParaRPr lang="en-US" sz="1350" dirty="0"/>
+          </a:p>
+        </p:txBody>
+      </p:sp>
+      <p:sp>
+        <p:nvSpPr>
+          <p:cNvPr id="9" name="Shape 7"/>
           <p:cNvSpPr/>
           <p:nvPr/>
         </p:nvSpPr>
         <p:spPr>
           <a:xfrm>
-            <a:off x="640080" y="2990088"/>
-            <a:ext cx="4846320" cy="1325880"/>
+            <a:off x="6233008" y="1508760"/>
+            <a:ext cx="5318608" cy="1783080"/>
           </a:xfrm>
           <a:prstGeom prst="roundRect">
             <a:avLst>
-              <a:gd name="adj" fmla="val 6897"/>
-            </a:avLst>
-          </a:prstGeom>
-          <a:solidFill>
-            <a:srgbClr val="25324A">
-              <a:alpha val="85000"/>
-            </a:srgbClr>
-          </a:solidFill>
-          <a:ln w="19050">
-            <a:solidFill>
-              <a:srgbClr val="FBBF24"/>
-            </a:solidFill>
-            <a:prstDash val="solid"/>
-          </a:ln>
-        </p:spPr>
-      </p:sp>
-      <p:sp>
-        <p:nvSpPr>
-          <p:cNvPr id="9" name="Text 7"/>
-          <p:cNvSpPr txBox="1"/>
-          <p:nvPr/>
-        </p:nvSpPr>
-        <p:spPr>
-          <a:xfrm>
-            <a:off x="822960" y="3172968"/>
-            <a:ext cx="457200" cy="457200"/>
-          </a:xfrm>
-          <a:prstGeom prst="rect">
-            <a:avLst/>
-          </a:prstGeom>
-          <a:noFill/>
-          <a:ln/>
-        </p:spPr>
-        <p:txBody>
-          <a:bodyPr wrap="square" lIns="0" tIns="0" rIns="0" bIns="0" rtlCol="0" anchor="ctr"/>
-          <a:lstStyle/>
-          <a:p>
-            <a:pPr algn="ctr" indent="0" marL="0">
-              <a:buNone/>
-            </a:pPr>
-            <a:r>
-              <a:rPr lang="en-US" sz="2000" dirty="0">
-                <a:solidFill>
-                  <a:srgbClr val="000000"/>
-                </a:solidFill>
-                <a:latin typeface="Segoe UI Emoji" pitchFamily="34" charset="0"/>
-                <a:ea typeface="Segoe UI Emoji" pitchFamily="34" charset="-122"/>
-                <a:cs typeface="Segoe UI Emoji" pitchFamily="34" charset="-120"/>
-              </a:rPr>
-              <a:t>🧩</a:t>
-            </a:r>
-            <a:endParaRPr lang="en-US" sz="2000" dirty="0"/>
-          </a:p>
-        </p:txBody>
-      </p:sp>
-      <p:sp>
-        <p:nvSpPr>
-          <p:cNvPr id="10" name="Text 8"/>
-          <p:cNvSpPr txBox="1"/>
-          <p:nvPr/>
-        </p:nvSpPr>
-        <p:spPr>
-          <a:xfrm>
-            <a:off x="1417320" y="3172968"/>
-            <a:ext cx="3886200" cy="457200"/>
-          </a:xfrm>
-          <a:prstGeom prst="rect">
-            <a:avLst/>
-          </a:prstGeom>
-          <a:noFill/>
-          <a:ln/>
-        </p:spPr>
-        <p:txBody>
-          <a:bodyPr wrap="square" lIns="0" tIns="0" rIns="0" bIns="0" rtlCol="0" anchor="ctr"/>
-          <a:lstStyle/>
-          <a:p>
-            <a:pPr indent="0" marL="0">
-              <a:buNone/>
-            </a:pPr>
-            <a:r>
-              <a:rPr lang="en-US" sz="1600" b="1" dirty="0">
-                <a:solidFill>
-                  <a:srgbClr val="FBBF24"/>
-                </a:solidFill>
-                <a:latin typeface="Arial" pitchFamily="34" charset="0"/>
-                <a:ea typeface="Arial" pitchFamily="34" charset="-122"/>
-                <a:cs typeface="Arial" pitchFamily="34" charset="-120"/>
-              </a:rPr>
-              <a:t>Cần kết nối riêng với HIS của viện</a:t>
-            </a:r>
-            <a:endParaRPr lang="en-US" sz="1600" dirty="0"/>
-          </a:p>
-        </p:txBody>
-      </p:sp>
-      <p:sp>
-        <p:nvSpPr>
-          <p:cNvPr id="11" name="Text 9"/>
-          <p:cNvSpPr txBox="1"/>
-          <p:nvPr/>
-        </p:nvSpPr>
-        <p:spPr>
-          <a:xfrm>
-            <a:off x="914400" y="3675888"/>
-            <a:ext cx="4343400" cy="594360"/>
-          </a:xfrm>
-          <a:prstGeom prst="rect">
-            <a:avLst/>
-          </a:prstGeom>
-          <a:noFill/>
-          <a:ln/>
-        </p:spPr>
-        <p:txBody>
-          <a:bodyPr wrap="square" lIns="0" tIns="0" rIns="0" bIns="0" rtlCol="0" anchor="t"/>
-          <a:lstStyle/>
-          <a:p>
-            <a:pPr indent="0" marL="0">
-              <a:lnSpc>
-                <a:spcPts val="1700"/>
-              </a:lnSpc>
-              <a:buNone/>
-            </a:pPr>
-            <a:r>
-              <a:rPr lang="en-US" sz="1250" dirty="0">
-                <a:solidFill>
-                  <a:srgbClr val="A9BCD6"/>
-                </a:solidFill>
-                <a:latin typeface="Arial" pitchFamily="34" charset="0"/>
-                <a:ea typeface="Arial" pitchFamily="34" charset="-122"/>
-                <a:cs typeface="Arial" pitchFamily="34" charset="-120"/>
-              </a:rPr>
-              <a:t>Kiểm sai sót y lệnh — đọc trực tiếp CSDL HIS (chỉ đọc); viện dùng HIS khác cần làm lớp kết nối riêng</a:t>
-            </a:r>
-            <a:endParaRPr lang="en-US" sz="1250" dirty="0"/>
-          </a:p>
-        </p:txBody>
-      </p:sp>
-      <p:sp>
-        <p:nvSpPr>
-          <p:cNvPr id="12" name="Shape 10"/>
-          <p:cNvSpPr/>
-          <p:nvPr/>
-        </p:nvSpPr>
-        <p:spPr>
-          <a:xfrm>
-            <a:off x="5806440" y="1508760"/>
-            <a:ext cx="5745175" cy="2807208"/>
-          </a:xfrm>
-          <a:prstGeom prst="roundRect">
-            <a:avLst>
-              <a:gd name="adj" fmla="val 3257"/>
+              <a:gd name="adj" fmla="val 5128"/>
             </a:avLst>
           </a:prstGeom>
           <a:solidFill>
@@ -10808,229 +12836,24 @@
       </p:sp>
       <p:sp>
         <p:nvSpPr>
-          <p:cNvPr id="13" name="Text 11"/>
-          <p:cNvSpPr txBox="1"/>
-          <p:nvPr/>
-        </p:nvSpPr>
-        <p:spPr>
-          <a:xfrm>
-            <a:off x="6080760" y="1691640"/>
-            <a:ext cx="5196535" cy="292608"/>
-          </a:xfrm>
-          <a:prstGeom prst="rect">
-            <a:avLst/>
-          </a:prstGeom>
-          <a:noFill/>
-          <a:ln/>
-        </p:spPr>
-        <p:txBody>
-          <a:bodyPr wrap="square" lIns="0" tIns="0" rIns="0" bIns="0" rtlCol="0" anchor="ctr"/>
-          <a:lstStyle/>
-          <a:p>
-            <a:pPr indent="0" marL="0">
-              <a:buNone/>
-            </a:pPr>
-            <a:r>
-              <a:rPr lang="en-US" sz="1200" b="1" spc="200" kern="0" dirty="0">
-                <a:solidFill>
-                  <a:srgbClr val="38BDF8"/>
-                </a:solidFill>
-                <a:latin typeface="Arial" pitchFamily="34" charset="0"/>
-                <a:ea typeface="Arial" pitchFamily="34" charset="-122"/>
-                <a:cs typeface="Arial" pitchFamily="34" charset="-120"/>
-              </a:rPr>
-              <a:t>VIỆN CẦN CHUẨN BỊ</a:t>
-            </a:r>
-            <a:endParaRPr lang="en-US" sz="1200" dirty="0"/>
-          </a:p>
-        </p:txBody>
-      </p:sp>
-      <p:sp>
-        <p:nvSpPr>
-          <p:cNvPr id="14" name="Text 12"/>
-          <p:cNvSpPr txBox="1"/>
-          <p:nvPr/>
-        </p:nvSpPr>
-        <p:spPr>
-          <a:xfrm>
-            <a:off x="6080760" y="2075688"/>
-            <a:ext cx="5196535" cy="2148840"/>
-          </a:xfrm>
-          <a:prstGeom prst="rect">
-            <a:avLst/>
-          </a:prstGeom>
-          <a:noFill/>
-          <a:ln/>
-        </p:spPr>
-        <p:txBody>
-          <a:bodyPr wrap="square" lIns="0" tIns="0" rIns="0" bIns="0" rtlCol="0" anchor="t"/>
-          <a:lstStyle/>
-          <a:p>
-            <a:pPr marL="203200" indent="-203200">
-              <a:lnSpc>
-                <a:spcPts val="1800"/>
-              </a:lnSpc>
-              <a:spcAft>
-                <a:spcPts val="500"/>
-              </a:spcAft>
-              <a:buSzPct val="100000"/>
-              <a:buChar char="•"/>
-            </a:pPr>
-            <a:r>
-              <a:rPr lang="en-US" sz="1350" dirty="0">
-                <a:solidFill>
-                  <a:srgbClr val="FFFFFF"/>
-                </a:solidFill>
-                <a:latin typeface="Arial" pitchFamily="34" charset="0"/>
-                <a:ea typeface="Arial" pitchFamily="34" charset="-122"/>
-                <a:cs typeface="Arial" pitchFamily="34" charset="-120"/>
-              </a:rPr>
-              <a:t>Máy chủ: Windows Server, hoặc Linux / Docker</a:t>
-            </a:r>
-            <a:endParaRPr lang="en-US" sz="1350" dirty="0"/>
-          </a:p>
-          <a:p>
-            <a:pPr marL="203200" indent="-203200">
-              <a:lnSpc>
-                <a:spcPts val="1800"/>
-              </a:lnSpc>
-              <a:spcAft>
-                <a:spcPts val="500"/>
-              </a:spcAft>
-              <a:buSzPct val="100000"/>
-              <a:buChar char="•"/>
-            </a:pPr>
-            <a:r>
-              <a:rPr lang="en-US" sz="1350" dirty="0">
-                <a:solidFill>
-                  <a:srgbClr val="FFFFFF"/>
-                </a:solidFill>
-                <a:latin typeface="Arial" pitchFamily="34" charset="0"/>
-                <a:ea typeface="Arial" pitchFamily="34" charset="-122"/>
-                <a:cs typeface="Arial" pitchFamily="34" charset="-120"/>
-              </a:rPr>
-              <a:t>Tài khoản chỉ đọc vào cơ sở dữ liệu HIS</a:t>
-            </a:r>
-            <a:endParaRPr lang="en-US" sz="1350" dirty="0"/>
-          </a:p>
-          <a:p>
-            <a:pPr marL="203200" indent="-203200">
-              <a:lnSpc>
-                <a:spcPts val="1800"/>
-              </a:lnSpc>
-              <a:spcAft>
-                <a:spcPts val="500"/>
-              </a:spcAft>
-              <a:buSzPct val="100000"/>
-              <a:buChar char="•"/>
-            </a:pPr>
-            <a:r>
-              <a:rPr lang="en-US" sz="1350" dirty="0">
-                <a:solidFill>
-                  <a:srgbClr val="FFFFFF"/>
-                </a:solidFill>
-                <a:latin typeface="Arial" pitchFamily="34" charset="0"/>
-                <a:ea typeface="Arial" pitchFamily="34" charset="-122"/>
-                <a:cs typeface="Arial" pitchFamily="34" charset="-120"/>
-              </a:rPr>
-              <a:t>Thư mục nhận tệp XML do HIS xuất ra</a:t>
-            </a:r>
-            <a:endParaRPr lang="en-US" sz="1350" dirty="0"/>
-          </a:p>
-          <a:p>
-            <a:pPr marL="203200" indent="-203200">
-              <a:lnSpc>
-                <a:spcPts val="1800"/>
-              </a:lnSpc>
-              <a:spcAft>
-                <a:spcPts val="500"/>
-              </a:spcAft>
-              <a:buSzPct val="100000"/>
-              <a:buChar char="•"/>
-            </a:pPr>
-            <a:r>
-              <a:rPr lang="en-US" sz="1350" dirty="0">
-                <a:solidFill>
-                  <a:srgbClr val="FFFFFF"/>
-                </a:solidFill>
-                <a:latin typeface="Arial" pitchFamily="34" charset="0"/>
-                <a:ea typeface="Arial" pitchFamily="34" charset="-122"/>
-                <a:cs typeface="Arial" pitchFamily="34" charset="-120"/>
-              </a:rPr>
-              <a:t>HSM hoặc USB Token để ký số</a:t>
-            </a:r>
-            <a:endParaRPr lang="en-US" sz="1350" dirty="0"/>
-          </a:p>
-          <a:p>
-            <a:pPr marL="203200" indent="-203200">
-              <a:lnSpc>
-                <a:spcPts val="1800"/>
-              </a:lnSpc>
-              <a:spcAft>
-                <a:spcPts val="500"/>
-              </a:spcAft>
-              <a:buSzPct val="100000"/>
-              <a:buChar char="•"/>
-            </a:pPr>
-            <a:r>
-              <a:rPr lang="en-US" sz="1350" dirty="0">
-                <a:solidFill>
-                  <a:srgbClr val="FFFFFF"/>
-                </a:solidFill>
-                <a:latin typeface="Arial" pitchFamily="34" charset="0"/>
-                <a:ea typeface="Arial" pitchFamily="34" charset="-122"/>
-                <a:cs typeface="Arial" pitchFamily="34" charset="-120"/>
-              </a:rPr>
-              <a:t>Tài khoản Cổng giám định BHXH và mã cơ sở KCB</a:t>
-            </a:r>
-            <a:endParaRPr lang="en-US" sz="1350" dirty="0"/>
-          </a:p>
-          <a:p>
-            <a:pPr marL="203200" indent="-203200">
-              <a:lnSpc>
-                <a:spcPts val="1800"/>
-              </a:lnSpc>
-              <a:spcAft>
-                <a:spcPts val="500"/>
-              </a:spcAft>
-              <a:buSzPct val="100000"/>
-              <a:buChar char="•"/>
-            </a:pPr>
-            <a:r>
-              <a:rPr lang="en-US" sz="1350" dirty="0">
-                <a:solidFill>
-                  <a:srgbClr val="FFFFFF"/>
-                </a:solidFill>
-                <a:latin typeface="Arial" pitchFamily="34" charset="0"/>
-                <a:ea typeface="Arial" pitchFamily="34" charset="-122"/>
-                <a:cs typeface="Arial" pitchFamily="34" charset="-120"/>
-              </a:rPr>
-              <a:t>Người phụ trách danh mục BHYT của viện</a:t>
-            </a:r>
-            <a:endParaRPr lang="en-US" sz="1350" dirty="0"/>
-          </a:p>
-        </p:txBody>
-      </p:sp>
-      <p:sp>
-        <p:nvSpPr>
-          <p:cNvPr id="15" name="Shape 13"/>
+          <p:cNvPr id="10" name="Shape 8"/>
           <p:cNvSpPr/>
           <p:nvPr/>
         </p:nvSpPr>
         <p:spPr>
           <a:xfrm>
-            <a:off x="640080" y="4572000"/>
-            <a:ext cx="2769032" cy="548640"/>
-          </a:xfrm>
-          <a:prstGeom prst="homePlate">
+            <a:off x="6507328" y="1783080"/>
+            <a:ext cx="731520" cy="731520"/>
+          </a:xfrm>
+          <a:prstGeom prst="ellipse">
             <a:avLst/>
           </a:prstGeom>
           <a:solidFill>
-            <a:srgbClr val="1E4E86"/>
+            <a:srgbClr val="25324A"/>
           </a:solidFill>
           <a:ln w="12700">
             <a:solidFill>
-              <a:srgbClr val="0B1A30"/>
+              <a:srgbClr val="38BDF8"/>
             </a:solidFill>
             <a:prstDash val="solid"/>
           </a:ln>
@@ -11038,14 +12861,53 @@
       </p:sp>
       <p:sp>
         <p:nvSpPr>
-          <p:cNvPr id="16" name="Text 14"/>
-          <p:cNvSpPr txBox="1"/>
-          <p:nvPr/>
-        </p:nvSpPr>
-        <p:spPr>
-          <a:xfrm>
-            <a:off x="841248" y="4572000"/>
-            <a:ext cx="2202104" cy="548640"/>
+          <p:cNvPr id="11" name="Text 9"/>
+          <p:cNvSpPr txBox="1"/>
+          <p:nvPr/>
+        </p:nvSpPr>
+        <p:spPr>
+          <a:xfrm>
+            <a:off x="6507328" y="1783080"/>
+            <a:ext cx="731520" cy="731520"/>
+          </a:xfrm>
+          <a:prstGeom prst="rect">
+            <a:avLst/>
+          </a:prstGeom>
+          <a:noFill/>
+          <a:ln/>
+        </p:spPr>
+        <p:txBody>
+          <a:bodyPr wrap="square" lIns="0" tIns="0" rIns="0" bIns="0" rtlCol="0" anchor="ctr"/>
+          <a:lstStyle/>
+          <a:p>
+            <a:pPr algn="ctr" indent="0" marL="0">
+              <a:buNone/>
+            </a:pPr>
+            <a:r>
+              <a:rPr lang="en-US" sz="2200" dirty="0">
+                <a:solidFill>
+                  <a:srgbClr val="000000"/>
+                </a:solidFill>
+                <a:latin typeface="Segoe UI Emoji" pitchFamily="34" charset="0"/>
+                <a:ea typeface="Segoe UI Emoji" pitchFamily="34" charset="-122"/>
+                <a:cs typeface="Segoe UI Emoji" pitchFamily="34" charset="-120"/>
+              </a:rPr>
+              <a:t>🔒</a:t>
+            </a:r>
+            <a:endParaRPr lang="en-US" sz="2200" dirty="0"/>
+          </a:p>
+        </p:txBody>
+      </p:sp>
+      <p:sp>
+        <p:nvSpPr>
+          <p:cNvPr id="12" name="Text 10"/>
+          <p:cNvSpPr txBox="1"/>
+          <p:nvPr/>
+        </p:nvSpPr>
+        <p:spPr>
+          <a:xfrm>
+            <a:off x="7467448" y="1783080"/>
+            <a:ext cx="3855568" cy="457200"/>
           </a:xfrm>
           <a:prstGeom prst="rect">
             <a:avLst/>
@@ -11061,7 +12923,7 @@
               <a:buNone/>
             </a:pPr>
             <a:r>
-              <a:rPr lang="en-US" sz="1500" b="1" dirty="0">
+              <a:rPr lang="en-US" sz="1800" b="1" dirty="0">
                 <a:solidFill>
                   <a:srgbClr val="FFFFFF"/>
                 </a:solidFill>
@@ -11069,36 +12931,22 @@
                 <a:ea typeface="Arial" pitchFamily="34" charset="-122"/>
                 <a:cs typeface="Arial" pitchFamily="34" charset="-120"/>
               </a:rPr>
-              <a:t>Chuẩn bị  </a:t>
-            </a:r>
-            <a:pPr indent="0" marL="0">
-              <a:buNone/>
-            </a:pPr>
-            <a:r>
-              <a:rPr lang="en-US" sz="1250" dirty="0">
-                <a:solidFill>
-                  <a:srgbClr val="38BDF8"/>
-                </a:solidFill>
-                <a:latin typeface="Arial" pitchFamily="34" charset="0"/>
-                <a:ea typeface="Arial" pitchFamily="34" charset="-122"/>
-                <a:cs typeface="Arial" pitchFamily="34" charset="-120"/>
-              </a:rPr>
-              <a:t>2–4 tuần</a:t>
-            </a:r>
-            <a:endParaRPr lang="en-US" sz="1500" dirty="0"/>
-          </a:p>
-        </p:txBody>
-      </p:sp>
-      <p:sp>
-        <p:nvSpPr>
-          <p:cNvPr id="17" name="Text 15"/>
-          <p:cNvSpPr txBox="1"/>
-          <p:nvPr/>
-        </p:nvSpPr>
-        <p:spPr>
-          <a:xfrm>
-            <a:off x="841248" y="5212080"/>
-            <a:ext cx="2156384" cy="640080"/>
+              <a:t>Chỉ đọc HIS</a:t>
+            </a:r>
+            <a:endParaRPr lang="en-US" sz="1800" dirty="0"/>
+          </a:p>
+        </p:txBody>
+      </p:sp>
+      <p:sp>
+        <p:nvSpPr>
+          <p:cNvPr id="13" name="Text 11"/>
+          <p:cNvSpPr txBox="1"/>
+          <p:nvPr/>
+        </p:nvSpPr>
+        <p:spPr>
+          <a:xfrm>
+            <a:off x="7467448" y="2286000"/>
+            <a:ext cx="3855568" cy="868680"/>
           </a:xfrm>
           <a:prstGeom prst="rect">
             <a:avLst/>
@@ -11112,12 +12960,12 @@
           <a:p>
             <a:pPr indent="0" marL="0">
               <a:lnSpc>
-                <a:spcPts val="1700"/>
+                <a:spcPts val="1900"/>
               </a:lnSpc>
               <a:buNone/>
             </a:pPr>
             <a:r>
-              <a:rPr lang="en-US" sz="1250" dirty="0">
+              <a:rPr lang="en-US" sz="1350" dirty="0">
                 <a:solidFill>
                   <a:srgbClr val="A9BCD6"/>
                 </a:solidFill>
@@ -11125,32 +12973,61 @@
                 <a:ea typeface="Arial" pitchFamily="34" charset="-122"/>
                 <a:cs typeface="Arial" pitchFamily="34" charset="-120"/>
               </a:rPr>
-              <a:t>Lập tổ, chốt chủ sở hữu danh mục, ban hành no-blame</a:t>
-            </a:r>
-            <a:endParaRPr lang="en-US" sz="1250" dirty="0"/>
-          </a:p>
-        </p:txBody>
-      </p:sp>
-      <p:sp>
-        <p:nvSpPr>
-          <p:cNvPr id="18" name="Shape 16"/>
+              <a:t>Tài khoản chỉ có quyền đọc: không ghi, không cài trigger, không đổi cấu trúc cơ sở dữ liệu HIS.</a:t>
+            </a:r>
+            <a:endParaRPr lang="en-US" sz="1350" dirty="0"/>
+          </a:p>
+        </p:txBody>
+      </p:sp>
+      <p:sp>
+        <p:nvSpPr>
+          <p:cNvPr id="14" name="Shape 12"/>
           <p:cNvSpPr/>
           <p:nvPr/>
         </p:nvSpPr>
         <p:spPr>
           <a:xfrm>
-            <a:off x="3390824" y="4572000"/>
-            <a:ext cx="2769032" cy="548640"/>
-          </a:xfrm>
-          <a:prstGeom prst="chevron">
-            <a:avLst/>
+            <a:off x="640080" y="3520440"/>
+            <a:ext cx="5318608" cy="1783080"/>
+          </a:xfrm>
+          <a:prstGeom prst="roundRect">
+            <a:avLst>
+              <a:gd name="adj" fmla="val 5128"/>
+            </a:avLst>
           </a:prstGeom>
           <a:solidFill>
-            <a:srgbClr val="1E4E86"/>
+            <a:srgbClr val="1C3558">
+              <a:alpha val="85000"/>
+            </a:srgbClr>
+          </a:solidFill>
+          <a:ln w="9525">
+            <a:solidFill>
+              <a:srgbClr val="2E4B74"/>
+            </a:solidFill>
+            <a:prstDash val="solid"/>
+          </a:ln>
+        </p:spPr>
+      </p:sp>
+      <p:sp>
+        <p:nvSpPr>
+          <p:cNvPr id="15" name="Shape 13"/>
+          <p:cNvSpPr/>
+          <p:nvPr/>
+        </p:nvSpPr>
+        <p:spPr>
+          <a:xfrm>
+            <a:off x="914400" y="3794760"/>
+            <a:ext cx="731520" cy="731520"/>
+          </a:xfrm>
+          <a:prstGeom prst="ellipse">
+            <a:avLst/>
+          </a:prstGeom>
+          <a:solidFill>
+            <a:srgbClr val="25324A"/>
           </a:solidFill>
           <a:ln w="12700">
             <a:solidFill>
-              <a:srgbClr val="0B1A30"/>
+              <a:srgbClr val="38BDF8"/>
             </a:solidFill>
             <a:prstDash val="solid"/>
           </a:ln>
@@ -11158,14 +13035,53 @@
       </p:sp>
       <p:sp>
         <p:nvSpPr>
-          <p:cNvPr id="19" name="Text 17"/>
-          <p:cNvSpPr txBox="1"/>
-          <p:nvPr/>
-        </p:nvSpPr>
-        <p:spPr>
-          <a:xfrm>
-            <a:off x="3756584" y="4572000"/>
-            <a:ext cx="2202104" cy="548640"/>
+          <p:cNvPr id="16" name="Text 14"/>
+          <p:cNvSpPr txBox="1"/>
+          <p:nvPr/>
+        </p:nvSpPr>
+        <p:spPr>
+          <a:xfrm>
+            <a:off x="914400" y="3794760"/>
+            <a:ext cx="731520" cy="731520"/>
+          </a:xfrm>
+          <a:prstGeom prst="rect">
+            <a:avLst/>
+          </a:prstGeom>
+          <a:noFill/>
+          <a:ln/>
+        </p:spPr>
+        <p:txBody>
+          <a:bodyPr wrap="square" lIns="0" tIns="0" rIns="0" bIns="0" rtlCol="0" anchor="ctr"/>
+          <a:lstStyle/>
+          <a:p>
+            <a:pPr algn="ctr" indent="0" marL="0">
+              <a:buNone/>
+            </a:pPr>
+            <a:r>
+              <a:rPr lang="en-US" sz="2200" dirty="0">
+                <a:solidFill>
+                  <a:srgbClr val="000000"/>
+                </a:solidFill>
+                <a:latin typeface="Segoe UI Emoji" pitchFamily="34" charset="0"/>
+                <a:ea typeface="Segoe UI Emoji" pitchFamily="34" charset="-122"/>
+                <a:cs typeface="Segoe UI Emoji" pitchFamily="34" charset="-120"/>
+              </a:rPr>
+              <a:t>⚙️</a:t>
+            </a:r>
+            <a:endParaRPr lang="en-US" sz="2200" dirty="0"/>
+          </a:p>
+        </p:txBody>
+      </p:sp>
+      <p:sp>
+        <p:nvSpPr>
+          <p:cNvPr id="17" name="Text 15"/>
+          <p:cNvSpPr txBox="1"/>
+          <p:nvPr/>
+        </p:nvSpPr>
+        <p:spPr>
+          <a:xfrm>
+            <a:off x="1874520" y="3794760"/>
+            <a:ext cx="3855568" cy="457200"/>
           </a:xfrm>
           <a:prstGeom prst="rect">
             <a:avLst/>
@@ -11181,7 +13097,7 @@
               <a:buNone/>
             </a:pPr>
             <a:r>
-              <a:rPr lang="en-US" sz="1500" b="1" dirty="0">
+              <a:rPr lang="en-US" sz="1800" b="1" dirty="0">
                 <a:solidFill>
                   <a:srgbClr val="FFFFFF"/>
                 </a:solidFill>
@@ -11189,36 +13105,22 @@
                 <a:ea typeface="Arial" pitchFamily="34" charset="-122"/>
                 <a:cs typeface="Arial" pitchFamily="34" charset="-120"/>
               </a:rPr>
-              <a:t>Chạy thử  </a:t>
-            </a:r>
-            <a:pPr indent="0" marL="0">
-              <a:buNone/>
-            </a:pPr>
-            <a:r>
-              <a:rPr lang="en-US" sz="1250" dirty="0">
-                <a:solidFill>
-                  <a:srgbClr val="38BDF8"/>
-                </a:solidFill>
-                <a:latin typeface="Arial" pitchFamily="34" charset="0"/>
-                <a:ea typeface="Arial" pitchFamily="34" charset="-122"/>
-                <a:cs typeface="Arial" pitchFamily="34" charset="-120"/>
-              </a:rPr>
-              <a:t>4–8 tuần</a:t>
-            </a:r>
-            <a:endParaRPr lang="en-US" sz="1500" dirty="0"/>
-          </a:p>
-        </p:txBody>
-      </p:sp>
-      <p:sp>
-        <p:nvSpPr>
-          <p:cNvPr id="20" name="Text 18"/>
-          <p:cNvSpPr txBox="1"/>
-          <p:nvPr/>
-        </p:nvSpPr>
-        <p:spPr>
-          <a:xfrm>
-            <a:off x="3756584" y="5212080"/>
-            <a:ext cx="2156384" cy="640080"/>
+              <a:t>Không làm nặng HIS</a:t>
+            </a:r>
+            <a:endParaRPr lang="en-US" sz="1800" dirty="0"/>
+          </a:p>
+        </p:txBody>
+      </p:sp>
+      <p:sp>
+        <p:nvSpPr>
+          <p:cNvPr id="18" name="Text 16"/>
+          <p:cNvSpPr txBox="1"/>
+          <p:nvPr/>
+        </p:nvSpPr>
+        <p:spPr>
+          <a:xfrm>
+            <a:off x="1874520" y="4297680"/>
+            <a:ext cx="3855568" cy="868680"/>
           </a:xfrm>
           <a:prstGeom prst="rect">
             <a:avLst/>
@@ -11232,12 +13134,12 @@
           <a:p>
             <a:pPr indent="0" marL="0">
               <a:lnSpc>
-                <a:spcPts val="1700"/>
+                <a:spcPts val="1900"/>
               </a:lnSpc>
               <a:buNone/>
             </a:pPr>
             <a:r>
-              <a:rPr lang="en-US" sz="1250" dirty="0">
+              <a:rPr lang="en-US" sz="1350" dirty="0">
                 <a:solidFill>
                   <a:srgbClr val="A9BCD6"/>
                 </a:solidFill>
@@ -11245,32 +13147,61 @@
                 <a:ea typeface="Arial" pitchFamily="34" charset="-122"/>
                 <a:cs typeface="Arial" pitchFamily="34" charset="-120"/>
               </a:rPr>
-              <a:t>1–2 khoa, chạy song song quy trình cũ</a:t>
-            </a:r>
-            <a:endParaRPr lang="en-US" sz="1250" dirty="0"/>
-          </a:p>
-        </p:txBody>
-      </p:sp>
-      <p:sp>
-        <p:nvSpPr>
-          <p:cNvPr id="21" name="Shape 19"/>
+              <a:t>Truy vấn chạy nền theo lô; khảo sát chỉ mục các bảng HIS lớn trước khi bật.</a:t>
+            </a:r>
+            <a:endParaRPr lang="en-US" sz="1350" dirty="0"/>
+          </a:p>
+        </p:txBody>
+      </p:sp>
+      <p:sp>
+        <p:nvSpPr>
+          <p:cNvPr id="19" name="Shape 17"/>
           <p:cNvSpPr/>
           <p:nvPr/>
         </p:nvSpPr>
         <p:spPr>
           <a:xfrm>
-            <a:off x="6141568" y="4572000"/>
-            <a:ext cx="2769032" cy="548640"/>
-          </a:xfrm>
-          <a:prstGeom prst="chevron">
-            <a:avLst/>
+            <a:off x="6233008" y="3520440"/>
+            <a:ext cx="5318608" cy="1783080"/>
+          </a:xfrm>
+          <a:prstGeom prst="roundRect">
+            <a:avLst>
+              <a:gd name="adj" fmla="val 5128"/>
+            </a:avLst>
           </a:prstGeom>
           <a:solidFill>
-            <a:srgbClr val="1E4E86"/>
+            <a:srgbClr val="1C3558">
+              <a:alpha val="85000"/>
+            </a:srgbClr>
+          </a:solidFill>
+          <a:ln w="9525">
+            <a:solidFill>
+              <a:srgbClr val="2E4B74"/>
+            </a:solidFill>
+            <a:prstDash val="solid"/>
+          </a:ln>
+        </p:spPr>
+      </p:sp>
+      <p:sp>
+        <p:nvSpPr>
+          <p:cNvPr id="20" name="Shape 18"/>
+          <p:cNvSpPr/>
+          <p:nvPr/>
+        </p:nvSpPr>
+        <p:spPr>
+          <a:xfrm>
+            <a:off x="6507328" y="3794760"/>
+            <a:ext cx="731520" cy="731520"/>
+          </a:xfrm>
+          <a:prstGeom prst="ellipse">
+            <a:avLst/>
+          </a:prstGeom>
+          <a:solidFill>
+            <a:srgbClr val="25324A"/>
           </a:solidFill>
           <a:ln w="12700">
             <a:solidFill>
-              <a:srgbClr val="0B1A30"/>
+              <a:srgbClr val="38BDF8"/>
             </a:solidFill>
             <a:prstDash val="solid"/>
           </a:ln>
@@ -11278,14 +13209,53 @@
       </p:sp>
       <p:sp>
         <p:nvSpPr>
+          <p:cNvPr id="21" name="Text 19"/>
+          <p:cNvSpPr txBox="1"/>
+          <p:nvPr/>
+        </p:nvSpPr>
+        <p:spPr>
+          <a:xfrm>
+            <a:off x="6507328" y="3794760"/>
+            <a:ext cx="731520" cy="731520"/>
+          </a:xfrm>
+          <a:prstGeom prst="rect">
+            <a:avLst/>
+          </a:prstGeom>
+          <a:noFill/>
+          <a:ln/>
+        </p:spPr>
+        <p:txBody>
+          <a:bodyPr wrap="square" lIns="0" tIns="0" rIns="0" bIns="0" rtlCol="0" anchor="ctr"/>
+          <a:lstStyle/>
+          <a:p>
+            <a:pPr algn="ctr" indent="0" marL="0">
+              <a:buNone/>
+            </a:pPr>
+            <a:r>
+              <a:rPr lang="en-US" sz="2200" dirty="0">
+                <a:solidFill>
+                  <a:srgbClr val="000000"/>
+                </a:solidFill>
+                <a:latin typeface="Segoe UI Emoji" pitchFamily="34" charset="0"/>
+                <a:ea typeface="Segoe UI Emoji" pitchFamily="34" charset="-122"/>
+                <a:cs typeface="Segoe UI Emoji" pitchFamily="34" charset="-120"/>
+              </a:rPr>
+              <a:t>👥</a:t>
+            </a:r>
+            <a:endParaRPr lang="en-US" sz="2200" dirty="0"/>
+          </a:p>
+        </p:txBody>
+      </p:sp>
+      <p:sp>
+        <p:nvSpPr>
           <p:cNvPr id="22" name="Text 20"/>
           <p:cNvSpPr txBox="1"/>
           <p:nvPr/>
         </p:nvSpPr>
         <p:spPr>
           <a:xfrm>
-            <a:off x="6507328" y="4572000"/>
-            <a:ext cx="2202104" cy="548640"/>
+            <a:off x="7467448" y="3794760"/>
+            <a:ext cx="3855568" cy="457200"/>
           </a:xfrm>
           <a:prstGeom prst="rect">
             <a:avLst/>
@@ -11301,7 +13271,7 @@
               <a:buNone/>
             </a:pPr>
             <a:r>
-              <a:rPr lang="en-US" sz="1500" b="1" dirty="0">
+              <a:rPr lang="en-US" sz="1800" b="1" dirty="0">
                 <a:solidFill>
                   <a:srgbClr val="FFFFFF"/>
                 </a:solidFill>
@@ -11309,23 +13279,9 @@
                 <a:ea typeface="Arial" pitchFamily="34" charset="-122"/>
                 <a:cs typeface="Arial" pitchFamily="34" charset="-120"/>
               </a:rPr>
-              <a:t>Nhân rộng  </a:t>
-            </a:r>
-            <a:pPr indent="0" marL="0">
-              <a:buNone/>
-            </a:pPr>
-            <a:r>
-              <a:rPr lang="en-US" sz="1250" dirty="0">
-                <a:solidFill>
-                  <a:srgbClr val="38BDF8"/>
-                </a:solidFill>
-                <a:latin typeface="Arial" pitchFamily="34" charset="0"/>
-                <a:ea typeface="Arial" pitchFamily="34" charset="-122"/>
-                <a:cs typeface="Arial" pitchFamily="34" charset="-120"/>
-              </a:rPr>
-              <a:t>2–4 tháng</a:t>
-            </a:r>
-            <a:endParaRPr lang="en-US" sz="1500" dirty="0"/>
+              <a:t>Phân quyền và ghi vết</a:t>
+            </a:r>
+            <a:endParaRPr lang="en-US" sz="1800" dirty="0"/>
           </a:p>
         </p:txBody>
       </p:sp>
@@ -11337,8 +13293,8 @@
         </p:nvSpPr>
         <p:spPr>
           <a:xfrm>
-            <a:off x="6507328" y="5212080"/>
-            <a:ext cx="2156384" cy="640080"/>
+            <a:off x="7467448" y="4297680"/>
+            <a:ext cx="3855568" cy="868680"/>
           </a:xfrm>
           <a:prstGeom prst="rect">
             <a:avLst/>
@@ -11352,12 +13308,12 @@
           <a:p>
             <a:pPr indent="0" marL="0">
               <a:lnSpc>
-                <a:spcPts val="1700"/>
+                <a:spcPts val="1900"/>
               </a:lnSpc>
               <a:buNone/>
             </a:pPr>
             <a:r>
-              <a:rPr lang="en-US" sz="1250" dirty="0">
+              <a:rPr lang="en-US" sz="1350" dirty="0">
                 <a:solidFill>
                   <a:srgbClr val="A9BCD6"/>
                 </a:solidFill>
@@ -11365,135 +13321,54 @@
                 <a:ea typeface="Arial" pitchFamily="34" charset="-122"/>
                 <a:cs typeface="Arial" pitchFamily="34" charset="-120"/>
               </a:rPr>
-              <a:t>Mở rộng theo khoa, đào tạo người dùng nòng cốt</a:t>
-            </a:r>
-            <a:endParaRPr lang="en-US" sz="1250" dirty="0"/>
-          </a:p>
-        </p:txBody>
-      </p:sp>
-      <p:sp>
-        <p:nvSpPr>
-          <p:cNvPr id="24" name="Shape 22"/>
-          <p:cNvSpPr/>
-          <p:nvPr/>
-        </p:nvSpPr>
-        <p:spPr>
-          <a:xfrm>
-            <a:off x="8892311" y="4572000"/>
-            <a:ext cx="2659304" cy="548640"/>
-          </a:xfrm>
-          <a:prstGeom prst="chevron">
-            <a:avLst/>
-          </a:prstGeom>
-          <a:solidFill>
-            <a:srgbClr val="1F6B45"/>
-          </a:solidFill>
-          <a:ln w="12700">
-            <a:solidFill>
-              <a:srgbClr val="0B1A30"/>
-            </a:solidFill>
-            <a:prstDash val="solid"/>
-          </a:ln>
-        </p:spPr>
-      </p:sp>
-      <p:sp>
-        <p:nvSpPr>
-          <p:cNvPr id="25" name="Text 23"/>
-          <p:cNvSpPr txBox="1"/>
-          <p:nvPr/>
-        </p:nvSpPr>
-        <p:spPr>
-          <a:xfrm>
-            <a:off x="9258071" y="4572000"/>
-            <a:ext cx="2202104" cy="548640"/>
-          </a:xfrm>
-          <a:prstGeom prst="rect">
-            <a:avLst/>
-          </a:prstGeom>
-          <a:noFill/>
-          <a:ln/>
-        </p:spPr>
-        <p:txBody>
-          <a:bodyPr wrap="square" lIns="0" tIns="0" rIns="0" bIns="0" rtlCol="0" anchor="ctr"/>
-          <a:lstStyle/>
-          <a:p>
-            <a:pPr indent="0" marL="0">
-              <a:buNone/>
-            </a:pPr>
-            <a:r>
-              <a:rPr lang="en-US" sz="1500" b="1" dirty="0">
-                <a:solidFill>
-                  <a:srgbClr val="FFFFFF"/>
-                </a:solidFill>
-                <a:latin typeface="Arial" pitchFamily="34" charset="0"/>
-                <a:ea typeface="Arial" pitchFamily="34" charset="-122"/>
-                <a:cs typeface="Arial" pitchFamily="34" charset="-120"/>
-              </a:rPr>
-              <a:t>Thường quy  </a:t>
-            </a:r>
-            <a:pPr indent="0" marL="0">
-              <a:buNone/>
-            </a:pPr>
-            <a:r>
-              <a:rPr lang="en-US" sz="1250" dirty="0">
-                <a:solidFill>
-                  <a:srgbClr val="4ADE80"/>
-                </a:solidFill>
-                <a:latin typeface="Arial" pitchFamily="34" charset="0"/>
-                <a:ea typeface="Arial" pitchFamily="34" charset="-122"/>
-                <a:cs typeface="Arial" pitchFamily="34" charset="-120"/>
-              </a:rPr>
-              <a:t>sau ổn định</a:t>
-            </a:r>
-            <a:endParaRPr lang="en-US" sz="1500" dirty="0"/>
-          </a:p>
-        </p:txBody>
-      </p:sp>
-      <p:sp>
-        <p:nvSpPr>
-          <p:cNvPr id="26" name="Text 24"/>
-          <p:cNvSpPr txBox="1"/>
-          <p:nvPr/>
-        </p:nvSpPr>
-        <p:spPr>
-          <a:xfrm>
-            <a:off x="9258071" y="5212080"/>
-            <a:ext cx="2156384" cy="640080"/>
-          </a:xfrm>
-          <a:prstGeom prst="rect">
-            <a:avLst/>
-          </a:prstGeom>
-          <a:noFill/>
-          <a:ln/>
-        </p:spPr>
-        <p:txBody>
-          <a:bodyPr wrap="square" lIns="0" tIns="0" rIns="0" bIns="0" rtlCol="0" anchor="t"/>
-          <a:lstStyle/>
-          <a:p>
-            <a:pPr indent="0" marL="0">
-              <a:lnSpc>
-                <a:spcPts val="1700"/>
-              </a:lnSpc>
-              <a:buNone/>
-            </a:pPr>
-            <a:r>
-              <a:rPr lang="en-US" sz="1250" dirty="0">
-                <a:solidFill>
-                  <a:srgbClr val="A9BCD6"/>
-                </a:solidFill>
-                <a:latin typeface="Arial" pitchFamily="34" charset="0"/>
-                <a:ea typeface="Arial" pitchFamily="34" charset="-122"/>
-                <a:cs typeface="Arial" pitchFamily="34" charset="-120"/>
-              </a:rPr>
-              <a:t>Bật tự gửi cổng, đưa vào quy chế</a:t>
-            </a:r>
-            <a:endParaRPr lang="en-US" sz="1250" dirty="0"/>
-          </a:p>
-        </p:txBody>
-      </p:sp>
-      <p:sp>
-        <p:nvSpPr>
-          <p:cNvPr id="28" name="Text 25"/>
+              <a:t>Mỗi người chỉ thấy chức năng được cấp; ghi lại ai nạp, ai gửi hồ sơ, ai tra cứu thẻ.</a:t>
+            </a:r>
+            <a:endParaRPr lang="en-US" sz="1350" dirty="0"/>
+          </a:p>
+        </p:txBody>
+      </p:sp>
+      <p:sp>
+        <p:nvSpPr>
+          <p:cNvPr id="24" name="Text 22"/>
+          <p:cNvSpPr txBox="1"/>
+          <p:nvPr/>
+        </p:nvSpPr>
+        <p:spPr>
+          <a:xfrm>
+            <a:off x="640080" y="5623560"/>
+            <a:ext cx="10911535" cy="384048"/>
+          </a:xfrm>
+          <a:prstGeom prst="rect">
+            <a:avLst/>
+          </a:prstGeom>
+          <a:noFill/>
+          <a:ln/>
+        </p:spPr>
+        <p:txBody>
+          <a:bodyPr wrap="square" lIns="0" tIns="0" rIns="0" bIns="0" rtlCol="0" anchor="ctr"/>
+          <a:lstStyle/>
+          <a:p>
+            <a:pPr algn="ctr" indent="0" marL="0">
+              <a:buNone/>
+            </a:pPr>
+            <a:r>
+              <a:rPr lang="en-US" sz="1600" dirty="0">
+                <a:solidFill>
+                  <a:srgbClr val="FBBF24"/>
+                </a:solidFill>
+                <a:latin typeface="Arial" pitchFamily="34" charset="0"/>
+                <a:ea typeface="Arial" pitchFamily="34" charset="-122"/>
+                <a:cs typeface="Arial" pitchFamily="34" charset="-120"/>
+              </a:rPr>
+              <a:t>Dữ liệu người bệnh ở lại trong bệnh viện</a:t>
+            </a:r>
+            <a:endParaRPr lang="en-US" sz="1600" dirty="0"/>
+          </a:p>
+        </p:txBody>
+      </p:sp>
+      <p:sp>
+        <p:nvSpPr>
+          <p:cNvPr id="26" name="Text 23"/>
           <p:cNvSpPr txBox="1"/>
           <p:nvPr/>
         </p:nvSpPr>
@@ -11524,7 +13399,7 @@
                 <a:ea typeface="Arial" pitchFamily="34" charset="-122"/>
                 <a:cs typeface="Arial" pitchFamily="34" charset="-120"/>
               </a:rPr>
-              <a:t>GIẢI PHÁP TIỀN GIÁM ĐỊNH  ·  08 / 10</a:t>
+              <a:t>GIẢI PHÁP TIỀN GIÁM ĐỊNH  ·  08 / 12</a:t>
             </a:r>
             <a:endParaRPr lang="en-US" sz="950" dirty="0"/>
           </a:p>
@@ -11602,7 +13477,7 @@
                 <a:ea typeface="Arial" pitchFamily="34" charset="-122"/>
                 <a:cs typeface="Arial" pitchFamily="34" charset="-120"/>
               </a:rPr>
-              <a:t>ĐỀ XUẤT</a:t>
+              <a:t>TRIỂN KHAI</a:t>
             </a:r>
             <a:endParaRPr lang="en-US" sz="1200" dirty="0"/>
           </a:p>
@@ -11641,7 +13516,7 @@
                 <a:ea typeface="Arial" pitchFamily="34" charset="-122"/>
                 <a:cs typeface="Arial" pitchFamily="34" charset="-120"/>
               </a:rPr>
-              <a:t>Thí điểm 4–8 tuần, đo bằng số liệu của chính viện</a:t>
+              <a:t>Điều kiện và lộ trình triển khai tại bệnh viện</a:t>
             </a:r>
             <a:endParaRPr lang="en-US" sz="2800" dirty="0"/>
           </a:p>
@@ -11656,11 +13531,11 @@
         <p:spPr>
           <a:xfrm>
             <a:off x="640080" y="1508760"/>
-            <a:ext cx="6309360" cy="841248"/>
+            <a:ext cx="4846320" cy="1325880"/>
           </a:xfrm>
           <a:prstGeom prst="roundRect">
             <a:avLst>
-              <a:gd name="adj" fmla="val 10870"/>
+              <a:gd name="adj" fmla="val 6897"/>
             </a:avLst>
           </a:prstGeom>
           <a:solidFill>
@@ -11684,8 +13559,47 @@
         </p:nvSpPr>
         <p:spPr>
           <a:xfrm>
-            <a:off x="914400" y="1508760"/>
-            <a:ext cx="1737360" cy="841248"/>
+            <a:off x="822960" y="1691640"/>
+            <a:ext cx="457200" cy="457200"/>
+          </a:xfrm>
+          <a:prstGeom prst="rect">
+            <a:avLst/>
+          </a:prstGeom>
+          <a:noFill/>
+          <a:ln/>
+        </p:spPr>
+        <p:txBody>
+          <a:bodyPr wrap="square" lIns="0" tIns="0" rIns="0" bIns="0" rtlCol="0" anchor="ctr"/>
+          <a:lstStyle/>
+          <a:p>
+            <a:pPr algn="ctr" indent="0" marL="0">
+              <a:buNone/>
+            </a:pPr>
+            <a:r>
+              <a:rPr lang="en-US" sz="2000" dirty="0">
+                <a:solidFill>
+                  <a:srgbClr val="000000"/>
+                </a:solidFill>
+                <a:latin typeface="Segoe UI Emoji" pitchFamily="34" charset="0"/>
+                <a:ea typeface="Segoe UI Emoji" pitchFamily="34" charset="-122"/>
+                <a:cs typeface="Segoe UI Emoji" pitchFamily="34" charset="-120"/>
+              </a:rPr>
+              <a:t>🔌</a:t>
+            </a:r>
+            <a:endParaRPr lang="en-US" sz="2000" dirty="0"/>
+          </a:p>
+        </p:txBody>
+      </p:sp>
+      <p:sp>
+        <p:nvSpPr>
+          <p:cNvPr id="6" name="Text 4"/>
+          <p:cNvSpPr txBox="1"/>
+          <p:nvPr/>
+        </p:nvSpPr>
+        <p:spPr>
+          <a:xfrm>
+            <a:off x="1417320" y="1691640"/>
+            <a:ext cx="3886200" cy="457200"/>
           </a:xfrm>
           <a:prstGeom prst="rect">
             <a:avLst/>
@@ -11701,76 +13615,225 @@
               <a:buNone/>
             </a:pPr>
             <a:r>
-              <a:rPr lang="en-US" sz="1100" b="1" spc="100" kern="0" dirty="0">
-                <a:solidFill>
-                  <a:srgbClr val="38BDF8"/>
-                </a:solidFill>
-                <a:latin typeface="Arial" pitchFamily="34" charset="0"/>
-                <a:ea typeface="Arial" pitchFamily="34" charset="-122"/>
-                <a:cs typeface="Arial" pitchFamily="34" charset="-120"/>
-              </a:rPr>
-              <a:t>PHẠM VI</a:t>
-            </a:r>
-            <a:endParaRPr lang="en-US" sz="1100" dirty="0"/>
-          </a:p>
-        </p:txBody>
-      </p:sp>
-      <p:sp>
-        <p:nvSpPr>
-          <p:cNvPr id="6" name="Text 4"/>
-          <p:cNvSpPr txBox="1"/>
-          <p:nvPr/>
-        </p:nvSpPr>
-        <p:spPr>
-          <a:xfrm>
-            <a:off x="2697480" y="1508760"/>
-            <a:ext cx="4023360" cy="841248"/>
-          </a:xfrm>
-          <a:prstGeom prst="rect">
-            <a:avLst/>
-          </a:prstGeom>
-          <a:noFill/>
-          <a:ln/>
-        </p:spPr>
-        <p:txBody>
-          <a:bodyPr wrap="square" lIns="0" tIns="0" rIns="0" bIns="0" rtlCol="0" anchor="ctr"/>
+              <a:rPr lang="en-US" sz="1600" b="1" dirty="0">
+                <a:solidFill>
+                  <a:srgbClr val="FFFFFF"/>
+                </a:solidFill>
+                <a:latin typeface="Arial" pitchFamily="34" charset="0"/>
+                <a:ea typeface="Arial" pitchFamily="34" charset="-122"/>
+                <a:cs typeface="Arial" pitchFamily="34" charset="-120"/>
+              </a:rPr>
+              <a:t>Dùng được với mọi HIS</a:t>
+            </a:r>
+            <a:endParaRPr lang="en-US" sz="1600" dirty="0"/>
+          </a:p>
+        </p:txBody>
+      </p:sp>
+      <p:sp>
+        <p:nvSpPr>
+          <p:cNvPr id="7" name="Text 5"/>
+          <p:cNvSpPr txBox="1"/>
+          <p:nvPr/>
+        </p:nvSpPr>
+        <p:spPr>
+          <a:xfrm>
+            <a:off x="914400" y="2194560"/>
+            <a:ext cx="4343400" cy="594360"/>
+          </a:xfrm>
+          <a:prstGeom prst="rect">
+            <a:avLst/>
+          </a:prstGeom>
+          <a:noFill/>
+          <a:ln/>
+        </p:spPr>
+        <p:txBody>
+          <a:bodyPr wrap="square" lIns="0" tIns="0" rIns="0" bIns="0" rtlCol="0" anchor="t"/>
           <a:lstStyle/>
           <a:p>
             <a:pPr indent="0" marL="0">
               <a:lnSpc>
-                <a:spcPts val="1900"/>
+                <a:spcPts val="1700"/>
               </a:lnSpc>
               <a:buNone/>
             </a:pPr>
             <a:r>
-              <a:rPr lang="en-US" sz="1400" dirty="0">
-                <a:solidFill>
-                  <a:srgbClr val="FFFFFF"/>
-                </a:solidFill>
-                <a:latin typeface="Arial" pitchFamily="34" charset="0"/>
-                <a:ea typeface="Arial" pitchFamily="34" charset="-122"/>
-                <a:cs typeface="Arial" pitchFamily="34" charset="-120"/>
-              </a:rPr>
-              <a:t>Kiểm hồ sơ XML 3176 chạy song song quy trình hiện tại; chưa bật tự gửi cổng.</a:t>
-            </a:r>
-            <a:endParaRPr lang="en-US" sz="1400" dirty="0"/>
-          </a:p>
-        </p:txBody>
-      </p:sp>
-      <p:sp>
-        <p:nvSpPr>
-          <p:cNvPr id="7" name="Shape 5"/>
+              <a:rPr lang="en-US" sz="1250" dirty="0">
+                <a:solidFill>
+                  <a:srgbClr val="A9BCD6"/>
+                </a:solidFill>
+                <a:latin typeface="Arial" pitchFamily="34" charset="0"/>
+                <a:ea typeface="Arial" pitchFamily="34" charset="-122"/>
+                <a:cs typeface="Arial" pitchFamily="34" charset="-120"/>
+              </a:rPr>
+              <a:t>Hồ sơ XML 3176 — nhận tệp XML chuẩn theo Quyết định 3176, không phụ thuộc phần mềm HIS</a:t>
+            </a:r>
+            <a:endParaRPr lang="en-US" sz="1250" dirty="0"/>
+          </a:p>
+        </p:txBody>
+      </p:sp>
+      <p:sp>
+        <p:nvSpPr>
+          <p:cNvPr id="8" name="Shape 6"/>
           <p:cNvSpPr/>
           <p:nvPr/>
         </p:nvSpPr>
         <p:spPr>
           <a:xfrm>
-            <a:off x="640080" y="2478024"/>
-            <a:ext cx="6309360" cy="841248"/>
+            <a:off x="640080" y="2990088"/>
+            <a:ext cx="4846320" cy="1325880"/>
           </a:xfrm>
           <a:prstGeom prst="roundRect">
             <a:avLst>
-              <a:gd name="adj" fmla="val 10870"/>
+              <a:gd name="adj" fmla="val 6897"/>
+            </a:avLst>
+          </a:prstGeom>
+          <a:solidFill>
+            <a:srgbClr val="25324A">
+              <a:alpha val="85000"/>
+            </a:srgbClr>
+          </a:solidFill>
+          <a:ln w="19050">
+            <a:solidFill>
+              <a:srgbClr val="FBBF24"/>
+            </a:solidFill>
+            <a:prstDash val="solid"/>
+          </a:ln>
+        </p:spPr>
+      </p:sp>
+      <p:sp>
+        <p:nvSpPr>
+          <p:cNvPr id="9" name="Text 7"/>
+          <p:cNvSpPr txBox="1"/>
+          <p:nvPr/>
+        </p:nvSpPr>
+        <p:spPr>
+          <a:xfrm>
+            <a:off x="822960" y="3172968"/>
+            <a:ext cx="457200" cy="457200"/>
+          </a:xfrm>
+          <a:prstGeom prst="rect">
+            <a:avLst/>
+          </a:prstGeom>
+          <a:noFill/>
+          <a:ln/>
+        </p:spPr>
+        <p:txBody>
+          <a:bodyPr wrap="square" lIns="0" tIns="0" rIns="0" bIns="0" rtlCol="0" anchor="ctr"/>
+          <a:lstStyle/>
+          <a:p>
+            <a:pPr algn="ctr" indent="0" marL="0">
+              <a:buNone/>
+            </a:pPr>
+            <a:r>
+              <a:rPr lang="en-US" sz="2000" dirty="0">
+                <a:solidFill>
+                  <a:srgbClr val="000000"/>
+                </a:solidFill>
+                <a:latin typeface="Segoe UI Emoji" pitchFamily="34" charset="0"/>
+                <a:ea typeface="Segoe UI Emoji" pitchFamily="34" charset="-122"/>
+                <a:cs typeface="Segoe UI Emoji" pitchFamily="34" charset="-120"/>
+              </a:rPr>
+              <a:t>🧩</a:t>
+            </a:r>
+            <a:endParaRPr lang="en-US" sz="2000" dirty="0"/>
+          </a:p>
+        </p:txBody>
+      </p:sp>
+      <p:sp>
+        <p:nvSpPr>
+          <p:cNvPr id="10" name="Text 8"/>
+          <p:cNvSpPr txBox="1"/>
+          <p:nvPr/>
+        </p:nvSpPr>
+        <p:spPr>
+          <a:xfrm>
+            <a:off x="1417320" y="3172968"/>
+            <a:ext cx="3886200" cy="457200"/>
+          </a:xfrm>
+          <a:prstGeom prst="rect">
+            <a:avLst/>
+          </a:prstGeom>
+          <a:noFill/>
+          <a:ln/>
+        </p:spPr>
+        <p:txBody>
+          <a:bodyPr wrap="square" lIns="0" tIns="0" rIns="0" bIns="0" rtlCol="0" anchor="ctr"/>
+          <a:lstStyle/>
+          <a:p>
+            <a:pPr indent="0" marL="0">
+              <a:buNone/>
+            </a:pPr>
+            <a:r>
+              <a:rPr lang="en-US" sz="1600" b="1" dirty="0">
+                <a:solidFill>
+                  <a:srgbClr val="FBBF24"/>
+                </a:solidFill>
+                <a:latin typeface="Arial" pitchFamily="34" charset="0"/>
+                <a:ea typeface="Arial" pitchFamily="34" charset="-122"/>
+                <a:cs typeface="Arial" pitchFamily="34" charset="-120"/>
+              </a:rPr>
+              <a:t>Cần kết nối riêng với HIS của viện</a:t>
+            </a:r>
+            <a:endParaRPr lang="en-US" sz="1600" dirty="0"/>
+          </a:p>
+        </p:txBody>
+      </p:sp>
+      <p:sp>
+        <p:nvSpPr>
+          <p:cNvPr id="11" name="Text 9"/>
+          <p:cNvSpPr txBox="1"/>
+          <p:nvPr/>
+        </p:nvSpPr>
+        <p:spPr>
+          <a:xfrm>
+            <a:off x="914400" y="3675888"/>
+            <a:ext cx="4343400" cy="594360"/>
+          </a:xfrm>
+          <a:prstGeom prst="rect">
+            <a:avLst/>
+          </a:prstGeom>
+          <a:noFill/>
+          <a:ln/>
+        </p:spPr>
+        <p:txBody>
+          <a:bodyPr wrap="square" lIns="0" tIns="0" rIns="0" bIns="0" rtlCol="0" anchor="t"/>
+          <a:lstStyle/>
+          <a:p>
+            <a:pPr indent="0" marL="0">
+              <a:lnSpc>
+                <a:spcPts val="1700"/>
+              </a:lnSpc>
+              <a:buNone/>
+            </a:pPr>
+            <a:r>
+              <a:rPr lang="en-US" sz="1250" dirty="0">
+                <a:solidFill>
+                  <a:srgbClr val="A9BCD6"/>
+                </a:solidFill>
+                <a:latin typeface="Arial" pitchFamily="34" charset="0"/>
+                <a:ea typeface="Arial" pitchFamily="34" charset="-122"/>
+                <a:cs typeface="Arial" pitchFamily="34" charset="-120"/>
+              </a:rPr>
+              <a:t>Kiểm sai sót y lệnh — đọc trực tiếp CSDL HIS (chỉ đọc); viện dùng HIS khác cần làm lớp kết nối riêng</a:t>
+            </a:r>
+            <a:endParaRPr lang="en-US" sz="1250" dirty="0"/>
+          </a:p>
+        </p:txBody>
+      </p:sp>
+      <p:sp>
+        <p:nvSpPr>
+          <p:cNvPr id="12" name="Shape 10"/>
+          <p:cNvSpPr/>
+          <p:nvPr/>
+        </p:nvSpPr>
+        <p:spPr>
+          <a:xfrm>
+            <a:off x="5806440" y="1508760"/>
+            <a:ext cx="5745175" cy="2807208"/>
+          </a:xfrm>
+          <a:prstGeom prst="roundRect">
+            <a:avLst>
+              <a:gd name="adj" fmla="val 3257"/>
             </a:avLst>
           </a:prstGeom>
           <a:solidFill>
@@ -11788,14 +13851,14 @@
       </p:sp>
       <p:sp>
         <p:nvSpPr>
-          <p:cNvPr id="8" name="Text 6"/>
-          <p:cNvSpPr txBox="1"/>
-          <p:nvPr/>
-        </p:nvSpPr>
-        <p:spPr>
-          <a:xfrm>
-            <a:off x="914400" y="2478024"/>
-            <a:ext cx="1737360" cy="841248"/>
+          <p:cNvPr id="13" name="Text 11"/>
+          <p:cNvSpPr txBox="1"/>
+          <p:nvPr/>
+        </p:nvSpPr>
+        <p:spPr>
+          <a:xfrm>
+            <a:off x="6080760" y="1691640"/>
+            <a:ext cx="5196535" cy="292608"/>
           </a:xfrm>
           <a:prstGeom prst="rect">
             <a:avLst/>
@@ -11811,7 +13874,7 @@
               <a:buNone/>
             </a:pPr>
             <a:r>
-              <a:rPr lang="en-US" sz="1100" b="1" spc="100" kern="0" dirty="0">
+              <a:rPr lang="en-US" sz="1200" b="1" spc="200" kern="0" dirty="0">
                 <a:solidFill>
                   <a:srgbClr val="38BDF8"/>
                 </a:solidFill>
@@ -11819,41 +13882,45 @@
                 <a:ea typeface="Arial" pitchFamily="34" charset="-122"/>
                 <a:cs typeface="Arial" pitchFamily="34" charset="-120"/>
               </a:rPr>
-              <a:t>VIỆN CỬ</a:t>
-            </a:r>
-            <a:endParaRPr lang="en-US" sz="1100" dirty="0"/>
-          </a:p>
-        </p:txBody>
-      </p:sp>
-      <p:sp>
-        <p:nvSpPr>
-          <p:cNvPr id="9" name="Text 7"/>
-          <p:cNvSpPr txBox="1"/>
-          <p:nvPr/>
-        </p:nvSpPr>
-        <p:spPr>
-          <a:xfrm>
-            <a:off x="2697480" y="2478024"/>
-            <a:ext cx="4023360" cy="841248"/>
-          </a:xfrm>
-          <a:prstGeom prst="rect">
-            <a:avLst/>
-          </a:prstGeom>
-          <a:noFill/>
-          <a:ln/>
-        </p:spPr>
-        <p:txBody>
-          <a:bodyPr wrap="square" lIns="0" tIns="0" rIns="0" bIns="0" rtlCol="0" anchor="ctr"/>
-          <a:lstStyle/>
-          <a:p>
-            <a:pPr indent="0" marL="0">
+              <a:t>VIỆN CẦN CHUẨN BỊ</a:t>
+            </a:r>
+            <a:endParaRPr lang="en-US" sz="1200" dirty="0"/>
+          </a:p>
+        </p:txBody>
+      </p:sp>
+      <p:sp>
+        <p:nvSpPr>
+          <p:cNvPr id="14" name="Text 12"/>
+          <p:cNvSpPr txBox="1"/>
+          <p:nvPr/>
+        </p:nvSpPr>
+        <p:spPr>
+          <a:xfrm>
+            <a:off x="6080760" y="2075688"/>
+            <a:ext cx="5196535" cy="2148840"/>
+          </a:xfrm>
+          <a:prstGeom prst="rect">
+            <a:avLst/>
+          </a:prstGeom>
+          <a:noFill/>
+          <a:ln/>
+        </p:spPr>
+        <p:txBody>
+          <a:bodyPr wrap="square" lIns="0" tIns="0" rIns="0" bIns="0" rtlCol="0" anchor="t"/>
+          <a:lstStyle/>
+          <a:p>
+            <a:pPr marL="203200" indent="-203200">
               <a:lnSpc>
-                <a:spcPts val="1900"/>
+                <a:spcPts val="1800"/>
               </a:lnSpc>
-              <a:buNone/>
-            </a:pPr>
-            <a:r>
-              <a:rPr lang="en-US" sz="1400" dirty="0">
+              <a:spcAft>
+                <a:spcPts val="500"/>
+              </a:spcAft>
+              <a:buSzPct val="100000"/>
+              <a:buChar char="•"/>
+            </a:pPr>
+            <a:r>
+              <a:rPr lang="en-US" sz="1350" dirty="0">
                 <a:solidFill>
                   <a:srgbClr val="FFFFFF"/>
                 </a:solidFill>
@@ -11861,36 +13928,152 @@
                 <a:ea typeface="Arial" pitchFamily="34" charset="-122"/>
                 <a:cs typeface="Arial" pitchFamily="34" charset="-120"/>
               </a:rPr>
-              <a:t>1 đầu mối phòng KHTH  ·  1 người phụ trách danh mục BHYT  ·  1 cán bộ CNTT</a:t>
-            </a:r>
-            <a:endParaRPr lang="en-US" sz="1400" dirty="0"/>
-          </a:p>
-        </p:txBody>
-      </p:sp>
-      <p:sp>
-        <p:nvSpPr>
-          <p:cNvPr id="10" name="Shape 8"/>
+              <a:t>Máy chủ: Windows Server, hoặc Linux / Docker</a:t>
+            </a:r>
+            <a:endParaRPr lang="en-US" sz="1350" dirty="0"/>
+          </a:p>
+          <a:p>
+            <a:pPr marL="203200" indent="-203200">
+              <a:lnSpc>
+                <a:spcPts val="1800"/>
+              </a:lnSpc>
+              <a:spcAft>
+                <a:spcPts val="500"/>
+              </a:spcAft>
+              <a:buSzPct val="100000"/>
+              <a:buChar char="•"/>
+            </a:pPr>
+            <a:r>
+              <a:rPr lang="en-US" sz="1350" dirty="0">
+                <a:solidFill>
+                  <a:srgbClr val="FFFFFF"/>
+                </a:solidFill>
+                <a:latin typeface="Arial" pitchFamily="34" charset="0"/>
+                <a:ea typeface="Arial" pitchFamily="34" charset="-122"/>
+                <a:cs typeface="Arial" pitchFamily="34" charset="-120"/>
+              </a:rPr>
+              <a:t>Tài khoản chỉ đọc vào cơ sở dữ liệu HIS</a:t>
+            </a:r>
+            <a:endParaRPr lang="en-US" sz="1350" dirty="0"/>
+          </a:p>
+          <a:p>
+            <a:pPr marL="203200" indent="-203200">
+              <a:lnSpc>
+                <a:spcPts val="1800"/>
+              </a:lnSpc>
+              <a:spcAft>
+                <a:spcPts val="500"/>
+              </a:spcAft>
+              <a:buSzPct val="100000"/>
+              <a:buChar char="•"/>
+            </a:pPr>
+            <a:r>
+              <a:rPr lang="en-US" sz="1350" dirty="0">
+                <a:solidFill>
+                  <a:srgbClr val="FFFFFF"/>
+                </a:solidFill>
+                <a:latin typeface="Arial" pitchFamily="34" charset="0"/>
+                <a:ea typeface="Arial" pitchFamily="34" charset="-122"/>
+                <a:cs typeface="Arial" pitchFamily="34" charset="-120"/>
+              </a:rPr>
+              <a:t>Thư mục nhận tệp XML do HIS xuất ra</a:t>
+            </a:r>
+            <a:endParaRPr lang="en-US" sz="1350" dirty="0"/>
+          </a:p>
+          <a:p>
+            <a:pPr marL="203200" indent="-203200">
+              <a:lnSpc>
+                <a:spcPts val="1800"/>
+              </a:lnSpc>
+              <a:spcAft>
+                <a:spcPts val="500"/>
+              </a:spcAft>
+              <a:buSzPct val="100000"/>
+              <a:buChar char="•"/>
+            </a:pPr>
+            <a:r>
+              <a:rPr lang="en-US" sz="1350" dirty="0">
+                <a:solidFill>
+                  <a:srgbClr val="FFFFFF"/>
+                </a:solidFill>
+                <a:latin typeface="Arial" pitchFamily="34" charset="0"/>
+                <a:ea typeface="Arial" pitchFamily="34" charset="-122"/>
+                <a:cs typeface="Arial" pitchFamily="34" charset="-120"/>
+              </a:rPr>
+              <a:t>HSM hoặc USB Token để ký số</a:t>
+            </a:r>
+            <a:endParaRPr lang="en-US" sz="1350" dirty="0"/>
+          </a:p>
+          <a:p>
+            <a:pPr marL="203200" indent="-203200">
+              <a:lnSpc>
+                <a:spcPts val="1800"/>
+              </a:lnSpc>
+              <a:spcAft>
+                <a:spcPts val="500"/>
+              </a:spcAft>
+              <a:buSzPct val="100000"/>
+              <a:buChar char="•"/>
+            </a:pPr>
+            <a:r>
+              <a:rPr lang="en-US" sz="1350" dirty="0">
+                <a:solidFill>
+                  <a:srgbClr val="FFFFFF"/>
+                </a:solidFill>
+                <a:latin typeface="Arial" pitchFamily="34" charset="0"/>
+                <a:ea typeface="Arial" pitchFamily="34" charset="-122"/>
+                <a:cs typeface="Arial" pitchFamily="34" charset="-120"/>
+              </a:rPr>
+              <a:t>Tài khoản Cổng giám định BHXH và mã cơ sở KCB</a:t>
+            </a:r>
+            <a:endParaRPr lang="en-US" sz="1350" dirty="0"/>
+          </a:p>
+          <a:p>
+            <a:pPr marL="203200" indent="-203200">
+              <a:lnSpc>
+                <a:spcPts val="1800"/>
+              </a:lnSpc>
+              <a:spcAft>
+                <a:spcPts val="500"/>
+              </a:spcAft>
+              <a:buSzPct val="100000"/>
+              <a:buChar char="•"/>
+            </a:pPr>
+            <a:r>
+              <a:rPr lang="en-US" sz="1350" dirty="0">
+                <a:solidFill>
+                  <a:srgbClr val="FFFFFF"/>
+                </a:solidFill>
+                <a:latin typeface="Arial" pitchFamily="34" charset="0"/>
+                <a:ea typeface="Arial" pitchFamily="34" charset="-122"/>
+                <a:cs typeface="Arial" pitchFamily="34" charset="-120"/>
+              </a:rPr>
+              <a:t>Người phụ trách danh mục BHYT của viện</a:t>
+            </a:r>
+            <a:endParaRPr lang="en-US" sz="1350" dirty="0"/>
+          </a:p>
+        </p:txBody>
+      </p:sp>
+      <p:sp>
+        <p:nvSpPr>
+          <p:cNvPr id="15" name="Shape 13"/>
           <p:cNvSpPr/>
           <p:nvPr/>
         </p:nvSpPr>
         <p:spPr>
           <a:xfrm>
-            <a:off x="640080" y="3447288"/>
-            <a:ext cx="6309360" cy="841248"/>
-          </a:xfrm>
-          <a:prstGeom prst="roundRect">
-            <a:avLst>
-              <a:gd name="adj" fmla="val 10870"/>
-            </a:avLst>
+            <a:off x="640080" y="4572000"/>
+            <a:ext cx="2769032" cy="548640"/>
+          </a:xfrm>
+          <a:prstGeom prst="homePlate">
+            <a:avLst/>
           </a:prstGeom>
           <a:solidFill>
-            <a:srgbClr val="1C3558">
-              <a:alpha val="85000"/>
-            </a:srgbClr>
+            <a:srgbClr val="1E4E86"/>
           </a:solidFill>
-          <a:ln w="9525">
+          <a:ln w="12700">
             <a:solidFill>
-              <a:srgbClr val="2E4B74"/>
+              <a:srgbClr val="0B1A30"/>
             </a:solidFill>
             <a:prstDash val="solid"/>
           </a:ln>
@@ -11898,14 +14081,14 @@
       </p:sp>
       <p:sp>
         <p:nvSpPr>
-          <p:cNvPr id="11" name="Text 9"/>
-          <p:cNvSpPr txBox="1"/>
-          <p:nvPr/>
-        </p:nvSpPr>
-        <p:spPr>
-          <a:xfrm>
-            <a:off x="914400" y="3447288"/>
-            <a:ext cx="1737360" cy="841248"/>
+          <p:cNvPr id="16" name="Text 14"/>
+          <p:cNvSpPr txBox="1"/>
+          <p:nvPr/>
+        </p:nvSpPr>
+        <p:spPr>
+          <a:xfrm>
+            <a:off x="841248" y="4572000"/>
+            <a:ext cx="2202104" cy="548640"/>
           </a:xfrm>
           <a:prstGeom prst="rect">
             <a:avLst/>
@@ -11921,7 +14104,21 @@
               <a:buNone/>
             </a:pPr>
             <a:r>
-              <a:rPr lang="en-US" sz="1100" b="1" spc="100" kern="0" dirty="0">
+              <a:rPr lang="en-US" sz="1500" b="1" dirty="0">
+                <a:solidFill>
+                  <a:srgbClr val="FFFFFF"/>
+                </a:solidFill>
+                <a:latin typeface="Arial" pitchFamily="34" charset="0"/>
+                <a:ea typeface="Arial" pitchFamily="34" charset="-122"/>
+                <a:cs typeface="Arial" pitchFamily="34" charset="-120"/>
+              </a:rPr>
+              <a:t>Chuẩn bị  </a:t>
+            </a:r>
+            <a:pPr indent="0" marL="0">
+              <a:buNone/>
+            </a:pPr>
+            <a:r>
+              <a:rPr lang="en-US" sz="1250" dirty="0">
                 <a:solidFill>
                   <a:srgbClr val="38BDF8"/>
                 </a:solidFill>
@@ -11929,78 +14126,74 @@
                 <a:ea typeface="Arial" pitchFamily="34" charset="-122"/>
                 <a:cs typeface="Arial" pitchFamily="34" charset="-120"/>
               </a:rPr>
-              <a:t>CHÚNG TÔI LÀM</a:t>
-            </a:r>
-            <a:endParaRPr lang="en-US" sz="1100" dirty="0"/>
-          </a:p>
-        </p:txBody>
-      </p:sp>
-      <p:sp>
-        <p:nvSpPr>
-          <p:cNvPr id="12" name="Text 10"/>
-          <p:cNvSpPr txBox="1"/>
-          <p:nvPr/>
-        </p:nvSpPr>
-        <p:spPr>
-          <a:xfrm>
-            <a:off x="2697480" y="3447288"/>
-            <a:ext cx="4023360" cy="841248"/>
-          </a:xfrm>
-          <a:prstGeom prst="rect">
-            <a:avLst/>
-          </a:prstGeom>
-          <a:noFill/>
-          <a:ln/>
-        </p:spPr>
-        <p:txBody>
-          <a:bodyPr wrap="square" lIns="0" tIns="0" rIns="0" bIns="0" rtlCol="0" anchor="ctr"/>
+              <a:t>2–4 tuần</a:t>
+            </a:r>
+            <a:endParaRPr lang="en-US" sz="1500" dirty="0"/>
+          </a:p>
+        </p:txBody>
+      </p:sp>
+      <p:sp>
+        <p:nvSpPr>
+          <p:cNvPr id="17" name="Text 15"/>
+          <p:cNvSpPr txBox="1"/>
+          <p:nvPr/>
+        </p:nvSpPr>
+        <p:spPr>
+          <a:xfrm>
+            <a:off x="841248" y="5212080"/>
+            <a:ext cx="2156384" cy="640080"/>
+          </a:xfrm>
+          <a:prstGeom prst="rect">
+            <a:avLst/>
+          </a:prstGeom>
+          <a:noFill/>
+          <a:ln/>
+        </p:spPr>
+        <p:txBody>
+          <a:bodyPr wrap="square" lIns="0" tIns="0" rIns="0" bIns="0" rtlCol="0" anchor="t"/>
           <a:lstStyle/>
           <a:p>
             <a:pPr indent="0" marL="0">
               <a:lnSpc>
-                <a:spcPts val="1900"/>
+                <a:spcPts val="1700"/>
               </a:lnSpc>
               <a:buNone/>
             </a:pPr>
             <a:r>
-              <a:rPr lang="en-US" sz="1400" dirty="0">
-                <a:solidFill>
-                  <a:srgbClr val="FFFFFF"/>
-                </a:solidFill>
-                <a:latin typeface="Arial" pitchFamily="34" charset="0"/>
-                <a:ea typeface="Arial" pitchFamily="34" charset="-122"/>
-                <a:cs typeface="Arial" pitchFamily="34" charset="-120"/>
-              </a:rPr>
-              <a:t>Cài đặt tại viện, nạp danh mục, đào tạo người dùng, theo dõi kết quả cùng viện.</a:t>
-            </a:r>
-            <a:endParaRPr lang="en-US" sz="1400" dirty="0"/>
-          </a:p>
-        </p:txBody>
-      </p:sp>
-      <p:sp>
-        <p:nvSpPr>
-          <p:cNvPr id="13" name="Shape 11"/>
+              <a:rPr lang="en-US" sz="1250" dirty="0">
+                <a:solidFill>
+                  <a:srgbClr val="A9BCD6"/>
+                </a:solidFill>
+                <a:latin typeface="Arial" pitchFamily="34" charset="0"/>
+                <a:ea typeface="Arial" pitchFamily="34" charset="-122"/>
+                <a:cs typeface="Arial" pitchFamily="34" charset="-120"/>
+              </a:rPr>
+              <a:t>Lập tổ, chốt chủ sở hữu danh mục, ban hành no-blame</a:t>
+            </a:r>
+            <a:endParaRPr lang="en-US" sz="1250" dirty="0"/>
+          </a:p>
+        </p:txBody>
+      </p:sp>
+      <p:sp>
+        <p:nvSpPr>
+          <p:cNvPr id="18" name="Shape 16"/>
           <p:cNvSpPr/>
           <p:nvPr/>
         </p:nvSpPr>
         <p:spPr>
           <a:xfrm>
-            <a:off x="640080" y="4416552"/>
-            <a:ext cx="6309360" cy="841248"/>
-          </a:xfrm>
-          <a:prstGeom prst="roundRect">
-            <a:avLst>
-              <a:gd name="adj" fmla="val 10870"/>
-            </a:avLst>
+            <a:off x="3390824" y="4572000"/>
+            <a:ext cx="2769032" cy="548640"/>
+          </a:xfrm>
+          <a:prstGeom prst="chevron">
+            <a:avLst/>
           </a:prstGeom>
           <a:solidFill>
-            <a:srgbClr val="1C3558">
-              <a:alpha val="85000"/>
-            </a:srgbClr>
+            <a:srgbClr val="1E4E86"/>
           </a:solidFill>
-          <a:ln w="9525">
+          <a:ln w="12700">
             <a:solidFill>
-              <a:srgbClr val="2E4B74"/>
+              <a:srgbClr val="0B1A30"/>
             </a:solidFill>
             <a:prstDash val="solid"/>
           </a:ln>
@@ -12008,14 +14201,14 @@
       </p:sp>
       <p:sp>
         <p:nvSpPr>
-          <p:cNvPr id="14" name="Text 12"/>
-          <p:cNvSpPr txBox="1"/>
-          <p:nvPr/>
-        </p:nvSpPr>
-        <p:spPr>
-          <a:xfrm>
-            <a:off x="914400" y="4416552"/>
-            <a:ext cx="1737360" cy="841248"/>
+          <p:cNvPr id="19" name="Text 17"/>
+          <p:cNvSpPr txBox="1"/>
+          <p:nvPr/>
+        </p:nvSpPr>
+        <p:spPr>
+          <a:xfrm>
+            <a:off x="3756584" y="4572000"/>
+            <a:ext cx="2202104" cy="548640"/>
           </a:xfrm>
           <a:prstGeom prst="rect">
             <a:avLst/>
@@ -12031,7 +14224,21 @@
               <a:buNone/>
             </a:pPr>
             <a:r>
-              <a:rPr lang="en-US" sz="1100" b="1" spc="100" kern="0" dirty="0">
+              <a:rPr lang="en-US" sz="1500" b="1" dirty="0">
+                <a:solidFill>
+                  <a:srgbClr val="FFFFFF"/>
+                </a:solidFill>
+                <a:latin typeface="Arial" pitchFamily="34" charset="0"/>
+                <a:ea typeface="Arial" pitchFamily="34" charset="-122"/>
+                <a:cs typeface="Arial" pitchFamily="34" charset="-120"/>
+              </a:rPr>
+              <a:t>Chạy thử  </a:t>
+            </a:r>
+            <a:pPr indent="0" marL="0">
+              <a:buNone/>
+            </a:pPr>
+            <a:r>
+              <a:rPr lang="en-US" sz="1250" dirty="0">
                 <a:solidFill>
                   <a:srgbClr val="38BDF8"/>
                 </a:solidFill>
@@ -12039,78 +14246,74 @@
                 <a:ea typeface="Arial" pitchFamily="34" charset="-122"/>
                 <a:cs typeface="Arial" pitchFamily="34" charset="-120"/>
               </a:rPr>
-              <a:t>CHI PHÍ</a:t>
-            </a:r>
-            <a:endParaRPr lang="en-US" sz="1100" dirty="0"/>
-          </a:p>
-        </p:txBody>
-      </p:sp>
-      <p:sp>
-        <p:nvSpPr>
-          <p:cNvPr id="15" name="Text 13"/>
-          <p:cNvSpPr txBox="1"/>
-          <p:nvPr/>
-        </p:nvSpPr>
-        <p:spPr>
-          <a:xfrm>
-            <a:off x="2697480" y="4416552"/>
-            <a:ext cx="4023360" cy="841248"/>
-          </a:xfrm>
-          <a:prstGeom prst="rect">
-            <a:avLst/>
-          </a:prstGeom>
-          <a:noFill/>
-          <a:ln/>
-        </p:spPr>
-        <p:txBody>
-          <a:bodyPr wrap="square" lIns="0" tIns="0" rIns="0" bIns="0" rtlCol="0" anchor="ctr"/>
+              <a:t>4–8 tuần</a:t>
+            </a:r>
+            <a:endParaRPr lang="en-US" sz="1500" dirty="0"/>
+          </a:p>
+        </p:txBody>
+      </p:sp>
+      <p:sp>
+        <p:nvSpPr>
+          <p:cNvPr id="20" name="Text 18"/>
+          <p:cNvSpPr txBox="1"/>
+          <p:nvPr/>
+        </p:nvSpPr>
+        <p:spPr>
+          <a:xfrm>
+            <a:off x="3756584" y="5212080"/>
+            <a:ext cx="2156384" cy="640080"/>
+          </a:xfrm>
+          <a:prstGeom prst="rect">
+            <a:avLst/>
+          </a:prstGeom>
+          <a:noFill/>
+          <a:ln/>
+        </p:spPr>
+        <p:txBody>
+          <a:bodyPr wrap="square" lIns="0" tIns="0" rIns="0" bIns="0" rtlCol="0" anchor="t"/>
           <a:lstStyle/>
           <a:p>
             <a:pPr indent="0" marL="0">
               <a:lnSpc>
-                <a:spcPts val="1900"/>
+                <a:spcPts val="1700"/>
               </a:lnSpc>
               <a:buNone/>
             </a:pPr>
             <a:r>
-              <a:rPr lang="en-US" sz="1400" dirty="0">
-                <a:solidFill>
-                  <a:srgbClr val="FFFFFF"/>
-                </a:solidFill>
-                <a:latin typeface="Arial" pitchFamily="34" charset="0"/>
-                <a:ea typeface="Arial" pitchFamily="34" charset="-122"/>
-                <a:cs typeface="Arial" pitchFamily="34" charset="-120"/>
-              </a:rPr>
-              <a:t>………………………………</a:t>
-            </a:r>
-            <a:endParaRPr lang="en-US" sz="1400" dirty="0"/>
-          </a:p>
-        </p:txBody>
-      </p:sp>
-      <p:sp>
-        <p:nvSpPr>
-          <p:cNvPr id="16" name="Shape 14"/>
+              <a:rPr lang="en-US" sz="1250" dirty="0">
+                <a:solidFill>
+                  <a:srgbClr val="A9BCD6"/>
+                </a:solidFill>
+                <a:latin typeface="Arial" pitchFamily="34" charset="0"/>
+                <a:ea typeface="Arial" pitchFamily="34" charset="-122"/>
+                <a:cs typeface="Arial" pitchFamily="34" charset="-120"/>
+              </a:rPr>
+              <a:t>1–2 khoa, chạy song song quy trình cũ</a:t>
+            </a:r>
+            <a:endParaRPr lang="en-US" sz="1250" dirty="0"/>
+          </a:p>
+        </p:txBody>
+      </p:sp>
+      <p:sp>
+        <p:nvSpPr>
+          <p:cNvPr id="21" name="Shape 19"/>
           <p:cNvSpPr/>
           <p:nvPr/>
         </p:nvSpPr>
         <p:spPr>
           <a:xfrm>
-            <a:off x="7223760" y="1508760"/>
-            <a:ext cx="4327855" cy="3749040"/>
-          </a:xfrm>
-          <a:prstGeom prst="roundRect">
-            <a:avLst>
-              <a:gd name="adj" fmla="val 2439"/>
-            </a:avLst>
+            <a:off x="6141568" y="4572000"/>
+            <a:ext cx="2769032" cy="548640"/>
+          </a:xfrm>
+          <a:prstGeom prst="chevron">
+            <a:avLst/>
           </a:prstGeom>
           <a:solidFill>
-            <a:srgbClr val="25324A">
-              <a:alpha val="85000"/>
-            </a:srgbClr>
+            <a:srgbClr val="1E4E86"/>
           </a:solidFill>
-          <a:ln w="19050">
+          <a:ln w="12700">
             <a:solidFill>
-              <a:srgbClr val="FBBF24"/>
+              <a:srgbClr val="0B1A30"/>
             </a:solidFill>
             <a:prstDash val="solid"/>
           </a:ln>
@@ -12118,14 +14321,14 @@
       </p:sp>
       <p:sp>
         <p:nvSpPr>
-          <p:cNvPr id="17" name="Text 15"/>
-          <p:cNvSpPr txBox="1"/>
-          <p:nvPr/>
-        </p:nvSpPr>
-        <p:spPr>
-          <a:xfrm>
-            <a:off x="7498080" y="1691640"/>
-            <a:ext cx="3779215" cy="310896"/>
+          <p:cNvPr id="22" name="Text 20"/>
+          <p:cNvSpPr txBox="1"/>
+          <p:nvPr/>
+        </p:nvSpPr>
+        <p:spPr>
+          <a:xfrm>
+            <a:off x="6507328" y="4572000"/>
+            <a:ext cx="2202104" cy="548640"/>
           </a:xfrm>
           <a:prstGeom prst="rect">
             <a:avLst/>
@@ -12141,53 +14344,7 @@
               <a:buNone/>
             </a:pPr>
             <a:r>
-              <a:rPr lang="en-US" sz="1200" b="1" spc="200" kern="0" dirty="0">
-                <a:solidFill>
-                  <a:srgbClr val="FBBF24"/>
-                </a:solidFill>
-                <a:latin typeface="Arial" pitchFamily="34" charset="0"/>
-                <a:ea typeface="Arial" pitchFamily="34" charset="-122"/>
-                <a:cs typeface="Arial" pitchFamily="34" charset="-120"/>
-              </a:rPr>
-              <a:t>ĐO GÌ ĐỂ QUYẾT ĐỊNH</a:t>
-            </a:r>
-            <a:endParaRPr lang="en-US" sz="1200" dirty="0"/>
-          </a:p>
-        </p:txBody>
-      </p:sp>
-      <p:sp>
-        <p:nvSpPr>
-          <p:cNvPr id="18" name="Text 16"/>
-          <p:cNvSpPr txBox="1"/>
-          <p:nvPr/>
-        </p:nvSpPr>
-        <p:spPr>
-          <a:xfrm>
-            <a:off x="7498080" y="2148840"/>
-            <a:ext cx="3779215" cy="2011680"/>
-          </a:xfrm>
-          <a:prstGeom prst="rect">
-            <a:avLst/>
-          </a:prstGeom>
-          <a:noFill/>
-          <a:ln/>
-        </p:spPr>
-        <p:txBody>
-          <a:bodyPr wrap="square" lIns="0" tIns="0" rIns="0" bIns="0" rtlCol="0" anchor="t"/>
-          <a:lstStyle/>
-          <a:p>
-            <a:pPr marL="203200" indent="-203200">
-              <a:lnSpc>
-                <a:spcPts val="2000"/>
-              </a:lnSpc>
-              <a:spcAft>
-                <a:spcPts val="1000"/>
-              </a:spcAft>
-              <a:buSzPct val="100000"/>
-              <a:buChar char="•"/>
-            </a:pPr>
-            <a:r>
-              <a:rPr lang="en-US" sz="1500" dirty="0">
+              <a:rPr lang="en-US" sz="1500" b="1" dirty="0">
                 <a:solidFill>
                   <a:srgbClr val="FFFFFF"/>
                 </a:solidFill>
@@ -12195,94 +14352,36 @@
                 <a:ea typeface="Arial" pitchFamily="34" charset="-122"/>
                 <a:cs typeface="Arial" pitchFamily="34" charset="-120"/>
               </a:rPr>
-              <a:t>Tỷ lệ hồ sơ còn lỗi nghiêm trọng trước khi gửi</a:t>
+              <a:t>Nhân rộng  </a:t>
+            </a:r>
+            <a:pPr indent="0" marL="0">
+              <a:buNone/>
+            </a:pPr>
+            <a:r>
+              <a:rPr lang="en-US" sz="1250" dirty="0">
+                <a:solidFill>
+                  <a:srgbClr val="38BDF8"/>
+                </a:solidFill>
+                <a:latin typeface="Arial" pitchFamily="34" charset="0"/>
+                <a:ea typeface="Arial" pitchFamily="34" charset="-122"/>
+                <a:cs typeface="Arial" pitchFamily="34" charset="-120"/>
+              </a:rPr>
+              <a:t>2–4 tháng</a:t>
             </a:r>
             <a:endParaRPr lang="en-US" sz="1500" dirty="0"/>
           </a:p>
-          <a:p>
-            <a:pPr marL="203200" indent="-203200">
-              <a:lnSpc>
-                <a:spcPts val="2000"/>
-              </a:lnSpc>
-              <a:spcAft>
-                <a:spcPts val="1000"/>
-              </a:spcAft>
-              <a:buSzPct val="100000"/>
-              <a:buChar char="•"/>
-            </a:pPr>
-            <a:r>
-              <a:rPr lang="en-US" sz="1500" dirty="0">
-                <a:solidFill>
-                  <a:srgbClr val="FFFFFF"/>
-                </a:solidFill>
-                <a:latin typeface="Arial" pitchFamily="34" charset="0"/>
-                <a:ea typeface="Arial" pitchFamily="34" charset="-122"/>
-                <a:cs typeface="Arial" pitchFamily="34" charset="-120"/>
-              </a:rPr>
-              <a:t>Số hồ sơ bị cổng giám định trả về</a:t>
-            </a:r>
-            <a:endParaRPr lang="en-US" sz="1500" dirty="0"/>
-          </a:p>
-          <a:p>
-            <a:pPr marL="203200" indent="-203200">
-              <a:lnSpc>
-                <a:spcPts val="2000"/>
-              </a:lnSpc>
-              <a:spcAft>
-                <a:spcPts val="1000"/>
-              </a:spcAft>
-              <a:buSzPct val="100000"/>
-              <a:buChar char="•"/>
-            </a:pPr>
-            <a:r>
-              <a:rPr lang="en-US" sz="1500" dirty="0">
-                <a:solidFill>
-                  <a:srgbClr val="FFFFFF"/>
-                </a:solidFill>
-                <a:latin typeface="Arial" pitchFamily="34" charset="0"/>
-                <a:ea typeface="Arial" pitchFamily="34" charset="-122"/>
-                <a:cs typeface="Arial" pitchFamily="34" charset="-120"/>
-              </a:rPr>
-              <a:t>Thời gian sửa một hồ sơ lỗi</a:t>
-            </a:r>
-            <a:endParaRPr lang="en-US" sz="1500" dirty="0"/>
-          </a:p>
-          <a:p>
-            <a:pPr marL="203200" indent="-203200">
-              <a:lnSpc>
-                <a:spcPts val="2000"/>
-              </a:lnSpc>
-              <a:spcAft>
-                <a:spcPts val="1000"/>
-              </a:spcAft>
-              <a:buSzPct val="100000"/>
-              <a:buChar char="•"/>
-            </a:pPr>
-            <a:r>
-              <a:rPr lang="en-US" sz="1500" dirty="0">
-                <a:solidFill>
-                  <a:srgbClr val="FFFFFF"/>
-                </a:solidFill>
-                <a:latin typeface="Arial" pitchFamily="34" charset="0"/>
-                <a:ea typeface="Arial" pitchFamily="34" charset="-122"/>
-                <a:cs typeface="Arial" pitchFamily="34" charset="-120"/>
-              </a:rPr>
-              <a:t>Số hồ sơ tồn đọng theo tuổi</a:t>
-            </a:r>
-            <a:endParaRPr lang="en-US" sz="1500" dirty="0"/>
-          </a:p>
-        </p:txBody>
-      </p:sp>
-      <p:sp>
-        <p:nvSpPr>
-          <p:cNvPr id="19" name="Text 17"/>
-          <p:cNvSpPr txBox="1"/>
-          <p:nvPr/>
-        </p:nvSpPr>
-        <p:spPr>
-          <a:xfrm>
-            <a:off x="7498080" y="4343400"/>
-            <a:ext cx="3779215" cy="731520"/>
+        </p:txBody>
+      </p:sp>
+      <p:sp>
+        <p:nvSpPr>
+          <p:cNvPr id="23" name="Text 21"/>
+          <p:cNvSpPr txBox="1"/>
+          <p:nvPr/>
+        </p:nvSpPr>
+        <p:spPr>
+          <a:xfrm>
+            <a:off x="6507328" y="5212080"/>
+            <a:ext cx="2156384" cy="640080"/>
           </a:xfrm>
           <a:prstGeom prst="rect">
             <a:avLst/>
@@ -12296,12 +14395,12 @@
           <a:p>
             <a:pPr indent="0" marL="0">
               <a:lnSpc>
-                <a:spcPts val="1800"/>
+                <a:spcPts val="1700"/>
               </a:lnSpc>
               <a:buNone/>
             </a:pPr>
             <a:r>
-              <a:rPr lang="en-US" sz="1300" i="1" dirty="0">
+              <a:rPr lang="en-US" sz="1250" dirty="0">
                 <a:solidFill>
                   <a:srgbClr val="A9BCD6"/>
                 </a:solidFill>
@@ -12309,54 +14408,135 @@
                 <a:ea typeface="Arial" pitchFamily="34" charset="-122"/>
                 <a:cs typeface="Arial" pitchFamily="34" charset="-120"/>
               </a:rPr>
-              <a:t>Kết thúc thí điểm: báo cáo số liệu để lãnh đạo quyết định nhân rộng.</a:t>
-            </a:r>
-            <a:endParaRPr lang="en-US" sz="1300" dirty="0"/>
-          </a:p>
-        </p:txBody>
-      </p:sp>
-      <p:sp>
-        <p:nvSpPr>
-          <p:cNvPr id="20" name="Text 18"/>
-          <p:cNvSpPr txBox="1"/>
-          <p:nvPr/>
-        </p:nvSpPr>
-        <p:spPr>
-          <a:xfrm>
-            <a:off x="640080" y="5623560"/>
-            <a:ext cx="10911535" cy="384048"/>
-          </a:xfrm>
-          <a:prstGeom prst="rect">
-            <a:avLst/>
-          </a:prstGeom>
-          <a:noFill/>
-          <a:ln/>
-        </p:spPr>
-        <p:txBody>
-          <a:bodyPr wrap="square" lIns="0" tIns="0" rIns="0" bIns="0" rtlCol="0" anchor="ctr"/>
-          <a:lstStyle/>
-          <a:p>
-            <a:pPr algn="ctr" indent="0" marL="0">
-              <a:buNone/>
-            </a:pPr>
-            <a:r>
-              <a:rPr lang="en-US" sz="1600" dirty="0">
-                <a:solidFill>
-                  <a:srgbClr val="FBBF24"/>
-                </a:solidFill>
-                <a:latin typeface="Arial" pitchFamily="34" charset="0"/>
-                <a:ea typeface="Arial" pitchFamily="34" charset="-122"/>
-                <a:cs typeface="Arial" pitchFamily="34" charset="-120"/>
-              </a:rPr>
-              <a:t>Hôm nay chỉ cần một quyết định: cho phép thí điểm</a:t>
-            </a:r>
-            <a:endParaRPr lang="en-US" sz="1600" dirty="0"/>
-          </a:p>
-        </p:txBody>
-      </p:sp>
-      <p:sp>
-        <p:nvSpPr>
-          <p:cNvPr id="22" name="Text 19"/>
+              <a:t>Mở rộng theo khoa, đào tạo người dùng nòng cốt</a:t>
+            </a:r>
+            <a:endParaRPr lang="en-US" sz="1250" dirty="0"/>
+          </a:p>
+        </p:txBody>
+      </p:sp>
+      <p:sp>
+        <p:nvSpPr>
+          <p:cNvPr id="24" name="Shape 22"/>
+          <p:cNvSpPr/>
+          <p:nvPr/>
+        </p:nvSpPr>
+        <p:spPr>
+          <a:xfrm>
+            <a:off x="8892311" y="4572000"/>
+            <a:ext cx="2659304" cy="548640"/>
+          </a:xfrm>
+          <a:prstGeom prst="chevron">
+            <a:avLst/>
+          </a:prstGeom>
+          <a:solidFill>
+            <a:srgbClr val="1F6B45"/>
+          </a:solidFill>
+          <a:ln w="12700">
+            <a:solidFill>
+              <a:srgbClr val="0B1A30"/>
+            </a:solidFill>
+            <a:prstDash val="solid"/>
+          </a:ln>
+        </p:spPr>
+      </p:sp>
+      <p:sp>
+        <p:nvSpPr>
+          <p:cNvPr id="25" name="Text 23"/>
+          <p:cNvSpPr txBox="1"/>
+          <p:nvPr/>
+        </p:nvSpPr>
+        <p:spPr>
+          <a:xfrm>
+            <a:off x="9258071" y="4572000"/>
+            <a:ext cx="2202104" cy="548640"/>
+          </a:xfrm>
+          <a:prstGeom prst="rect">
+            <a:avLst/>
+          </a:prstGeom>
+          <a:noFill/>
+          <a:ln/>
+        </p:spPr>
+        <p:txBody>
+          <a:bodyPr wrap="square" lIns="0" tIns="0" rIns="0" bIns="0" rtlCol="0" anchor="ctr"/>
+          <a:lstStyle/>
+          <a:p>
+            <a:pPr indent="0" marL="0">
+              <a:buNone/>
+            </a:pPr>
+            <a:r>
+              <a:rPr lang="en-US" sz="1500" b="1" dirty="0">
+                <a:solidFill>
+                  <a:srgbClr val="FFFFFF"/>
+                </a:solidFill>
+                <a:latin typeface="Arial" pitchFamily="34" charset="0"/>
+                <a:ea typeface="Arial" pitchFamily="34" charset="-122"/>
+                <a:cs typeface="Arial" pitchFamily="34" charset="-120"/>
+              </a:rPr>
+              <a:t>Thường quy  </a:t>
+            </a:r>
+            <a:pPr indent="0" marL="0">
+              <a:buNone/>
+            </a:pPr>
+            <a:r>
+              <a:rPr lang="en-US" sz="1250" dirty="0">
+                <a:solidFill>
+                  <a:srgbClr val="4ADE80"/>
+                </a:solidFill>
+                <a:latin typeface="Arial" pitchFamily="34" charset="0"/>
+                <a:ea typeface="Arial" pitchFamily="34" charset="-122"/>
+                <a:cs typeface="Arial" pitchFamily="34" charset="-120"/>
+              </a:rPr>
+              <a:t>sau ổn định</a:t>
+            </a:r>
+            <a:endParaRPr lang="en-US" sz="1500" dirty="0"/>
+          </a:p>
+        </p:txBody>
+      </p:sp>
+      <p:sp>
+        <p:nvSpPr>
+          <p:cNvPr id="26" name="Text 24"/>
+          <p:cNvSpPr txBox="1"/>
+          <p:nvPr/>
+        </p:nvSpPr>
+        <p:spPr>
+          <a:xfrm>
+            <a:off x="9258071" y="5212080"/>
+            <a:ext cx="2156384" cy="640080"/>
+          </a:xfrm>
+          <a:prstGeom prst="rect">
+            <a:avLst/>
+          </a:prstGeom>
+          <a:noFill/>
+          <a:ln/>
+        </p:spPr>
+        <p:txBody>
+          <a:bodyPr wrap="square" lIns="0" tIns="0" rIns="0" bIns="0" rtlCol="0" anchor="t"/>
+          <a:lstStyle/>
+          <a:p>
+            <a:pPr indent="0" marL="0">
+              <a:lnSpc>
+                <a:spcPts val="1700"/>
+              </a:lnSpc>
+              <a:buNone/>
+            </a:pPr>
+            <a:r>
+              <a:rPr lang="en-US" sz="1250" dirty="0">
+                <a:solidFill>
+                  <a:srgbClr val="A9BCD6"/>
+                </a:solidFill>
+                <a:latin typeface="Arial" pitchFamily="34" charset="0"/>
+                <a:ea typeface="Arial" pitchFamily="34" charset="-122"/>
+                <a:cs typeface="Arial" pitchFamily="34" charset="-120"/>
+              </a:rPr>
+              <a:t>Bật tự gửi cổng, đưa vào quy chế</a:t>
+            </a:r>
+            <a:endParaRPr lang="en-US" sz="1250" dirty="0"/>
+          </a:p>
+        </p:txBody>
+      </p:sp>
+      <p:sp>
+        <p:nvSpPr>
+          <p:cNvPr id="28" name="Text 25"/>
           <p:cNvSpPr txBox="1"/>
           <p:nvPr/>
         </p:nvSpPr>
@@ -12387,7 +14567,7 @@
                 <a:ea typeface="Arial" pitchFamily="34" charset="-122"/>
                 <a:cs typeface="Arial" pitchFamily="34" charset="-120"/>
               </a:rPr>
-              <a:t>GIẢI PHÁP TIỀN GIÁM ĐỊNH  ·  09 / 10</a:t>
+              <a:t>GIẢI PHÁP TIỀN GIÁM ĐỊNH  ·  09 / 12</a:t>
             </a:r>
             <a:endParaRPr lang="en-US" sz="950" dirty="0"/>
           </a:p>
